--- a/output/BACKTRACK_KEIC_2026_Embedded.pptx
+++ b/output/BACKTRACK_KEIC_2026_Embedded.pptx
@@ -6710,7 +6710,139 @@
       </p:grpSp>
       <p:sp>
         <p:nvSpPr>
-          <p:cNvPr name="TextBox 5" id="5"/>
+          <p:cNvPr name="Freeform 5" id="5"/>
+          <p:cNvSpPr/>
+          <p:nvPr/>
+        </p:nvSpPr>
+        <p:spPr>
+          <a:xfrm>
+            <a:off x="1714500" y="4476750"/>
+            <a:ext cx="8763000" cy="914864"/>
+          </a:xfrm>
+          <a:custGeom>
+            <a:avLst/>
+            <a:gdLst/>
+            <a:ahLst/>
+            <a:cxnLst/>
+            <a:rect r="r" b="b" t="t" l="l"/>
+            <a:pathLst>
+              <a:path h="914864" w="8763000">
+                <a:moveTo>
+                  <a:pt x="0" y="0"/>
+                </a:moveTo>
+                <a:quadBezTo>
+                  <a:pt x="4381500" y="1829728"/>
+                  <a:pt x="8763000" y="0"/>
+                </a:quadBezTo>
+              </a:path>
+            </a:pathLst>
+          </a:custGeom>
+          <a:ln cap="rnd" w="66675">
+            <a:solidFill>
+              <a:srgbClr val="C96331"/>
+            </a:solidFill>
+            <a:prstDash val="solid"/>
+            <a:headEnd type="oval" len="lg" w="lg"/>
+            <a:tailEnd type="arrow" len="sm" w="med"/>
+          </a:ln>
+        </p:spPr>
+      </p:sp>
+      <p:grpSp>
+        <p:nvGrpSpPr>
+          <p:cNvPr name="Group 6" id="6"/>
+          <p:cNvGrpSpPr/>
+          <p:nvPr/>
+        </p:nvGrpSpPr>
+        <p:grpSpPr>
+          <a:xfrm rot="0">
+            <a:off x="5962650" y="5248275"/>
+            <a:ext cx="266700" cy="266700"/>
+            <a:chOff x="0" y="0"/>
+            <a:chExt cx="105363" cy="105363"/>
+          </a:xfrm>
+        </p:grpSpPr>
+        <p:sp>
+          <p:nvSpPr>
+            <p:cNvPr name="Freeform 7" id="7"/>
+            <p:cNvSpPr/>
+            <p:nvPr/>
+          </p:nvSpPr>
+          <p:spPr>
+            <a:xfrm flipH="false" flipV="false" rot="0">
+              <a:off x="0" y="0"/>
+              <a:ext cx="105363" cy="105363"/>
+            </a:xfrm>
+            <a:custGeom>
+              <a:avLst/>
+              <a:gdLst/>
+              <a:ahLst/>
+              <a:cxnLst/>
+              <a:rect r="r" b="b" t="t" l="l"/>
+              <a:pathLst>
+                <a:path h="105363" w="105363">
+                  <a:moveTo>
+                    <a:pt x="52681" y="0"/>
+                  </a:moveTo>
+                  <a:cubicBezTo>
+                    <a:pt x="23586" y="0"/>
+                    <a:pt x="0" y="23586"/>
+                    <a:pt x="0" y="52681"/>
+                  </a:cubicBezTo>
+                  <a:cubicBezTo>
+                    <a:pt x="0" y="81777"/>
+                    <a:pt x="23586" y="105363"/>
+                    <a:pt x="52681" y="105363"/>
+                  </a:cubicBezTo>
+                  <a:cubicBezTo>
+                    <a:pt x="81777" y="105363"/>
+                    <a:pt x="105363" y="81777"/>
+                    <a:pt x="105363" y="52681"/>
+                  </a:cubicBezTo>
+                  <a:cubicBezTo>
+                    <a:pt x="105363" y="23586"/>
+                    <a:pt x="81777" y="0"/>
+                    <a:pt x="52681" y="0"/>
+                  </a:cubicBezTo>
+                  <a:close/>
+                </a:path>
+              </a:pathLst>
+            </a:custGeom>
+            <a:solidFill>
+              <a:srgbClr val="C96331"/>
+            </a:solidFill>
+          </p:spPr>
+        </p:sp>
+        <p:sp>
+          <p:nvSpPr>
+            <p:cNvPr name="TextBox 8" id="8"/>
+            <p:cNvSpPr txBox="true"/>
+            <p:nvPr/>
+          </p:nvSpPr>
+          <p:spPr>
+            <a:xfrm>
+              <a:off x="9878" y="9878"/>
+              <a:ext cx="85607" cy="85607"/>
+            </a:xfrm>
+            <a:prstGeom prst="rect">
+              <a:avLst/>
+            </a:prstGeom>
+          </p:spPr>
+          <p:txBody>
+            <a:bodyPr anchor="ctr" rtlCol="false" tIns="50800" lIns="50800" bIns="50800" rIns="50800"/>
+            <a:lstStyle/>
+            <a:p>
+              <a:pPr algn="ctr">
+                <a:lnSpc>
+                  <a:spcPts val="1372"/>
+                </a:lnSpc>
+              </a:pPr>
+            </a:p>
+          </p:txBody>
+        </p:sp>
+      </p:grpSp>
+      <p:sp>
+        <p:nvSpPr>
+          <p:cNvPr name="TextBox 9" id="9"/>
           <p:cNvSpPr txBox="true"/>
           <p:nvPr/>
         </p:nvSpPr>
@@ -6751,7 +6883,7 @@
       </p:sp>
       <p:sp>
         <p:nvSpPr>
-          <p:cNvPr name="TextBox 6" id="6"/>
+          <p:cNvPr name="TextBox 10" id="10"/>
           <p:cNvSpPr txBox="true"/>
           <p:nvPr/>
         </p:nvSpPr>
@@ -6792,14 +6924,14 @@
       </p:sp>
       <p:sp>
         <p:nvSpPr>
-          <p:cNvPr name="TextBox 7" id="7"/>
+          <p:cNvPr name="TextBox 11" id="11"/>
           <p:cNvSpPr txBox="true"/>
           <p:nvPr/>
         </p:nvSpPr>
         <p:spPr>
           <a:xfrm rot="0">
-            <a:off x="609600" y="1924050"/>
-            <a:ext cx="10972800" cy="824484"/>
+            <a:off x="609600" y="1057275"/>
+            <a:ext cx="10972800" cy="674624"/>
           </a:xfrm>
           <a:prstGeom prst="rect">
             <a:avLst/>
@@ -6813,11 +6945,11 @@
           <a:p>
             <a:pPr algn="l">
               <a:lnSpc>
-                <a:spcPts val="6588"/>
+                <a:spcPts val="5368"/>
               </a:lnSpc>
             </a:pPr>
             <a:r>
-              <a:rPr lang="en-US" b="1" sz="5400">
+              <a:rPr lang="en-US" b="1" sz="4400">
                 <a:solidFill>
                   <a:srgbClr val="151521"/>
                 </a:solidFill>
@@ -6826,21 +6958,21 @@
                 <a:cs typeface="DM Sans"/>
                 <a:sym typeface="DM Sans"/>
               </a:rPr>
-              <a:t>Stuck on one step.</a:t>
-            </a:r>
-          </a:p>
-        </p:txBody>
-      </p:sp>
-      <p:sp>
-        <p:nvSpPr>
-          <p:cNvPr name="TextBox 8" id="8"/>
+              <a:t>Find the missing skill.</a:t>
+            </a:r>
+          </a:p>
+        </p:txBody>
+      </p:sp>
+      <p:sp>
+        <p:nvSpPr>
+          <p:cNvPr name="TextBox 12" id="12"/>
           <p:cNvSpPr txBox="true"/>
           <p:nvPr/>
         </p:nvSpPr>
         <p:spPr>
           <a:xfrm rot="0">
-            <a:off x="609600" y="2867025"/>
-            <a:ext cx="10972800" cy="824484"/>
+            <a:off x="609600" y="1743075"/>
+            <a:ext cx="10972800" cy="674624"/>
           </a:xfrm>
           <a:prstGeom prst="rect">
             <a:avLst/>
@@ -6854,11 +6986,11 @@
           <a:p>
             <a:pPr algn="l">
               <a:lnSpc>
-                <a:spcPts val="6588"/>
+                <a:spcPts val="5368"/>
               </a:lnSpc>
             </a:pPr>
             <a:r>
-              <a:rPr lang="en-US" b="1" sz="5400">
+              <a:rPr lang="en-US" b="1" sz="4400">
                 <a:solidFill>
                   <a:srgbClr val="5753FA"/>
                 </a:solidFill>
@@ -6867,21 +6999,21 @@
                 <a:cs typeface="DM Sans"/>
                 <a:sym typeface="DM Sans"/>
               </a:rPr>
-              <a:t>Lost in whole lessons.</a:t>
-            </a:r>
-          </a:p>
-        </p:txBody>
-      </p:sp>
-      <p:sp>
-        <p:nvSpPr>
-          <p:cNvPr name="TextBox 9" id="9"/>
+              <a:t>Get back to today’s lesson.</a:t>
+            </a:r>
+          </a:p>
+        </p:txBody>
+      </p:sp>
+      <p:sp>
+        <p:nvSpPr>
+          <p:cNvPr name="TextBox 13" id="13"/>
           <p:cNvSpPr txBox="true"/>
           <p:nvPr/>
         </p:nvSpPr>
         <p:spPr>
           <a:xfrm rot="0">
-            <a:off x="609600" y="4391025"/>
-            <a:ext cx="10972800" cy="393573"/>
+            <a:off x="609600" y="2733675"/>
+            <a:ext cx="10972800" cy="651891"/>
           </a:xfrm>
           <a:prstGeom prst="rect">
             <a:avLst/>
@@ -6895,11 +7027,11 @@
           <a:p>
             <a:pPr algn="l">
               <a:lnSpc>
-                <a:spcPts val="3111"/>
+                <a:spcPts val="2562"/>
               </a:lnSpc>
             </a:pPr>
             <a:r>
-              <a:rPr lang="en-US" sz="2550">
+              <a:rPr lang="en-US" sz="2100">
                 <a:solidFill>
                   <a:srgbClr val="536073"/>
                 </a:solidFill>
@@ -6908,21 +7040,40 @@
                 <a:cs typeface="DM Sans"/>
                 <a:sym typeface="DM Sans"/>
               </a:rPr>
-              <a:t>Find the step. Get a focused Khan repair. Return to your task.</a:t>
-            </a:r>
-          </a:p>
-        </p:txBody>
-      </p:sp>
-      <p:sp>
-        <p:nvSpPr>
-          <p:cNvPr name="TextBox 10" id="10"/>
+              <a:t>THE PROBLEM</a:t>
+            </a:r>
+          </a:p>
+          <a:p>
+            <a:pPr algn="l">
+              <a:lnSpc>
+                <a:spcPts val="2562"/>
+              </a:lnSpc>
+            </a:pPr>
+            <a:r>
+              <a:rPr lang="en-US" sz="2100">
+                <a:solidFill>
+                  <a:srgbClr val="536073"/>
+                </a:solidFill>
+                <a:latin typeface="DM Sans"/>
+                <a:ea typeface="DM Sans"/>
+                <a:cs typeface="DM Sans"/>
+                <a:sym typeface="DM Sans"/>
+              </a:rPr>
+              <a:t>A student gets stuck, but doesn’t know which earlier skill to review.</a:t>
+            </a:r>
+          </a:p>
+        </p:txBody>
+      </p:sp>
+      <p:sp>
+        <p:nvSpPr>
+          <p:cNvPr name="TextBox 14" id="14"/>
           <p:cNvSpPr txBox="true"/>
           <p:nvPr/>
         </p:nvSpPr>
         <p:spPr>
           <a:xfrm rot="0">
-            <a:off x="609600" y="6105525"/>
-            <a:ext cx="9525000" cy="262318"/>
+            <a:off x="609600" y="6448425"/>
+            <a:ext cx="9525000" cy="215519"/>
           </a:xfrm>
           <a:prstGeom prst="rect">
             <a:avLst/>
@@ -6936,11 +7087,11 @@
           <a:p>
             <a:pPr algn="l">
               <a:lnSpc>
-                <a:spcPts val="2104"/>
+                <a:spcPts val="1708"/>
               </a:lnSpc>
             </a:pPr>
             <a:r>
-              <a:rPr lang="en-US" sz="1725">
+              <a:rPr lang="en-US" sz="1400">
                 <a:solidFill>
                   <a:srgbClr val="536073"/>
                 </a:solidFill>
@@ -6950,6 +7101,186 @@
                 <a:sym typeface="DM Sans"/>
               </a:rPr>
               <a:t>University of the Philippines Manila</a:t>
+            </a:r>
+          </a:p>
+        </p:txBody>
+      </p:sp>
+      <p:sp>
+        <p:nvSpPr>
+          <p:cNvPr name="TextBox 15" id="15"/>
+          <p:cNvSpPr txBox="true"/>
+          <p:nvPr/>
+        </p:nvSpPr>
+        <p:spPr>
+          <a:xfrm rot="0">
+            <a:off x="285750" y="3695700"/>
+            <a:ext cx="2857500" cy="614045"/>
+          </a:xfrm>
+          <a:prstGeom prst="rect">
+            <a:avLst/>
+          </a:prstGeom>
+        </p:spPr>
+        <p:txBody>
+          <a:bodyPr anchor="t" rtlCol="false" tIns="0" lIns="0" bIns="0" rIns="0">
+            <a:spAutoFit/>
+          </a:bodyPr>
+          <a:lstStyle/>
+          <a:p>
+            <a:pPr algn="ctr">
+              <a:lnSpc>
+                <a:spcPts val="2440"/>
+              </a:lnSpc>
+            </a:pPr>
+            <a:r>
+              <a:rPr lang="en-US" sz="2000" b="1">
+                <a:solidFill>
+                  <a:srgbClr val="536073"/>
+                </a:solidFill>
+                <a:latin typeface="DM Sans"/>
+                <a:ea typeface="DM Sans"/>
+                <a:cs typeface="DM Sans"/>
+                <a:sym typeface="DM Sans"/>
+              </a:rPr>
+              <a:t>Check today’s</a:t>
+            </a:r>
+          </a:p>
+          <a:p>
+            <a:pPr algn="ctr">
+              <a:lnSpc>
+                <a:spcPts val="2440"/>
+              </a:lnSpc>
+            </a:pPr>
+            <a:r>
+              <a:rPr lang="en-US" b="1" sz="2000">
+                <a:solidFill>
+                  <a:srgbClr val="536073"/>
+                </a:solidFill>
+                <a:latin typeface="DM Sans"/>
+                <a:ea typeface="DM Sans"/>
+                <a:cs typeface="DM Sans"/>
+                <a:sym typeface="DM Sans"/>
+              </a:rPr>
+              <a:t>task</a:t>
+            </a:r>
+          </a:p>
+        </p:txBody>
+      </p:sp>
+      <p:sp>
+        <p:nvSpPr>
+          <p:cNvPr name="TextBox 16" id="16"/>
+          <p:cNvSpPr txBox="true"/>
+          <p:nvPr/>
+        </p:nvSpPr>
+        <p:spPr>
+          <a:xfrm rot="0">
+            <a:off x="4000500" y="5562600"/>
+            <a:ext cx="4191000" cy="614045"/>
+          </a:xfrm>
+          <a:prstGeom prst="rect">
+            <a:avLst/>
+          </a:prstGeom>
+        </p:spPr>
+        <p:txBody>
+          <a:bodyPr anchor="t" rtlCol="false" tIns="0" lIns="0" bIns="0" rIns="0">
+            <a:spAutoFit/>
+          </a:bodyPr>
+          <a:lstStyle/>
+          <a:p>
+            <a:pPr algn="ctr">
+              <a:lnSpc>
+                <a:spcPts val="2440"/>
+              </a:lnSpc>
+            </a:pPr>
+            <a:r>
+              <a:rPr lang="en-US" sz="2000" b="1">
+                <a:solidFill>
+                  <a:srgbClr val="536073"/>
+                </a:solidFill>
+                <a:latin typeface="DM Sans"/>
+                <a:ea typeface="DM Sans"/>
+                <a:cs typeface="DM Sans"/>
+                <a:sym typeface="DM Sans"/>
+              </a:rPr>
+              <a:t>Practice the missing skill</a:t>
+            </a:r>
+          </a:p>
+          <a:p>
+            <a:pPr algn="ctr">
+              <a:lnSpc>
+                <a:spcPts val="2440"/>
+              </a:lnSpc>
+            </a:pPr>
+            <a:r>
+              <a:rPr lang="en-US" b="1" sz="2000">
+                <a:solidFill>
+                  <a:srgbClr val="536073"/>
+                </a:solidFill>
+                <a:latin typeface="DM Sans"/>
+                <a:ea typeface="DM Sans"/>
+                <a:cs typeface="DM Sans"/>
+                <a:sym typeface="DM Sans"/>
+              </a:rPr>
+              <a:t>with Khan Academy</a:t>
+            </a:r>
+          </a:p>
+        </p:txBody>
+      </p:sp>
+      <p:sp>
+        <p:nvSpPr>
+          <p:cNvPr name="TextBox 17" id="17"/>
+          <p:cNvSpPr txBox="true"/>
+          <p:nvPr/>
+        </p:nvSpPr>
+        <p:spPr>
+          <a:xfrm rot="0">
+            <a:off x="8858250" y="3695700"/>
+            <a:ext cx="3238500" cy="614045"/>
+          </a:xfrm>
+          <a:prstGeom prst="rect">
+            <a:avLst/>
+          </a:prstGeom>
+        </p:spPr>
+        <p:txBody>
+          <a:bodyPr anchor="t" rtlCol="false" tIns="0" lIns="0" bIns="0" rIns="0">
+            <a:spAutoFit/>
+          </a:bodyPr>
+          <a:lstStyle/>
+          <a:p>
+            <a:pPr algn="ctr">
+              <a:lnSpc>
+                <a:spcPts val="2440"/>
+              </a:lnSpc>
+            </a:pPr>
+            <a:r>
+              <a:rPr lang="en-US" b="1" sz="2000">
+                <a:solidFill>
+                  <a:srgbClr val="087E70"/>
+                </a:solidFill>
+                <a:latin typeface="DM Sans"/>
+                <a:ea typeface="DM Sans"/>
+                <a:cs typeface="DM Sans"/>
+                <a:sym typeface="DM Sans"/>
+              </a:rPr>
+              <a:t>Return to today’s lesson</a:t>
+            </a:r>
+          </a:p>
+          <a:p>
+            <a:pPr algn="ctr">
+              <a:lnSpc>
+                <a:spcPts val="2440"/>
+              </a:lnSpc>
+            </a:pPr>
+            <a:r>
+              <a:rPr lang="en-US" b="1" sz="2000">
+                <a:solidFill>
+                  <a:srgbClr val="087E70"/>
+                </a:solidFill>
+                <a:latin typeface="DM Sans"/>
+                <a:ea typeface="DM Sans"/>
+                <a:cs typeface="DM Sans"/>
+                <a:sym typeface="DM Sans"/>
+              </a:rPr>
+              <a:t>with a fresh check</a:t>
             </a:r>
           </a:p>
         </p:txBody>
@@ -8010,7 +8341,7 @@
                 <a:cs typeface="DM Sans"/>
                 <a:sym typeface="DM Sans"/>
               </a:rPr>
-              <a:t>The route is the reward</a:t>
+              <a:t>Skip the review you don’t need.</a:t>
             </a:r>
           </a:p>
         </p:txBody>
@@ -13081,7 +13412,7 @@
         </p:nvSpPr>
         <p:spPr>
           <a:xfrm rot="0">
-            <a:off x="609600" y="1943100"/>
+            <a:off x="609600" y="1276350"/>
             <a:ext cx="10972800" cy="1898904"/>
           </a:xfrm>
           <a:prstGeom prst="rect">
@@ -13236,6 +13567,45 @@
             </a:r>
           </a:p>
         </p:txBody>
+      </p:sp>
+      <p:sp>
+        <p:nvSpPr>
+          <p:cNvPr name="Freeform 11" id="11"/>
+          <p:cNvSpPr/>
+          <p:nvPr/>
+        </p:nvSpPr>
+        <p:spPr>
+          <a:xfrm>
+            <a:off x="1714500" y="3714750"/>
+            <a:ext cx="8763000" cy="914864"/>
+          </a:xfrm>
+          <a:custGeom>
+            <a:avLst/>
+            <a:gdLst/>
+            <a:ahLst/>
+            <a:cxnLst/>
+            <a:rect r="r" b="b" t="t" l="l"/>
+            <a:pathLst>
+              <a:path h="914864" w="8763000">
+                <a:moveTo>
+                  <a:pt x="0" y="0"/>
+                </a:moveTo>
+                <a:quadBezTo>
+                  <a:pt x="4381500" y="1829728"/>
+                  <a:pt x="8763000" y="0"/>
+                </a:quadBezTo>
+              </a:path>
+            </a:pathLst>
+          </a:custGeom>
+          <a:ln cap="rnd" w="66675">
+            <a:solidFill>
+              <a:srgbClr val="C96331"/>
+            </a:solidFill>
+            <a:prstDash val="solid"/>
+            <a:headEnd type="oval" len="lg" w="lg"/>
+            <a:tailEnd type="arrow" len="sm" w="med"/>
+          </a:ln>
+        </p:spPr>
       </p:sp>
     </p:spTree>
   </p:cSld>
@@ -14664,7 +15034,7 @@
                 <a:cs typeface="DM Sans"/>
                 <a:sym typeface="DM Sans"/>
               </a:rPr>
-              <a:t>A short repair. A clear way back.</a:t>
+              <a:t>How BACKTRACK gets a learner unstuck</a:t>
             </a:r>
           </a:p>
         </p:txBody>
@@ -15114,6 +15484,25 @@
               </a:lnSpc>
             </a:pPr>
             <a:r>
+              <a:rPr lang="en-US" sz="2175" b="1">
+                <a:solidFill>
+                  <a:srgbClr val="151521"/>
+                </a:solidFill>
+                <a:latin typeface="DM Sans"/>
+                <a:ea typeface="DM Sans"/>
+                <a:cs typeface="DM Sans"/>
+                <a:sym typeface="DM Sans"/>
+              </a:rPr>
+              <a:t>Check earlier</a:t>
+            </a:r>
+          </a:p>
+          <a:p>
+            <a:pPr algn="ctr">
+              <a:lnSpc>
+                <a:spcPts val="2653"/>
+              </a:lnSpc>
+            </a:pPr>
+            <a:r>
               <a:rPr lang="en-US" b="1" sz="2175">
                 <a:solidFill>
                   <a:srgbClr val="151521"/>
@@ -15123,7 +15512,7 @@
                 <a:cs typeface="DM Sans"/>
                 <a:sym typeface="DM Sans"/>
               </a:rPr>
-              <a:t>Find a useful earlier step</a:t>
+              <a:t>skills</a:t>
             </a:r>
           </a:p>
         </p:txBody>
@@ -15407,7 +15796,7 @@
         <p:spPr>
           <a:xfrm rot="0">
             <a:off x="6400800" y="3629025"/>
-            <a:ext cx="2286000" cy="670751"/>
+            <a:ext cx="2286000" cy="1004125"/>
           </a:xfrm>
           <a:prstGeom prst="rect">
             <a:avLst/>
@@ -15418,6 +15807,25 @@
             <a:spAutoFit/>
           </a:bodyPr>
           <a:lstStyle/>
+          <a:p>
+            <a:pPr algn="ctr">
+              <a:lnSpc>
+                <a:spcPts val="2653"/>
+              </a:lnSpc>
+            </a:pPr>
+            <a:r>
+              <a:rPr lang="en-US" sz="2175" b="1">
+                <a:solidFill>
+                  <a:srgbClr val="151521"/>
+                </a:solidFill>
+                <a:latin typeface="DM Sans"/>
+                <a:ea typeface="DM Sans"/>
+                <a:cs typeface="DM Sans"/>
+                <a:sym typeface="DM Sans"/>
+              </a:rPr>
+              <a:t>Practice the step</a:t>
+            </a:r>
+          </a:p>
           <a:p>
             <a:pPr algn="ctr">
               <a:lnSpc>
@@ -15434,7 +15842,7 @@
                 <a:cs typeface="DM Sans"/>
                 <a:sym typeface="DM Sans"/>
               </a:rPr>
-              <a:t>Learn + practise with Khan</a:t>
+              <a:t>with Khan</a:t>
             </a:r>
           </a:p>
         </p:txBody>
@@ -15736,6 +16144,25 @@
               </a:lnSpc>
             </a:pPr>
             <a:r>
+              <a:rPr lang="en-US" sz="2175" b="1">
+                <a:solidFill>
+                  <a:srgbClr val="151521"/>
+                </a:solidFill>
+                <a:latin typeface="DM Sans"/>
+                <a:ea typeface="DM Sans"/>
+                <a:cs typeface="DM Sans"/>
+                <a:sym typeface="DM Sans"/>
+              </a:rPr>
+              <a:t>Try it again with</a:t>
+            </a:r>
+          </a:p>
+          <a:p>
+            <a:pPr algn="ctr">
+              <a:lnSpc>
+                <a:spcPts val="2653"/>
+              </a:lnSpc>
+            </a:pPr>
+            <a:r>
               <a:rPr lang="en-US" b="1" sz="2175">
                 <a:solidFill>
                   <a:srgbClr val="151521"/>
@@ -15745,7 +16172,7 @@
                 <a:cs typeface="DM Sans"/>
                 <a:sym typeface="DM Sans"/>
               </a:rPr>
-              <a:t>Try a fresh current task</a:t>
+              <a:t>fresh numbers</a:t>
             </a:r>
           </a:p>
         </p:txBody>
@@ -15786,7 +16213,7 @@
                 <a:cs typeface="DM Sans"/>
                 <a:sym typeface="DM Sans"/>
               </a:rPr>
-              <a:t>Your answer shapes the route. The repair fits the missing step.</a:t>
+              <a:t>Answers choose the next step. Fresh problems check the return.</a:t>
             </a:r>
           </a:p>
         </p:txBody>

--- a/output/BACKTRACK_KEIC_2026_Embedded.pptx
+++ b/output/BACKTRACK_KEIC_2026_Embedded.pptx
@@ -6715,9 +6715,9 @@
           <p:nvPr/>
         </p:nvSpPr>
         <p:spPr>
-          <a:xfrm>
-            <a:off x="1714500" y="4476750"/>
-            <a:ext cx="8763000" cy="914864"/>
+          <a:xfrm flipH="false" flipV="false" rot="0">
+            <a:off x="1524000" y="4095750"/>
+            <a:ext cx="9715500" cy="1428750"/>
           </a:xfrm>
           <a:custGeom>
             <a:avLst/>
@@ -6726,25 +6726,38 @@
             <a:cxnLst/>
             <a:rect r="r" b="b" t="t" l="l"/>
             <a:pathLst>
-              <a:path h="914864" w="8763000">
+              <a:path h="1428750" w="9715500">
                 <a:moveTo>
                   <a:pt x="0" y="0"/>
                 </a:moveTo>
-                <a:quadBezTo>
-                  <a:pt x="4381500" y="1829728"/>
-                  <a:pt x="8763000" y="0"/>
-                </a:quadBezTo>
+                <a:lnTo>
+                  <a:pt x="9715500" y="0"/>
+                </a:lnTo>
+                <a:lnTo>
+                  <a:pt x="9715500" y="1428750"/>
+                </a:lnTo>
+                <a:lnTo>
+                  <a:pt x="0" y="1428750"/>
+                </a:lnTo>
+                <a:lnTo>
+                  <a:pt x="0" y="0"/>
+                </a:lnTo>
+                <a:close/>
               </a:path>
             </a:pathLst>
           </a:custGeom>
-          <a:ln cap="rnd" w="66675">
-            <a:solidFill>
-              <a:srgbClr val="C96331"/>
-            </a:solidFill>
-            <a:prstDash val="solid"/>
-            <a:headEnd type="oval" len="lg" w="lg"/>
-            <a:tailEnd type="arrow" len="sm" w="med"/>
-          </a:ln>
+          <a:blipFill>
+            <a:blip r:embed="rId4">
+              <a:extLst>
+                <a:ext uri="{96DAC541-7B7A-43D3-8B79-37D633B846F1}">
+                  <asvg:svgBlip xmlns:asvg="http://schemas.microsoft.com/office/drawing/2016/SVG/main" r:embed="rId5"/>
+                </a:ext>
+              </a:extLst>
+            </a:blip>
+            <a:stretch>
+              <a:fillRect l="0" t="0" r="0" b="0"/>
+            </a:stretch>
+          </a:blipFill>
         </p:spPr>
       </p:sp>
       <p:grpSp>
@@ -6755,7 +6768,7 @@
         </p:nvGrpSpPr>
         <p:grpSpPr>
           <a:xfrm rot="0">
-            <a:off x="5962650" y="5248275"/>
+            <a:off x="5581650" y="5295900"/>
             <a:ext cx="266700" cy="266700"/>
             <a:chOff x="0" y="0"/>
             <a:chExt cx="105363" cy="105363"/>
@@ -7113,7 +7126,7 @@
         </p:nvSpPr>
         <p:spPr>
           <a:xfrm rot="0">
-            <a:off x="285750" y="3695700"/>
+            <a:off x="285750" y="3790950"/>
             <a:ext cx="2857500" cy="614045"/>
           </a:xfrm>
           <a:prstGeom prst="rect">
@@ -7173,7 +7186,7 @@
         </p:nvSpPr>
         <p:spPr>
           <a:xfrm rot="0">
-            <a:off x="4000500" y="5562600"/>
+            <a:off x="3619500" y="5610225"/>
             <a:ext cx="4191000" cy="614045"/>
           </a:xfrm>
           <a:prstGeom prst="rect">
@@ -7233,7 +7246,7 @@
         </p:nvSpPr>
         <p:spPr>
           <a:xfrm rot="0">
-            <a:off x="8858250" y="3695700"/>
+            <a:off x="8286750" y="3467100"/>
             <a:ext cx="3238500" cy="614045"/>
           </a:xfrm>
           <a:prstGeom prst="rect">
@@ -7285,6 +7298,192 @@
           </a:p>
         </p:txBody>
       </p:sp>
+      <p:grpSp>
+        <p:nvGrpSpPr>
+          <p:cNvPr name="Group 18" id="18"/>
+          <p:cNvGrpSpPr/>
+          <p:nvPr/>
+        </p:nvGrpSpPr>
+        <p:grpSpPr>
+          <a:xfrm rot="0">
+            <a:off x="1581150" y="4438650"/>
+            <a:ext cx="266700" cy="266700"/>
+            <a:chOff x="0" y="0"/>
+            <a:chExt cx="105363" cy="105363"/>
+          </a:xfrm>
+        </p:grpSpPr>
+        <p:sp>
+          <p:nvSpPr>
+            <p:cNvPr name="Freeform 19" id="19"/>
+            <p:cNvSpPr/>
+            <p:nvPr/>
+          </p:nvSpPr>
+          <p:spPr>
+            <a:xfrm flipH="false" flipV="false" rot="0">
+              <a:off x="0" y="0"/>
+              <a:ext cx="105363" cy="105363"/>
+            </a:xfrm>
+            <a:custGeom>
+              <a:avLst/>
+              <a:gdLst/>
+              <a:ahLst/>
+              <a:cxnLst/>
+              <a:rect r="r" b="b" t="t" l="l"/>
+              <a:pathLst>
+                <a:path h="105363" w="105363">
+                  <a:moveTo>
+                    <a:pt x="52681" y="0"/>
+                  </a:moveTo>
+                  <a:cubicBezTo>
+                    <a:pt x="23586" y="0"/>
+                    <a:pt x="0" y="23586"/>
+                    <a:pt x="0" y="52681"/>
+                  </a:cubicBezTo>
+                  <a:cubicBezTo>
+                    <a:pt x="0" y="81777"/>
+                    <a:pt x="23586" y="105363"/>
+                    <a:pt x="52681" y="105363"/>
+                  </a:cubicBezTo>
+                  <a:cubicBezTo>
+                    <a:pt x="81777" y="105363"/>
+                    <a:pt x="105363" y="81777"/>
+                    <a:pt x="105363" y="52681"/>
+                  </a:cubicBezTo>
+                  <a:cubicBezTo>
+                    <a:pt x="105363" y="23586"/>
+                    <a:pt x="81777" y="0"/>
+                    <a:pt x="52681" y="0"/>
+                  </a:cubicBezTo>
+                  <a:close/>
+                </a:path>
+              </a:pathLst>
+            </a:custGeom>
+            <a:solidFill>
+              <a:srgbClr val="C96331"/>
+            </a:solidFill>
+          </p:spPr>
+        </p:sp>
+        <p:sp>
+          <p:nvSpPr>
+            <p:cNvPr name="TextBox 20" id="20"/>
+            <p:cNvSpPr txBox="true"/>
+            <p:nvPr/>
+          </p:nvSpPr>
+          <p:spPr>
+            <a:xfrm>
+              <a:off x="9878" y="9878"/>
+              <a:ext cx="85607" cy="85607"/>
+            </a:xfrm>
+            <a:prstGeom prst="rect">
+              <a:avLst/>
+            </a:prstGeom>
+          </p:spPr>
+          <p:txBody>
+            <a:bodyPr anchor="ctr" rtlCol="false" tIns="50800" lIns="50800" bIns="50800" rIns="50800"/>
+            <a:lstStyle/>
+            <a:p>
+              <a:pPr algn="ctr">
+                <a:lnSpc>
+                  <a:spcPts val="1372"/>
+                </a:lnSpc>
+              </a:pPr>
+            </a:p>
+          </p:txBody>
+        </p:sp>
+      </p:grpSp>
+      <p:grpSp>
+        <p:nvGrpSpPr>
+          <p:cNvPr name="Group 21" id="21"/>
+          <p:cNvGrpSpPr/>
+          <p:nvPr/>
+        </p:nvGrpSpPr>
+        <p:grpSpPr>
+          <a:xfrm rot="0">
+            <a:off x="9772650" y="4152900"/>
+            <a:ext cx="266700" cy="266700"/>
+            <a:chOff x="0" y="0"/>
+            <a:chExt cx="105363" cy="105363"/>
+          </a:xfrm>
+        </p:grpSpPr>
+        <p:sp>
+          <p:nvSpPr>
+            <p:cNvPr name="Freeform 22" id="22"/>
+            <p:cNvSpPr/>
+            <p:nvPr/>
+          </p:nvSpPr>
+          <p:spPr>
+            <a:xfrm flipH="false" flipV="false" rot="0">
+              <a:off x="0" y="0"/>
+              <a:ext cx="105363" cy="105363"/>
+            </a:xfrm>
+            <a:custGeom>
+              <a:avLst/>
+              <a:gdLst/>
+              <a:ahLst/>
+              <a:cxnLst/>
+              <a:rect r="r" b="b" t="t" l="l"/>
+              <a:pathLst>
+                <a:path h="105363" w="105363">
+                  <a:moveTo>
+                    <a:pt x="52681" y="0"/>
+                  </a:moveTo>
+                  <a:cubicBezTo>
+                    <a:pt x="23586" y="0"/>
+                    <a:pt x="0" y="23586"/>
+                    <a:pt x="0" y="52681"/>
+                  </a:cubicBezTo>
+                  <a:cubicBezTo>
+                    <a:pt x="0" y="81777"/>
+                    <a:pt x="23586" y="105363"/>
+                    <a:pt x="52681" y="105363"/>
+                  </a:cubicBezTo>
+                  <a:cubicBezTo>
+                    <a:pt x="81777" y="105363"/>
+                    <a:pt x="105363" y="81777"/>
+                    <a:pt x="105363" y="52681"/>
+                  </a:cubicBezTo>
+                  <a:cubicBezTo>
+                    <a:pt x="105363" y="23586"/>
+                    <a:pt x="81777" y="0"/>
+                    <a:pt x="52681" y="0"/>
+                  </a:cubicBezTo>
+                  <a:close/>
+                </a:path>
+              </a:pathLst>
+            </a:custGeom>
+            <a:solidFill>
+              <a:srgbClr val="087E70"/>
+            </a:solidFill>
+          </p:spPr>
+        </p:sp>
+        <p:sp>
+          <p:nvSpPr>
+            <p:cNvPr name="TextBox 23" id="23"/>
+            <p:cNvSpPr txBox="true"/>
+            <p:nvPr/>
+          </p:nvSpPr>
+          <p:spPr>
+            <a:xfrm>
+              <a:off x="9878" y="9878"/>
+              <a:ext cx="85607" cy="85607"/>
+            </a:xfrm>
+            <a:prstGeom prst="rect">
+              <a:avLst/>
+            </a:prstGeom>
+          </p:spPr>
+          <p:txBody>
+            <a:bodyPr anchor="ctr" rtlCol="false" tIns="50800" lIns="50800" bIns="50800" rIns="50800"/>
+            <a:lstStyle/>
+            <a:p>
+              <a:pPr algn="ctr">
+                <a:lnSpc>
+                  <a:spcPts val="1372"/>
+                </a:lnSpc>
+              </a:pPr>
+            </a:p>
+          </p:txBody>
+        </p:sp>
+      </p:grpSp>
     </p:spTree>
   </p:cSld>
   <p:clrMapOvr>
@@ -13324,7 +13523,59 @@
       </p:grpSp>
       <p:sp>
         <p:nvSpPr>
-          <p:cNvPr name="TextBox 5" id="5"/>
+          <p:cNvPr name="Freeform 5" id="5"/>
+          <p:cNvSpPr/>
+          <p:nvPr/>
+        </p:nvSpPr>
+        <p:spPr>
+          <a:xfrm flipH="false" flipV="false" rot="0">
+            <a:off x="1619250" y="3238500"/>
+            <a:ext cx="9525000" cy="1400735"/>
+          </a:xfrm>
+          <a:custGeom>
+            <a:avLst/>
+            <a:gdLst/>
+            <a:ahLst/>
+            <a:cxnLst/>
+            <a:rect r="r" b="b" t="t" l="l"/>
+            <a:pathLst>
+              <a:path h="1400735" w="9525000">
+                <a:moveTo>
+                  <a:pt x="0" y="0"/>
+                </a:moveTo>
+                <a:lnTo>
+                  <a:pt x="9525000" y="0"/>
+                </a:lnTo>
+                <a:lnTo>
+                  <a:pt x="9525000" y="1400735"/>
+                </a:lnTo>
+                <a:lnTo>
+                  <a:pt x="0" y="1400735"/>
+                </a:lnTo>
+                <a:lnTo>
+                  <a:pt x="0" y="0"/>
+                </a:lnTo>
+                <a:close/>
+              </a:path>
+            </a:pathLst>
+          </a:custGeom>
+          <a:blipFill>
+            <a:blip r:embed="rId4">
+              <a:extLst>
+                <a:ext uri="{96DAC541-7B7A-43D3-8B79-37D633B846F1}">
+                  <asvg:svgBlip xmlns:asvg="http://schemas.microsoft.com/office/drawing/2016/SVG/main" r:embed="rId5"/>
+                </a:ext>
+              </a:extLst>
+            </a:blip>
+            <a:stretch>
+              <a:fillRect l="0" t="0" r="0" b="0"/>
+            </a:stretch>
+          </a:blipFill>
+        </p:spPr>
+      </p:sp>
+      <p:sp>
+        <p:nvSpPr>
+          <p:cNvPr name="TextBox 6" id="6"/>
           <p:cNvSpPr txBox="true"/>
           <p:nvPr/>
         </p:nvSpPr>
@@ -13365,7 +13616,7 @@
       </p:sp>
       <p:sp>
         <p:nvSpPr>
-          <p:cNvPr name="TextBox 6" id="6"/>
+          <p:cNvPr name="TextBox 7" id="7"/>
           <p:cNvSpPr txBox="true"/>
           <p:nvPr/>
         </p:nvSpPr>
@@ -13406,7 +13657,7 @@
       </p:sp>
       <p:sp>
         <p:nvSpPr>
-          <p:cNvPr name="TextBox 7" id="7"/>
+          <p:cNvPr name="TextBox 8" id="8"/>
           <p:cNvSpPr txBox="true"/>
           <p:nvPr/>
         </p:nvSpPr>
@@ -13424,6 +13675,25 @@
             <a:spAutoFit/>
           </a:bodyPr>
           <a:lstStyle/>
+          <a:p>
+            <a:pPr algn="l">
+              <a:lnSpc>
+                <a:spcPts val="7503"/>
+              </a:lnSpc>
+            </a:pPr>
+            <a:r>
+              <a:rPr lang="en-US" sz="6150" b="1">
+                <a:solidFill>
+                  <a:srgbClr val="5753FA"/>
+                </a:solidFill>
+                <a:latin typeface="DM Sans"/>
+                <a:ea typeface="DM Sans"/>
+                <a:cs typeface="DM Sans"/>
+                <a:sym typeface="DM Sans"/>
+              </a:rPr>
+              <a:t>A route back to</a:t>
+            </a:r>
+          </a:p>
           <a:p>
             <a:pPr algn="l">
               <a:lnSpc>
@@ -13440,14 +13710,14 @@
                 <a:cs typeface="DM Sans"/>
                 <a:sym typeface="DM Sans"/>
               </a:rPr>
-              <a:t>A route back to today’s lesson.</a:t>
-            </a:r>
-          </a:p>
-        </p:txBody>
-      </p:sp>
-      <p:sp>
-        <p:nvSpPr>
-          <p:cNvPr name="TextBox 8" id="8"/>
+              <a:t>today’s lesson.</a:t>
+            </a:r>
+          </a:p>
+        </p:txBody>
+      </p:sp>
+      <p:sp>
+        <p:nvSpPr>
+          <p:cNvPr name="TextBox 9" id="9"/>
           <p:cNvSpPr txBox="true"/>
           <p:nvPr/>
         </p:nvSpPr>
@@ -13488,7 +13758,7 @@
       </p:sp>
       <p:sp>
         <p:nvSpPr>
-          <p:cNvPr name="TextBox 9" id="9"/>
+          <p:cNvPr name="TextBox 10" id="10"/>
           <p:cNvSpPr txBox="true"/>
           <p:nvPr/>
         </p:nvSpPr>
@@ -13529,7 +13799,7 @@
       </p:sp>
       <p:sp>
         <p:nvSpPr>
-          <p:cNvPr name="TextBox 10" id="10"/>
+          <p:cNvPr name="TextBox 11" id="11"/>
           <p:cNvSpPr txBox="true"/>
           <p:nvPr/>
         </p:nvSpPr>
@@ -13567,45 +13837,6 @@
             </a:r>
           </a:p>
         </p:txBody>
-      </p:sp>
-      <p:sp>
-        <p:nvSpPr>
-          <p:cNvPr name="Freeform 11" id="11"/>
-          <p:cNvSpPr/>
-          <p:nvPr/>
-        </p:nvSpPr>
-        <p:spPr>
-          <a:xfrm>
-            <a:off x="1714500" y="3714750"/>
-            <a:ext cx="8763000" cy="914864"/>
-          </a:xfrm>
-          <a:custGeom>
-            <a:avLst/>
-            <a:gdLst/>
-            <a:ahLst/>
-            <a:cxnLst/>
-            <a:rect r="r" b="b" t="t" l="l"/>
-            <a:pathLst>
-              <a:path h="914864" w="8763000">
-                <a:moveTo>
-                  <a:pt x="0" y="0"/>
-                </a:moveTo>
-                <a:quadBezTo>
-                  <a:pt x="4381500" y="1829728"/>
-                  <a:pt x="8763000" y="0"/>
-                </a:quadBezTo>
-              </a:path>
-            </a:pathLst>
-          </a:custGeom>
-          <a:ln cap="rnd" w="66675">
-            <a:solidFill>
-              <a:srgbClr val="C96331"/>
-            </a:solidFill>
-            <a:prstDash val="solid"/>
-            <a:headEnd type="oval" len="lg" w="lg"/>
-            <a:tailEnd type="arrow" len="sm" w="med"/>
-          </a:ln>
-        </p:spPr>
       </p:sp>
     </p:spTree>
   </p:cSld>
@@ -15155,7 +15386,7 @@
         <p:spPr>
           <a:xfrm rot="0">
             <a:off x="609600" y="3629025"/>
-            <a:ext cx="2286000" cy="337375"/>
+            <a:ext cx="2286000" cy="670751"/>
           </a:xfrm>
           <a:prstGeom prst="rect">
             <a:avLst/>
@@ -15166,6 +15397,25 @@
             <a:spAutoFit/>
           </a:bodyPr>
           <a:lstStyle/>
+          <a:p>
+            <a:pPr algn="ctr">
+              <a:lnSpc>
+                <a:spcPts val="2653"/>
+              </a:lnSpc>
+            </a:pPr>
+            <a:r>
+              <a:rPr lang="en-US" sz="2175" b="1">
+                <a:solidFill>
+                  <a:srgbClr val="151521"/>
+                </a:solidFill>
+                <a:latin typeface="DM Sans"/>
+                <a:ea typeface="DM Sans"/>
+                <a:cs typeface="DM Sans"/>
+                <a:sym typeface="DM Sans"/>
+              </a:rPr>
+              <a:t>Try today’s</a:t>
+            </a:r>
+          </a:p>
           <a:p>
             <a:pPr algn="ctr">
               <a:lnSpc>
@@ -15182,7 +15432,7 @@
                 <a:cs typeface="DM Sans"/>
                 <a:sym typeface="DM Sans"/>
               </a:rPr>
-              <a:t>Try today’s task</a:t>
+              <a:t>task</a:t>
             </a:r>
           </a:p>
         </p:txBody>
@@ -15796,7 +16046,7 @@
         <p:spPr>
           <a:xfrm rot="0">
             <a:off x="6400800" y="3629025"/>
-            <a:ext cx="2286000" cy="1004125"/>
+            <a:ext cx="2286000" cy="670751"/>
           </a:xfrm>
           <a:prstGeom prst="rect">
             <a:avLst/>
@@ -15823,7 +16073,7 @@
                 <a:cs typeface="DM Sans"/>
                 <a:sym typeface="DM Sans"/>
               </a:rPr>
-              <a:t>Practice the step</a:t>
+              <a:t>Practice with</a:t>
             </a:r>
           </a:p>
           <a:p>
@@ -15842,7 +16092,7 @@
                 <a:cs typeface="DM Sans"/>
                 <a:sym typeface="DM Sans"/>
               </a:rPr>
-              <a:t>with Khan</a:t>
+              <a:t>Khan Academy</a:t>
             </a:r>
           </a:p>
         </p:txBody>
@@ -16349,7 +16599,458 @@
       </p:grpSp>
       <p:sp>
         <p:nvSpPr>
-          <p:cNvPr name="TextBox 5" id="5"/>
+          <p:cNvPr name="Freeform 5" id="5"/>
+          <p:cNvSpPr/>
+          <p:nvPr/>
+        </p:nvSpPr>
+        <p:spPr>
+          <a:xfrm flipH="false" flipV="false" rot="0">
+            <a:off x="609600" y="4762500"/>
+            <a:ext cx="10972800" cy="895350"/>
+          </a:xfrm>
+          <a:custGeom>
+            <a:avLst/>
+            <a:gdLst/>
+            <a:ahLst/>
+            <a:cxnLst/>
+            <a:rect r="r" b="b" t="t" l="l"/>
+            <a:pathLst>
+              <a:path h="895350" w="10972800">
+                <a:moveTo>
+                  <a:pt x="0" y="0"/>
+                </a:moveTo>
+                <a:lnTo>
+                  <a:pt x="10972800" y="0"/>
+                </a:lnTo>
+                <a:lnTo>
+                  <a:pt x="10972800" y="895350"/>
+                </a:lnTo>
+                <a:lnTo>
+                  <a:pt x="0" y="895350"/>
+                </a:lnTo>
+                <a:lnTo>
+                  <a:pt x="0" y="0"/>
+                </a:lnTo>
+                <a:close/>
+              </a:path>
+            </a:pathLst>
+          </a:custGeom>
+          <a:blipFill>
+            <a:blip r:embed="rId4">
+              <a:extLst>
+                <a:ext uri="{96DAC541-7B7A-43D3-8B79-37D633B846F1}">
+                  <asvg:svgBlip xmlns:asvg="http://schemas.microsoft.com/office/drawing/2016/SVG/main" r:embed="rId5"/>
+                </a:ext>
+              </a:extLst>
+            </a:blip>
+            <a:stretch>
+              <a:fillRect l="0" t="0" r="0" b="0"/>
+            </a:stretch>
+          </a:blipFill>
+        </p:spPr>
+      </p:sp>
+      <p:sp>
+        <p:nvSpPr>
+          <p:cNvPr name="AutoShape 6" id="6"/>
+          <p:cNvSpPr/>
+          <p:nvPr/>
+        </p:nvSpPr>
+        <p:spPr>
+          <a:xfrm>
+            <a:off x="609600" y="1381125"/>
+            <a:ext cx="10972800" cy="0"/>
+          </a:xfrm>
+          <a:prstGeom prst="line">
+            <a:avLst/>
+          </a:prstGeom>
+          <a:ln cap="flat" w="19050">
+            <a:solidFill>
+              <a:srgbClr val="CCD7E4"/>
+            </a:solidFill>
+            <a:prstDash val="solid"/>
+            <a:headEnd type="none" len="sm" w="sm"/>
+            <a:tailEnd type="none" len="sm" w="sm"/>
+          </a:ln>
+        </p:spPr>
+      </p:sp>
+      <p:grpSp>
+        <p:nvGrpSpPr>
+          <p:cNvPr name="Group 7" id="7"/>
+          <p:cNvGrpSpPr/>
+          <p:nvPr/>
+        </p:nvGrpSpPr>
+        <p:grpSpPr>
+          <a:xfrm rot="0">
+            <a:off x="609600" y="2571750"/>
+            <a:ext cx="5029200" cy="2190750"/>
+            <a:chOff x="0" y="0"/>
+            <a:chExt cx="1986844" cy="865481"/>
+          </a:xfrm>
+        </p:grpSpPr>
+        <p:sp>
+          <p:nvSpPr>
+            <p:cNvPr name="Freeform 8" id="8"/>
+            <p:cNvSpPr/>
+            <p:nvPr/>
+          </p:nvSpPr>
+          <p:spPr>
+            <a:xfrm flipH="false" flipV="false" rot="0">
+              <a:off x="0" y="0"/>
+              <a:ext cx="1986844" cy="865481"/>
+            </a:xfrm>
+            <a:custGeom>
+              <a:avLst/>
+              <a:gdLst/>
+              <a:ahLst/>
+              <a:cxnLst/>
+              <a:rect r="r" b="b" t="t" l="l"/>
+              <a:pathLst>
+                <a:path h="865481" w="1986844">
+                  <a:moveTo>
+                    <a:pt x="18473" y="0"/>
+                  </a:moveTo>
+                  <a:lnTo>
+                    <a:pt x="1968372" y="0"/>
+                  </a:lnTo>
+                  <a:cubicBezTo>
+                    <a:pt x="1973271" y="0"/>
+                    <a:pt x="1977970" y="1946"/>
+                    <a:pt x="1981434" y="5411"/>
+                  </a:cubicBezTo>
+                  <a:cubicBezTo>
+                    <a:pt x="1984898" y="8875"/>
+                    <a:pt x="1986844" y="13573"/>
+                    <a:pt x="1986844" y="18473"/>
+                  </a:cubicBezTo>
+                  <a:lnTo>
+                    <a:pt x="1986844" y="847009"/>
+                  </a:lnTo>
+                  <a:cubicBezTo>
+                    <a:pt x="1986844" y="851908"/>
+                    <a:pt x="1984898" y="856607"/>
+                    <a:pt x="1981434" y="860071"/>
+                  </a:cubicBezTo>
+                  <a:cubicBezTo>
+                    <a:pt x="1977970" y="863535"/>
+                    <a:pt x="1973271" y="865481"/>
+                    <a:pt x="1968372" y="865481"/>
+                  </a:cubicBezTo>
+                  <a:lnTo>
+                    <a:pt x="18473" y="865481"/>
+                  </a:lnTo>
+                  <a:cubicBezTo>
+                    <a:pt x="13573" y="865481"/>
+                    <a:pt x="8875" y="863535"/>
+                    <a:pt x="5411" y="860071"/>
+                  </a:cubicBezTo>
+                  <a:cubicBezTo>
+                    <a:pt x="1946" y="856607"/>
+                    <a:pt x="0" y="851908"/>
+                    <a:pt x="0" y="847009"/>
+                  </a:cubicBezTo>
+                  <a:lnTo>
+                    <a:pt x="0" y="18473"/>
+                  </a:lnTo>
+                  <a:cubicBezTo>
+                    <a:pt x="0" y="13573"/>
+                    <a:pt x="1946" y="8875"/>
+                    <a:pt x="5411" y="5411"/>
+                  </a:cubicBezTo>
+                  <a:cubicBezTo>
+                    <a:pt x="8875" y="1946"/>
+                    <a:pt x="13573" y="0"/>
+                    <a:pt x="18473" y="0"/>
+                  </a:cubicBezTo>
+                  <a:close/>
+                </a:path>
+              </a:pathLst>
+            </a:custGeom>
+            <a:solidFill>
+              <a:srgbClr val="D9F2EA"/>
+            </a:solidFill>
+          </p:spPr>
+        </p:sp>
+        <p:sp>
+          <p:nvSpPr>
+            <p:cNvPr name="TextBox 9" id="9"/>
+            <p:cNvSpPr txBox="true"/>
+            <p:nvPr/>
+          </p:nvSpPr>
+          <p:spPr>
+            <a:xfrm>
+              <a:off x="0" y="0"/>
+              <a:ext cx="1986844" cy="865481"/>
+            </a:xfrm>
+            <a:prstGeom prst="rect">
+              <a:avLst/>
+            </a:prstGeom>
+          </p:spPr>
+          <p:txBody>
+            <a:bodyPr anchor="ctr" rtlCol="false" tIns="50800" lIns="50800" bIns="50800" rIns="50800"/>
+            <a:lstStyle/>
+            <a:p>
+              <a:pPr algn="ctr">
+                <a:lnSpc>
+                  <a:spcPts val="1372"/>
+                </a:lnSpc>
+              </a:pPr>
+            </a:p>
+          </p:txBody>
+        </p:sp>
+      </p:grpSp>
+      <p:grpSp>
+        <p:nvGrpSpPr>
+          <p:cNvPr name="Group 10" id="10"/>
+          <p:cNvGrpSpPr/>
+          <p:nvPr/>
+        </p:nvGrpSpPr>
+        <p:grpSpPr>
+          <a:xfrm rot="0">
+            <a:off x="6553200" y="2571750"/>
+            <a:ext cx="5029200" cy="2190750"/>
+            <a:chOff x="0" y="0"/>
+            <a:chExt cx="1986844" cy="865481"/>
+          </a:xfrm>
+        </p:grpSpPr>
+        <p:sp>
+          <p:nvSpPr>
+            <p:cNvPr name="Freeform 11" id="11"/>
+            <p:cNvSpPr/>
+            <p:nvPr/>
+          </p:nvSpPr>
+          <p:spPr>
+            <a:xfrm flipH="false" flipV="false" rot="0">
+              <a:off x="0" y="0"/>
+              <a:ext cx="1986844" cy="865481"/>
+            </a:xfrm>
+            <a:custGeom>
+              <a:avLst/>
+              <a:gdLst/>
+              <a:ahLst/>
+              <a:cxnLst/>
+              <a:rect r="r" b="b" t="t" l="l"/>
+              <a:pathLst>
+                <a:path h="865481" w="1986844">
+                  <a:moveTo>
+                    <a:pt x="18473" y="0"/>
+                  </a:moveTo>
+                  <a:lnTo>
+                    <a:pt x="1968372" y="0"/>
+                  </a:lnTo>
+                  <a:cubicBezTo>
+                    <a:pt x="1973271" y="0"/>
+                    <a:pt x="1977970" y="1946"/>
+                    <a:pt x="1981434" y="5411"/>
+                  </a:cubicBezTo>
+                  <a:cubicBezTo>
+                    <a:pt x="1984898" y="8875"/>
+                    <a:pt x="1986844" y="13573"/>
+                    <a:pt x="1986844" y="18473"/>
+                  </a:cubicBezTo>
+                  <a:lnTo>
+                    <a:pt x="1986844" y="847009"/>
+                  </a:lnTo>
+                  <a:cubicBezTo>
+                    <a:pt x="1986844" y="851908"/>
+                    <a:pt x="1984898" y="856607"/>
+                    <a:pt x="1981434" y="860071"/>
+                  </a:cubicBezTo>
+                  <a:cubicBezTo>
+                    <a:pt x="1977970" y="863535"/>
+                    <a:pt x="1973271" y="865481"/>
+                    <a:pt x="1968372" y="865481"/>
+                  </a:cubicBezTo>
+                  <a:lnTo>
+                    <a:pt x="18473" y="865481"/>
+                  </a:lnTo>
+                  <a:cubicBezTo>
+                    <a:pt x="13573" y="865481"/>
+                    <a:pt x="8875" y="863535"/>
+                    <a:pt x="5411" y="860071"/>
+                  </a:cubicBezTo>
+                  <a:cubicBezTo>
+                    <a:pt x="1946" y="856607"/>
+                    <a:pt x="0" y="851908"/>
+                    <a:pt x="0" y="847009"/>
+                  </a:cubicBezTo>
+                  <a:lnTo>
+                    <a:pt x="0" y="18473"/>
+                  </a:lnTo>
+                  <a:cubicBezTo>
+                    <a:pt x="0" y="13573"/>
+                    <a:pt x="1946" y="8875"/>
+                    <a:pt x="5411" y="5411"/>
+                  </a:cubicBezTo>
+                  <a:cubicBezTo>
+                    <a:pt x="8875" y="1946"/>
+                    <a:pt x="13573" y="0"/>
+                    <a:pt x="18473" y="0"/>
+                  </a:cubicBezTo>
+                  <a:close/>
+                </a:path>
+              </a:pathLst>
+            </a:custGeom>
+            <a:solidFill>
+              <a:srgbClr val="F8EADF"/>
+            </a:solidFill>
+          </p:spPr>
+        </p:sp>
+        <p:sp>
+          <p:nvSpPr>
+            <p:cNvPr name="TextBox 12" id="12"/>
+            <p:cNvSpPr txBox="true"/>
+            <p:nvPr/>
+          </p:nvSpPr>
+          <p:spPr>
+            <a:xfrm>
+              <a:off x="0" y="0"/>
+              <a:ext cx="1986844" cy="865481"/>
+            </a:xfrm>
+            <a:prstGeom prst="rect">
+              <a:avLst/>
+            </a:prstGeom>
+          </p:spPr>
+          <p:txBody>
+            <a:bodyPr anchor="ctr" rtlCol="false" tIns="50800" lIns="50800" bIns="50800" rIns="50800"/>
+            <a:lstStyle/>
+            <a:p>
+              <a:pPr algn="ctr">
+                <a:lnSpc>
+                  <a:spcPts val="1372"/>
+                </a:lnSpc>
+              </a:pPr>
+            </a:p>
+          </p:txBody>
+        </p:sp>
+      </p:grpSp>
+      <p:grpSp>
+        <p:nvGrpSpPr>
+          <p:cNvPr name="Group 13" id="13"/>
+          <p:cNvGrpSpPr/>
+          <p:nvPr/>
+        </p:nvGrpSpPr>
+        <p:grpSpPr>
+          <a:xfrm rot="0">
+            <a:off x="3429000" y="5619750"/>
+            <a:ext cx="5334000" cy="809625"/>
+            <a:chOff x="0" y="0"/>
+            <a:chExt cx="2107259" cy="319852"/>
+          </a:xfrm>
+        </p:grpSpPr>
+        <p:sp>
+          <p:nvSpPr>
+            <p:cNvPr name="Freeform 14" id="14"/>
+            <p:cNvSpPr/>
+            <p:nvPr/>
+          </p:nvSpPr>
+          <p:spPr>
+            <a:xfrm flipH="false" flipV="false" rot="0">
+              <a:off x="0" y="0"/>
+              <a:ext cx="2107259" cy="319852"/>
+            </a:xfrm>
+            <a:custGeom>
+              <a:avLst/>
+              <a:gdLst/>
+              <a:ahLst/>
+              <a:cxnLst/>
+              <a:rect r="r" b="b" t="t" l="l"/>
+              <a:pathLst>
+                <a:path h="319852" w="2107259">
+                  <a:moveTo>
+                    <a:pt x="17417" y="0"/>
+                  </a:moveTo>
+                  <a:lnTo>
+                    <a:pt x="2089842" y="0"/>
+                  </a:lnTo>
+                  <a:cubicBezTo>
+                    <a:pt x="2094461" y="0"/>
+                    <a:pt x="2098891" y="1835"/>
+                    <a:pt x="2102158" y="5101"/>
+                  </a:cubicBezTo>
+                  <a:cubicBezTo>
+                    <a:pt x="2105424" y="8368"/>
+                    <a:pt x="2107259" y="12798"/>
+                    <a:pt x="2107259" y="17417"/>
+                  </a:cubicBezTo>
+                  <a:lnTo>
+                    <a:pt x="2107259" y="302435"/>
+                  </a:lnTo>
+                  <a:cubicBezTo>
+                    <a:pt x="2107259" y="307054"/>
+                    <a:pt x="2105424" y="311484"/>
+                    <a:pt x="2102158" y="314750"/>
+                  </a:cubicBezTo>
+                  <a:cubicBezTo>
+                    <a:pt x="2098891" y="318017"/>
+                    <a:pt x="2094461" y="319852"/>
+                    <a:pt x="2089842" y="319852"/>
+                  </a:cubicBezTo>
+                  <a:lnTo>
+                    <a:pt x="17417" y="319852"/>
+                  </a:lnTo>
+                  <a:cubicBezTo>
+                    <a:pt x="12798" y="319852"/>
+                    <a:pt x="8368" y="318017"/>
+                    <a:pt x="5101" y="314750"/>
+                  </a:cubicBezTo>
+                  <a:cubicBezTo>
+                    <a:pt x="1835" y="311484"/>
+                    <a:pt x="0" y="307054"/>
+                    <a:pt x="0" y="302435"/>
+                  </a:cubicBezTo>
+                  <a:lnTo>
+                    <a:pt x="0" y="17417"/>
+                  </a:lnTo>
+                  <a:cubicBezTo>
+                    <a:pt x="0" y="12798"/>
+                    <a:pt x="1835" y="8368"/>
+                    <a:pt x="5101" y="5101"/>
+                  </a:cubicBezTo>
+                  <a:cubicBezTo>
+                    <a:pt x="8368" y="1835"/>
+                    <a:pt x="12798" y="0"/>
+                    <a:pt x="17417" y="0"/>
+                  </a:cubicBezTo>
+                  <a:close/>
+                </a:path>
+              </a:pathLst>
+            </a:custGeom>
+            <a:solidFill>
+              <a:srgbClr val="F0EFFF"/>
+            </a:solidFill>
+          </p:spPr>
+        </p:sp>
+        <p:sp>
+          <p:nvSpPr>
+            <p:cNvPr name="TextBox 15" id="15"/>
+            <p:cNvSpPr txBox="true"/>
+            <p:nvPr/>
+          </p:nvSpPr>
+          <p:spPr>
+            <a:xfrm>
+              <a:off x="0" y="0"/>
+              <a:ext cx="2107259" cy="319852"/>
+            </a:xfrm>
+            <a:prstGeom prst="rect">
+              <a:avLst/>
+            </a:prstGeom>
+          </p:spPr>
+          <p:txBody>
+            <a:bodyPr anchor="ctr" rtlCol="false" tIns="50800" lIns="50800" bIns="50800" rIns="50800"/>
+            <a:lstStyle/>
+            <a:p>
+              <a:pPr algn="ctr">
+                <a:lnSpc>
+                  <a:spcPts val="1372"/>
+                </a:lnSpc>
+              </a:pPr>
+            </a:p>
+          </p:txBody>
+        </p:sp>
+      </p:grpSp>
+      <p:sp>
+        <p:nvSpPr>
+          <p:cNvPr name="TextBox 16" id="16"/>
           <p:cNvSpPr txBox="true"/>
           <p:nvPr/>
         </p:nvSpPr>
@@ -16390,7 +17091,7 @@
       </p:sp>
       <p:sp>
         <p:nvSpPr>
-          <p:cNvPr name="TextBox 6" id="6"/>
+          <p:cNvPr name="TextBox 17" id="17"/>
           <p:cNvSpPr txBox="true"/>
           <p:nvPr/>
         </p:nvSpPr>
@@ -16431,14 +17132,14 @@
       </p:sp>
       <p:sp>
         <p:nvSpPr>
-          <p:cNvPr name="TextBox 7" id="7"/>
+          <p:cNvPr name="TextBox 18" id="18"/>
           <p:cNvSpPr txBox="true"/>
           <p:nvPr/>
         </p:nvSpPr>
         <p:spPr>
           <a:xfrm rot="0">
-            <a:off x="609600" y="2505075"/>
-            <a:ext cx="3190875" cy="393573"/>
+            <a:off x="609600" y="1609725"/>
+            <a:ext cx="10972800" cy="459105"/>
           </a:xfrm>
           <a:prstGeom prst="rect">
             <a:avLst/>
@@ -16450,218 +17151,36 @@
           </a:bodyPr>
           <a:lstStyle/>
           <a:p>
-            <a:pPr algn="l">
+            <a:pPr algn="ctr">
               <a:lnSpc>
-                <a:spcPts val="3111"/>
+                <a:spcPts val="3660"/>
               </a:lnSpc>
             </a:pPr>
             <a:r>
-              <a:rPr lang="en-US" b="1" sz="2550">
+              <a:rPr lang="en-US" b="1" sz="3000">
                 <a:solidFill>
-                  <a:srgbClr val="087E70"/>
+                  <a:srgbClr val="151521"/>
                 </a:solidFill>
                 <a:latin typeface="DM Sans"/>
                 <a:ea typeface="DM Sans"/>
                 <a:cs typeface="DM Sans"/>
                 <a:sym typeface="DM Sans"/>
               </a:rPr>
-              <a:t>Tried x = 3, 4</a:t>
-            </a:r>
-          </a:p>
-        </p:txBody>
-      </p:sp>
-      <p:sp>
-        <p:nvSpPr>
-          <p:cNvPr name="AutoShape 8" id="8"/>
-          <p:cNvSpPr/>
-          <p:nvPr/>
-        </p:nvSpPr>
-        <p:spPr>
-          <a:xfrm rot="0">
-            <a:off x="3762375" y="2724150"/>
-            <a:ext cx="1428750" cy="38100"/>
-          </a:xfrm>
-          <a:prstGeom prst="rect">
-            <a:avLst/>
-          </a:prstGeom>
-          <a:solidFill>
-            <a:srgbClr val="087E70"/>
-          </a:solidFill>
-        </p:spPr>
-      </p:sp>
-      <p:grpSp>
-        <p:nvGrpSpPr>
-          <p:cNvPr name="Group 9" id="9"/>
-          <p:cNvGrpSpPr/>
-          <p:nvPr/>
-        </p:nvGrpSpPr>
-        <p:grpSpPr>
-          <a:xfrm rot="1840140">
-            <a:off x="5133308" y="2688526"/>
-            <a:ext cx="171450" cy="28575"/>
-            <a:chOff x="0" y="0"/>
-            <a:chExt cx="228600" cy="38100"/>
-          </a:xfrm>
-        </p:grpSpPr>
-        <p:sp>
-          <p:nvSpPr>
-            <p:cNvPr name="Freeform 10" id="10"/>
-            <p:cNvSpPr/>
-            <p:nvPr/>
-          </p:nvSpPr>
-          <p:spPr>
-            <a:xfrm flipH="false" flipV="false" rot="0">
-              <a:off x="0" y="0"/>
-              <a:ext cx="228600" cy="38100"/>
-            </a:xfrm>
-            <a:custGeom>
-              <a:avLst/>
-              <a:gdLst/>
-              <a:ahLst/>
-              <a:cxnLst/>
-              <a:rect r="r" b="b" t="t" l="l"/>
-              <a:pathLst>
-                <a:path h="38100" w="228600">
-                  <a:moveTo>
-                    <a:pt x="19050" y="0"/>
-                  </a:moveTo>
-                  <a:lnTo>
-                    <a:pt x="209550" y="0"/>
-                  </a:lnTo>
-                  <a:cubicBezTo>
-                    <a:pt x="220091" y="0"/>
-                    <a:pt x="228600" y="8509"/>
-                    <a:pt x="228600" y="19050"/>
-                  </a:cubicBezTo>
-                  <a:cubicBezTo>
-                    <a:pt x="228600" y="29591"/>
-                    <a:pt x="220091" y="38100"/>
-                    <a:pt x="209550" y="38100"/>
-                  </a:cubicBezTo>
-                  <a:lnTo>
-                    <a:pt x="19050" y="38100"/>
-                  </a:lnTo>
-                  <a:cubicBezTo>
-                    <a:pt x="8509" y="38100"/>
-                    <a:pt x="0" y="29591"/>
-                    <a:pt x="0" y="19050"/>
-                  </a:cubicBezTo>
-                  <a:cubicBezTo>
-                    <a:pt x="0" y="8509"/>
-                    <a:pt x="8509" y="0"/>
-                    <a:pt x="19050" y="0"/>
-                  </a:cubicBezTo>
-                  <a:close/>
-                </a:path>
-              </a:pathLst>
-            </a:custGeom>
-            <a:solidFill>
-              <a:srgbClr val="087E70"/>
-            </a:solidFill>
-          </p:spPr>
-        </p:sp>
-      </p:grpSp>
-      <p:grpSp>
-        <p:nvGrpSpPr>
-          <p:cNvPr name="Group 11" id="11"/>
-          <p:cNvGrpSpPr/>
-          <p:nvPr/>
-        </p:nvGrpSpPr>
-        <p:grpSpPr>
-          <a:xfrm rot="8959860">
-            <a:off x="5125212" y="2774252"/>
-            <a:ext cx="171450" cy="28575"/>
-            <a:chOff x="0" y="0"/>
-            <a:chExt cx="228600" cy="38100"/>
-          </a:xfrm>
-        </p:grpSpPr>
-        <p:sp>
-          <p:nvSpPr>
-            <p:cNvPr name="Freeform 12" id="12"/>
-            <p:cNvSpPr/>
-            <p:nvPr/>
-          </p:nvSpPr>
-          <p:spPr>
-            <a:xfrm flipH="false" flipV="false" rot="0">
-              <a:off x="0" y="0"/>
-              <a:ext cx="228600" cy="38100"/>
-            </a:xfrm>
-            <a:custGeom>
-              <a:avLst/>
-              <a:gdLst/>
-              <a:ahLst/>
-              <a:cxnLst/>
-              <a:rect r="r" b="b" t="t" l="l"/>
-              <a:pathLst>
-                <a:path h="38100" w="228600">
-                  <a:moveTo>
-                    <a:pt x="19050" y="0"/>
-                  </a:moveTo>
-                  <a:lnTo>
-                    <a:pt x="209550" y="0"/>
-                  </a:lnTo>
-                  <a:cubicBezTo>
-                    <a:pt x="220091" y="0"/>
-                    <a:pt x="228600" y="8509"/>
-                    <a:pt x="228600" y="19050"/>
-                  </a:cubicBezTo>
-                  <a:cubicBezTo>
-                    <a:pt x="228600" y="29591"/>
-                    <a:pt x="220091" y="38100"/>
-                    <a:pt x="209550" y="38100"/>
-                  </a:cubicBezTo>
-                  <a:lnTo>
-                    <a:pt x="19050" y="38100"/>
-                  </a:lnTo>
-                  <a:cubicBezTo>
-                    <a:pt x="8509" y="38100"/>
-                    <a:pt x="0" y="29591"/>
-                    <a:pt x="0" y="19050"/>
-                  </a:cubicBezTo>
-                  <a:cubicBezTo>
-                    <a:pt x="0" y="8509"/>
-                    <a:pt x="8509" y="0"/>
-                    <a:pt x="19050" y="0"/>
-                  </a:cubicBezTo>
-                  <a:close/>
-                </a:path>
-              </a:pathLst>
-            </a:custGeom>
-            <a:solidFill>
-              <a:srgbClr val="087E70"/>
-            </a:solidFill>
-          </p:spPr>
-        </p:sp>
-      </p:grpSp>
-      <p:sp>
-        <p:nvSpPr>
-          <p:cNvPr name="AutoShape 13" id="13"/>
-          <p:cNvSpPr/>
-          <p:nvPr/>
-        </p:nvSpPr>
-        <p:spPr>
-          <a:xfrm rot="0">
-            <a:off x="5610225" y="2286000"/>
-            <a:ext cx="5972175" cy="942975"/>
-          </a:xfrm>
-          <a:prstGeom prst="rect">
-            <a:avLst/>
-          </a:prstGeom>
-          <a:solidFill>
-            <a:srgbClr val="D9F2EA"/>
-          </a:solidFill>
-        </p:spPr>
-      </p:sp>
-      <p:sp>
-        <p:nvSpPr>
-          <p:cNvPr name="TextBox 14" id="14"/>
+              <a:t>For x² + 7x + 12 = 0</a:t>
+            </a:r>
+          </a:p>
+        </p:txBody>
+      </p:sp>
+      <p:sp>
+        <p:nvSpPr>
+          <p:cNvPr name="TextBox 19" id="19"/>
           <p:cNvSpPr txBox="true"/>
           <p:nvPr/>
         </p:nvSpPr>
         <p:spPr>
           <a:xfrm rot="0">
-            <a:off x="5810250" y="2495550"/>
-            <a:ext cx="5572125" cy="430911"/>
+            <a:off x="838200" y="2857500"/>
+            <a:ext cx="4572000" cy="506222"/>
           </a:xfrm>
           <a:prstGeom prst="rect">
             <a:avLst/>
@@ -16675,34 +17194,37 @@
           <a:p>
             <a:pPr algn="ctr">
               <a:lnSpc>
-                <a:spcPts val="3476"/>
+                <a:spcPts val="3904"/>
               </a:lnSpc>
+              <a:spcBef>
+                <a:spcPct val="0"/>
+              </a:spcBef>
             </a:pPr>
             <a:r>
-              <a:rPr lang="en-US" b="1" sz="2850">
+              <a:rPr lang="en-US" b="1" sz="3200">
                 <a:solidFill>
-                  <a:srgbClr val="087E70"/>
+                  <a:srgbClr val="151521"/>
                 </a:solidFill>
                 <a:latin typeface="DM Sans"/>
                 <a:ea typeface="DM Sans"/>
                 <a:cs typeface="DM Sans"/>
                 <a:sym typeface="DM Sans"/>
               </a:rPr>
-              <a:t>Check signs → fresh goal</a:t>
-            </a:r>
-          </a:p>
-        </p:txBody>
-      </p:sp>
-      <p:sp>
-        <p:nvSpPr>
-          <p:cNvPr name="TextBox 15" id="15"/>
+              <a:t>x = 3, 4</a:t>
+            </a:r>
+          </a:p>
+        </p:txBody>
+      </p:sp>
+      <p:sp>
+        <p:nvSpPr>
+          <p:cNvPr name="TextBox 20" id="20"/>
           <p:cNvSpPr txBox="true"/>
           <p:nvPr/>
         </p:nvSpPr>
         <p:spPr>
           <a:xfrm rot="0">
-            <a:off x="609600" y="4162425"/>
-            <a:ext cx="2857500" cy="393573"/>
+            <a:off x="838200" y="3762375"/>
+            <a:ext cx="4572000" cy="547878"/>
           </a:xfrm>
           <a:prstGeom prst="rect">
             <a:avLst/>
@@ -16714,441 +17236,58 @@
           </a:bodyPr>
           <a:lstStyle/>
           <a:p>
-            <a:pPr algn="l">
+            <a:pPr algn="ctr">
               <a:lnSpc>
-                <a:spcPts val="3111"/>
+                <a:spcPts val="2196"/>
               </a:lnSpc>
             </a:pPr>
             <a:r>
-              <a:rPr lang="en-US" b="1" sz="2550">
+              <a:rPr lang="en-US" b="1" sz="1800">
                 <a:solidFill>
-                  <a:srgbClr val="C96331"/>
+                  <a:srgbClr val="536073"/>
                 </a:solidFill>
                 <a:latin typeface="DM Sans"/>
                 <a:ea typeface="DM Sans"/>
                 <a:cs typeface="DM Sans"/>
                 <a:sym typeface="DM Sans"/>
               </a:rPr>
-              <a:t>Tried x = 2, 6</a:t>
-            </a:r>
-          </a:p>
-        </p:txBody>
-      </p:sp>
-      <p:sp>
-        <p:nvSpPr>
-          <p:cNvPr name="AutoShape 16" id="16"/>
-          <p:cNvSpPr/>
-          <p:nvPr/>
-        </p:nvSpPr>
-        <p:spPr>
-          <a:xfrm rot="0">
-            <a:off x="3495675" y="4410075"/>
-            <a:ext cx="1019175" cy="38100"/>
-          </a:xfrm>
-          <a:prstGeom prst="rect">
-            <a:avLst/>
-          </a:prstGeom>
-          <a:solidFill>
-            <a:srgbClr val="C96331"/>
-          </a:solidFill>
-        </p:spPr>
-      </p:sp>
-      <p:grpSp>
-        <p:nvGrpSpPr>
-          <p:cNvPr name="Group 17" id="17"/>
-          <p:cNvGrpSpPr/>
-          <p:nvPr/>
-        </p:nvGrpSpPr>
-        <p:grpSpPr>
-          <a:xfrm rot="1840140">
-            <a:off x="4457033" y="4374452"/>
-            <a:ext cx="171450" cy="28575"/>
-            <a:chOff x="0" y="0"/>
-            <a:chExt cx="228600" cy="38100"/>
-          </a:xfrm>
-        </p:grpSpPr>
-        <p:sp>
-          <p:nvSpPr>
-            <p:cNvPr name="Freeform 18" id="18"/>
-            <p:cNvSpPr/>
-            <p:nvPr/>
-          </p:nvSpPr>
-          <p:spPr>
-            <a:xfrm flipH="false" flipV="false" rot="0">
-              <a:off x="0" y="0"/>
-              <a:ext cx="228600" cy="38100"/>
-            </a:xfrm>
-            <a:custGeom>
-              <a:avLst/>
-              <a:gdLst/>
-              <a:ahLst/>
-              <a:cxnLst/>
-              <a:rect r="r" b="b" t="t" l="l"/>
-              <a:pathLst>
-                <a:path h="38100" w="228600">
-                  <a:moveTo>
-                    <a:pt x="19050" y="0"/>
-                  </a:moveTo>
-                  <a:lnTo>
-                    <a:pt x="209550" y="0"/>
-                  </a:lnTo>
-                  <a:cubicBezTo>
-                    <a:pt x="220091" y="0"/>
-                    <a:pt x="228600" y="8509"/>
-                    <a:pt x="228600" y="19050"/>
-                  </a:cubicBezTo>
-                  <a:cubicBezTo>
-                    <a:pt x="228600" y="29591"/>
-                    <a:pt x="220091" y="38100"/>
-                    <a:pt x="209550" y="38100"/>
-                  </a:cubicBezTo>
-                  <a:lnTo>
-                    <a:pt x="19050" y="38100"/>
-                  </a:lnTo>
-                  <a:cubicBezTo>
-                    <a:pt x="8509" y="38100"/>
-                    <a:pt x="0" y="29591"/>
-                    <a:pt x="0" y="19050"/>
-                  </a:cubicBezTo>
-                  <a:cubicBezTo>
-                    <a:pt x="0" y="8509"/>
-                    <a:pt x="8509" y="0"/>
-                    <a:pt x="19050" y="0"/>
-                  </a:cubicBezTo>
-                  <a:close/>
-                </a:path>
-              </a:pathLst>
-            </a:custGeom>
-            <a:solidFill>
-              <a:srgbClr val="C96331"/>
-            </a:solidFill>
-          </p:spPr>
-        </p:sp>
-      </p:grpSp>
-      <p:grpSp>
-        <p:nvGrpSpPr>
-          <p:cNvPr name="Group 19" id="19"/>
-          <p:cNvGrpSpPr/>
-          <p:nvPr/>
-        </p:nvGrpSpPr>
-        <p:grpSpPr>
-          <a:xfrm rot="8959860">
-            <a:off x="4448937" y="4460176"/>
-            <a:ext cx="171450" cy="28575"/>
-            <a:chOff x="0" y="0"/>
-            <a:chExt cx="228600" cy="38100"/>
-          </a:xfrm>
-        </p:grpSpPr>
-        <p:sp>
-          <p:nvSpPr>
-            <p:cNvPr name="Freeform 20" id="20"/>
-            <p:cNvSpPr/>
-            <p:nvPr/>
-          </p:nvSpPr>
-          <p:spPr>
-            <a:xfrm flipH="false" flipV="false" rot="0">
-              <a:off x="0" y="0"/>
-              <a:ext cx="228600" cy="38100"/>
-            </a:xfrm>
-            <a:custGeom>
-              <a:avLst/>
-              <a:gdLst/>
-              <a:ahLst/>
-              <a:cxnLst/>
-              <a:rect r="r" b="b" t="t" l="l"/>
-              <a:pathLst>
-                <a:path h="38100" w="228600">
-                  <a:moveTo>
-                    <a:pt x="19050" y="0"/>
-                  </a:moveTo>
-                  <a:lnTo>
-                    <a:pt x="209550" y="0"/>
-                  </a:lnTo>
-                  <a:cubicBezTo>
-                    <a:pt x="220091" y="0"/>
-                    <a:pt x="228600" y="8509"/>
-                    <a:pt x="228600" y="19050"/>
-                  </a:cubicBezTo>
-                  <a:cubicBezTo>
-                    <a:pt x="228600" y="29591"/>
-                    <a:pt x="220091" y="38100"/>
-                    <a:pt x="209550" y="38100"/>
-                  </a:cubicBezTo>
-                  <a:lnTo>
-                    <a:pt x="19050" y="38100"/>
-                  </a:lnTo>
-                  <a:cubicBezTo>
-                    <a:pt x="8509" y="38100"/>
-                    <a:pt x="0" y="29591"/>
-                    <a:pt x="0" y="19050"/>
-                  </a:cubicBezTo>
-                  <a:cubicBezTo>
-                    <a:pt x="0" y="8509"/>
-                    <a:pt x="8509" y="0"/>
-                    <a:pt x="19050" y="0"/>
-                  </a:cubicBezTo>
-                  <a:close/>
-                </a:path>
-              </a:pathLst>
-            </a:custGeom>
-            <a:solidFill>
-              <a:srgbClr val="C96331"/>
-            </a:solidFill>
-          </p:spPr>
-        </p:sp>
-      </p:grpSp>
-      <p:sp>
-        <p:nvSpPr>
-          <p:cNvPr name="AutoShape 21" id="21"/>
-          <p:cNvSpPr/>
-          <p:nvPr/>
-        </p:nvSpPr>
-        <p:spPr>
-          <a:xfrm rot="0">
-            <a:off x="4857750" y="3952875"/>
-            <a:ext cx="2914650" cy="971550"/>
-          </a:xfrm>
-          <a:prstGeom prst="rect">
-            <a:avLst/>
-          </a:prstGeom>
-          <a:solidFill>
-            <a:srgbClr val="F8EADF"/>
-          </a:solidFill>
-        </p:spPr>
-      </p:sp>
-      <p:sp>
-        <p:nvSpPr>
-          <p:cNvPr name="TextBox 22" id="22"/>
-          <p:cNvSpPr txBox="true"/>
-          <p:nvPr/>
-        </p:nvSpPr>
-        <p:spPr>
-          <a:xfrm rot="0">
-            <a:off x="5010150" y="4229100"/>
-            <a:ext cx="2609850" cy="346520"/>
-          </a:xfrm>
-          <a:prstGeom prst="rect">
-            <a:avLst/>
-          </a:prstGeom>
-        </p:spPr>
-        <p:txBody>
-          <a:bodyPr anchor="t" rtlCol="false" tIns="0" lIns="0" bIns="0" rIns="0">
-            <a:spAutoFit/>
-          </a:bodyPr>
-          <a:lstStyle/>
+              <a:t>Right pair, wrong signs.</a:t>
+            </a:r>
+          </a:p>
           <a:p>
             <a:pPr algn="ctr">
               <a:lnSpc>
-                <a:spcPts val="2836"/>
+                <a:spcPts val="2196"/>
               </a:lnSpc>
+              <a:spcBef>
+                <a:spcPct val="0"/>
+              </a:spcBef>
             </a:pPr>
             <a:r>
-              <a:rPr lang="en-US" b="1" sz="2325">
+              <a:rPr lang="en-US" b="1" sz="1800">
                 <a:solidFill>
-                  <a:srgbClr val="C96331"/>
+                  <a:srgbClr val="536073"/>
                 </a:solidFill>
                 <a:latin typeface="DM Sans"/>
                 <a:ea typeface="DM Sans"/>
                 <a:cs typeface="DM Sans"/>
                 <a:sym typeface="DM Sans"/>
               </a:rPr>
-              <a:t>Check factors</a:t>
-            </a:r>
-          </a:p>
-        </p:txBody>
-      </p:sp>
-      <p:sp>
-        <p:nvSpPr>
-          <p:cNvPr name="AutoShape 23" id="23"/>
-          <p:cNvSpPr/>
-          <p:nvPr/>
-        </p:nvSpPr>
-        <p:spPr>
-          <a:xfrm rot="0">
-            <a:off x="8029575" y="4410075"/>
-            <a:ext cx="771525" cy="38100"/>
-          </a:xfrm>
-          <a:prstGeom prst="rect">
-            <a:avLst/>
-          </a:prstGeom>
-          <a:solidFill>
-            <a:srgbClr val="C96331"/>
-          </a:solidFill>
-        </p:spPr>
-      </p:sp>
-      <p:grpSp>
-        <p:nvGrpSpPr>
-          <p:cNvPr name="Group 24" id="24"/>
-          <p:cNvGrpSpPr/>
-          <p:nvPr/>
-        </p:nvGrpSpPr>
-        <p:grpSpPr>
-          <a:xfrm rot="1840140">
-            <a:off x="8743283" y="4374452"/>
-            <a:ext cx="171450" cy="28575"/>
-            <a:chOff x="0" y="0"/>
-            <a:chExt cx="228600" cy="38100"/>
-          </a:xfrm>
-        </p:grpSpPr>
-        <p:sp>
-          <p:nvSpPr>
-            <p:cNvPr name="Freeform 25" id="25"/>
-            <p:cNvSpPr/>
-            <p:nvPr/>
-          </p:nvSpPr>
-          <p:spPr>
-            <a:xfrm flipH="false" flipV="false" rot="0">
-              <a:off x="0" y="0"/>
-              <a:ext cx="228600" cy="38100"/>
-            </a:xfrm>
-            <a:custGeom>
-              <a:avLst/>
-              <a:gdLst/>
-              <a:ahLst/>
-              <a:cxnLst/>
-              <a:rect r="r" b="b" t="t" l="l"/>
-              <a:pathLst>
-                <a:path h="38100" w="228600">
-                  <a:moveTo>
-                    <a:pt x="19050" y="0"/>
-                  </a:moveTo>
-                  <a:lnTo>
-                    <a:pt x="209550" y="0"/>
-                  </a:lnTo>
-                  <a:cubicBezTo>
-                    <a:pt x="220091" y="0"/>
-                    <a:pt x="228600" y="8509"/>
-                    <a:pt x="228600" y="19050"/>
-                  </a:cubicBezTo>
-                  <a:cubicBezTo>
-                    <a:pt x="228600" y="29591"/>
-                    <a:pt x="220091" y="38100"/>
-                    <a:pt x="209550" y="38100"/>
-                  </a:cubicBezTo>
-                  <a:lnTo>
-                    <a:pt x="19050" y="38100"/>
-                  </a:lnTo>
-                  <a:cubicBezTo>
-                    <a:pt x="8509" y="38100"/>
-                    <a:pt x="0" y="29591"/>
-                    <a:pt x="0" y="19050"/>
-                  </a:cubicBezTo>
-                  <a:cubicBezTo>
-                    <a:pt x="0" y="8509"/>
-                    <a:pt x="8509" y="0"/>
-                    <a:pt x="19050" y="0"/>
-                  </a:cubicBezTo>
-                  <a:close/>
-                </a:path>
-              </a:pathLst>
-            </a:custGeom>
-            <a:solidFill>
-              <a:srgbClr val="C96331"/>
-            </a:solidFill>
-          </p:spPr>
-        </p:sp>
-      </p:grpSp>
-      <p:grpSp>
-        <p:nvGrpSpPr>
-          <p:cNvPr name="Group 26" id="26"/>
-          <p:cNvGrpSpPr/>
-          <p:nvPr/>
-        </p:nvGrpSpPr>
-        <p:grpSpPr>
-          <a:xfrm rot="8959860">
-            <a:off x="8735187" y="4460176"/>
-            <a:ext cx="171450" cy="28575"/>
-            <a:chOff x="0" y="0"/>
-            <a:chExt cx="228600" cy="38100"/>
-          </a:xfrm>
-        </p:grpSpPr>
-        <p:sp>
-          <p:nvSpPr>
-            <p:cNvPr name="Freeform 27" id="27"/>
-            <p:cNvSpPr/>
-            <p:nvPr/>
-          </p:nvSpPr>
-          <p:spPr>
-            <a:xfrm flipH="false" flipV="false" rot="0">
-              <a:off x="0" y="0"/>
-              <a:ext cx="228600" cy="38100"/>
-            </a:xfrm>
-            <a:custGeom>
-              <a:avLst/>
-              <a:gdLst/>
-              <a:ahLst/>
-              <a:cxnLst/>
-              <a:rect r="r" b="b" t="t" l="l"/>
-              <a:pathLst>
-                <a:path h="38100" w="228600">
-                  <a:moveTo>
-                    <a:pt x="19050" y="0"/>
-                  </a:moveTo>
-                  <a:lnTo>
-                    <a:pt x="209550" y="0"/>
-                  </a:lnTo>
-                  <a:cubicBezTo>
-                    <a:pt x="220091" y="0"/>
-                    <a:pt x="228600" y="8509"/>
-                    <a:pt x="228600" y="19050"/>
-                  </a:cubicBezTo>
-                  <a:cubicBezTo>
-                    <a:pt x="228600" y="29591"/>
-                    <a:pt x="220091" y="38100"/>
-                    <a:pt x="209550" y="38100"/>
-                  </a:cubicBezTo>
-                  <a:lnTo>
-                    <a:pt x="19050" y="38100"/>
-                  </a:lnTo>
-                  <a:cubicBezTo>
-                    <a:pt x="8509" y="38100"/>
-                    <a:pt x="0" y="29591"/>
-                    <a:pt x="0" y="19050"/>
-                  </a:cubicBezTo>
-                  <a:cubicBezTo>
-                    <a:pt x="0" y="8509"/>
-                    <a:pt x="8509" y="0"/>
-                    <a:pt x="19050" y="0"/>
-                  </a:cubicBezTo>
-                  <a:close/>
-                </a:path>
-              </a:pathLst>
-            </a:custGeom>
-            <a:solidFill>
-              <a:srgbClr val="C96331"/>
-            </a:solidFill>
-          </p:spPr>
-        </p:sp>
-      </p:grpSp>
-      <p:sp>
-        <p:nvSpPr>
-          <p:cNvPr name="AutoShape 28" id="28"/>
-          <p:cNvSpPr/>
-          <p:nvPr/>
-        </p:nvSpPr>
-        <p:spPr>
-          <a:xfrm rot="0">
-            <a:off x="9144000" y="3952875"/>
-            <a:ext cx="2438400" cy="971550"/>
-          </a:xfrm>
-          <a:prstGeom prst="rect">
-            <a:avLst/>
-          </a:prstGeom>
-          <a:solidFill>
-            <a:srgbClr val="F0EFFF"/>
-          </a:solidFill>
-        </p:spPr>
-      </p:sp>
-      <p:sp>
-        <p:nvSpPr>
-          <p:cNvPr name="TextBox 29" id="29"/>
+              <a:t>Check signs and solutions.</a:t>
+            </a:r>
+          </a:p>
+        </p:txBody>
+      </p:sp>
+      <p:sp>
+        <p:nvSpPr>
+          <p:cNvPr name="TextBox 21" id="21"/>
           <p:cNvSpPr txBox="true"/>
           <p:nvPr/>
         </p:nvSpPr>
         <p:spPr>
           <a:xfrm rot="0">
-            <a:off x="9220200" y="4219575"/>
-            <a:ext cx="2286000" cy="346710"/>
+            <a:off x="6781800" y="2857500"/>
+            <a:ext cx="4572000" cy="506222"/>
           </a:xfrm>
           <a:prstGeom prst="rect">
             <a:avLst/>
@@ -17162,11 +17301,121 @@
           <a:p>
             <a:pPr algn="ctr">
               <a:lnSpc>
-                <a:spcPts val="2745"/>
+                <a:spcPts val="3904"/>
+              </a:lnSpc>
+              <a:spcBef>
+                <a:spcPct val="0"/>
+              </a:spcBef>
+            </a:pPr>
+            <a:r>
+              <a:rPr lang="en-US" b="1" sz="3200">
+                <a:solidFill>
+                  <a:srgbClr val="151521"/>
+                </a:solidFill>
+                <a:latin typeface="DM Sans"/>
+                <a:ea typeface="DM Sans"/>
+                <a:cs typeface="DM Sans"/>
+                <a:sym typeface="DM Sans"/>
+              </a:rPr>
+              <a:t>x = 2, 6</a:t>
+            </a:r>
+          </a:p>
+        </p:txBody>
+      </p:sp>
+      <p:sp>
+        <p:nvSpPr>
+          <p:cNvPr name="TextBox 22" id="22"/>
+          <p:cNvSpPr txBox="true"/>
+          <p:nvPr/>
+        </p:nvSpPr>
+        <p:spPr>
+          <a:xfrm rot="0">
+            <a:off x="6781800" y="3762375"/>
+            <a:ext cx="4572000" cy="547878"/>
+          </a:xfrm>
+          <a:prstGeom prst="rect">
+            <a:avLst/>
+          </a:prstGeom>
+        </p:spPr>
+        <p:txBody>
+          <a:bodyPr anchor="t" rtlCol="false" tIns="0" lIns="0" bIns="0" rIns="0">
+            <a:spAutoFit/>
+          </a:bodyPr>
+          <a:lstStyle/>
+          <a:p>
+            <a:pPr algn="ctr">
+              <a:lnSpc>
+                <a:spcPts val="2196"/>
               </a:lnSpc>
             </a:pPr>
             <a:r>
-              <a:rPr lang="en-US" b="1" sz="2250">
+              <a:rPr lang="en-US" b="1" sz="1800">
+                <a:solidFill>
+                  <a:srgbClr val="536073"/>
+                </a:solidFill>
+                <a:latin typeface="DM Sans"/>
+                <a:ea typeface="DM Sans"/>
+                <a:cs typeface="DM Sans"/>
+                <a:sym typeface="DM Sans"/>
+              </a:rPr>
+              <a:t>Wrong factor pair.</a:t>
+            </a:r>
+          </a:p>
+          <a:p>
+            <a:pPr algn="ctr">
+              <a:lnSpc>
+                <a:spcPts val="2196"/>
+              </a:lnSpc>
+              <a:spcBef>
+                <a:spcPct val="0"/>
+              </a:spcBef>
+            </a:pPr>
+            <a:r>
+              <a:rPr lang="en-US" b="1" sz="1800">
+                <a:solidFill>
+                  <a:srgbClr val="536073"/>
+                </a:solidFill>
+                <a:latin typeface="DM Sans"/>
+                <a:ea typeface="DM Sans"/>
+                <a:cs typeface="DM Sans"/>
+                <a:sym typeface="DM Sans"/>
+              </a:rPr>
+              <a:t>Check product and sum.</a:t>
+            </a:r>
+          </a:p>
+        </p:txBody>
+      </p:sp>
+      <p:sp>
+        <p:nvSpPr>
+          <p:cNvPr name="TextBox 23" id="23"/>
+          <p:cNvSpPr txBox="true"/>
+          <p:nvPr/>
+        </p:nvSpPr>
+        <p:spPr>
+          <a:xfrm rot="0">
+            <a:off x="3619500" y="5800725"/>
+            <a:ext cx="4953000" cy="374904"/>
+          </a:xfrm>
+          <a:prstGeom prst="rect">
+            <a:avLst/>
+          </a:prstGeom>
+        </p:spPr>
+        <p:txBody>
+          <a:bodyPr anchor="t" rtlCol="false" tIns="0" lIns="0" bIns="0" rIns="0">
+            <a:spAutoFit/>
+          </a:bodyPr>
+          <a:lstStyle/>
+          <a:p>
+            <a:pPr algn="ctr">
+              <a:lnSpc>
+                <a:spcPts val="2928"/>
+              </a:lnSpc>
+              <a:spcBef>
+                <a:spcPct val="0"/>
+              </a:spcBef>
+            </a:pPr>
+            <a:r>
+              <a:rPr lang="en-US" b="1" sz="2400">
                 <a:solidFill>
                   <a:srgbClr val="5753FA"/>
                 </a:solidFill>
@@ -17175,75 +17424,10 @@
                 <a:cs typeface="DM Sans"/>
                 <a:sym typeface="DM Sans"/>
               </a:rPr>
-              <a:t>Fresh goal</a:t>
-            </a:r>
-          </a:p>
-        </p:txBody>
-      </p:sp>
-      <p:sp>
-        <p:nvSpPr>
-          <p:cNvPr name="TextBox 30" id="30"/>
-          <p:cNvSpPr txBox="true"/>
-          <p:nvPr/>
-        </p:nvSpPr>
-        <p:spPr>
-          <a:xfrm rot="0">
-            <a:off x="609600" y="5791200"/>
-            <a:ext cx="10972800" cy="393382"/>
-          </a:xfrm>
-          <a:prstGeom prst="rect">
-            <a:avLst/>
-          </a:prstGeom>
-        </p:spPr>
-        <p:txBody>
-          <a:bodyPr anchor="t" rtlCol="false" tIns="0" lIns="0" bIns="0" rIns="0">
-            <a:spAutoFit/>
-          </a:bodyPr>
-          <a:lstStyle/>
-          <a:p>
-            <a:pPr algn="ctr">
-              <a:lnSpc>
-                <a:spcPts val="3202"/>
-              </a:lnSpc>
-            </a:pPr>
-            <a:r>
-              <a:rPr lang="en-US" b="1" sz="2625">
-                <a:solidFill>
-                  <a:srgbClr val="151521"/>
-                </a:solidFill>
-                <a:latin typeface="DM Sans"/>
-                <a:ea typeface="DM Sans"/>
-                <a:cs typeface="DM Sans"/>
-                <a:sym typeface="DM Sans"/>
-              </a:rPr>
-              <a:t>The mistake points to the starting check.</a:t>
-            </a:r>
-          </a:p>
-        </p:txBody>
-      </p:sp>
-      <p:sp>
-        <p:nvSpPr>
-          <p:cNvPr name="AutoShape 31" id="31"/>
-          <p:cNvSpPr/>
-          <p:nvPr/>
-        </p:nvSpPr>
-        <p:spPr>
-          <a:xfrm>
-            <a:off x="609600" y="1381125"/>
-            <a:ext cx="10972800" cy="0"/>
-          </a:xfrm>
-          <a:prstGeom prst="line">
-            <a:avLst/>
-          </a:prstGeom>
-          <a:ln cap="flat" w="19050">
-            <a:solidFill>
-              <a:srgbClr val="CCD7E4"/>
-            </a:solidFill>
-            <a:prstDash val="solid"/>
-            <a:headEnd type="none" len="sm" w="sm"/>
-            <a:tailEnd type="none" len="sm" w="sm"/>
-          </a:ln>
-        </p:spPr>
+              <a:t>Return with fresh numbers</a:t>
+            </a:r>
+          </a:p>
+        </p:txBody>
       </p:sp>
     </p:spTree>
   </p:cSld>
@@ -19283,7 +19467,7 @@
                 <a:sym typeface="DM Sans"/>
                 <a:hlinkClick r:id="rId8" tooltip="https://backtrack-learning.vercel.app/demo"/>
               </a:rPr>
-              <a:t>backtrack-learning.vercel.app</a:t>
+              <a:t>backtrack-learning.vercel.app/demo</a:t>
             </a:r>
           </a:p>
         </p:txBody>

--- a/output/BACKTRACK_KEIC_2026_Embedded.pptx
+++ b/output/BACKTRACK_KEIC_2026_Embedded.pptx
@@ -6708,9 +6708,174 @@
           </p:spPr>
         </p:sp>
       </p:grpSp>
-      <p:sp>
-        <p:nvSpPr>
-          <p:cNvPr name="Freeform 5" id="5"/>
+      <p:grpSp>
+        <p:nvGrpSpPr>
+          <p:cNvPr name="Group 5" id="5"/>
+          <p:cNvGrpSpPr/>
+          <p:nvPr/>
+        </p:nvGrpSpPr>
+        <p:grpSpPr>
+          <a:xfrm rot="0">
+            <a:off x="0" y="0"/>
+            <a:ext cx="12192000" cy="6858000"/>
+            <a:chOff x="0" y="0"/>
+            <a:chExt cx="16256000" cy="9144000"/>
+          </a:xfrm>
+        </p:grpSpPr>
+        <p:sp>
+          <p:nvSpPr>
+            <p:cNvPr name="Freeform 6" id="6"/>
+            <p:cNvSpPr/>
+            <p:nvPr/>
+          </p:nvSpPr>
+          <p:spPr>
+            <a:xfrm flipH="false" flipV="false" rot="0">
+              <a:off x="0" y="0"/>
+              <a:ext cx="16256000" cy="9144000"/>
+            </a:xfrm>
+            <a:custGeom>
+              <a:avLst/>
+              <a:gdLst/>
+              <a:ahLst/>
+              <a:cxnLst/>
+              <a:rect r="r" b="b" t="t" l="l"/>
+              <a:pathLst>
+                <a:path h="9144000" w="16256000">
+                  <a:moveTo>
+                    <a:pt x="0" y="0"/>
+                  </a:moveTo>
+                  <a:lnTo>
+                    <a:pt x="16256000" y="0"/>
+                  </a:lnTo>
+                  <a:lnTo>
+                    <a:pt x="16256000" y="9144000"/>
+                  </a:lnTo>
+                  <a:lnTo>
+                    <a:pt x="0" y="9144000"/>
+                  </a:lnTo>
+                  <a:lnTo>
+                    <a:pt x="0" y="0"/>
+                  </a:lnTo>
+                  <a:close/>
+                </a:path>
+              </a:pathLst>
+            </a:custGeom>
+            <a:blipFill>
+              <a:blip r:embed="rId4">
+                <a:extLst>
+                  <a:ext uri="{96DAC541-7B7A-43D3-8B79-37D633B846F1}">
+                    <asvg:svgBlip xmlns:asvg="http://schemas.microsoft.com/office/drawing/2016/SVG/main" r:embed="rId5"/>
+                  </a:ext>
+                </a:extLst>
+              </a:blip>
+              <a:stretch>
+                <a:fillRect l="0" t="0" r="0" b="0"/>
+              </a:stretch>
+            </a:blipFill>
+          </p:spPr>
+        </p:sp>
+        <p:sp>
+          <p:nvSpPr>
+            <p:cNvPr name="Freeform 7" id="7"/>
+            <p:cNvSpPr/>
+            <p:nvPr/>
+          </p:nvSpPr>
+          <p:spPr>
+            <a:xfrm flipH="false" flipV="false" rot="0">
+              <a:off x="11887200" y="0"/>
+              <a:ext cx="3556000" cy="803656"/>
+            </a:xfrm>
+            <a:custGeom>
+              <a:avLst/>
+              <a:gdLst/>
+              <a:ahLst/>
+              <a:cxnLst/>
+              <a:rect r="r" b="b" t="t" l="l"/>
+              <a:pathLst>
+                <a:path h="803656" w="3556000">
+                  <a:moveTo>
+                    <a:pt x="0" y="0"/>
+                  </a:moveTo>
+                  <a:lnTo>
+                    <a:pt x="3556000" y="0"/>
+                  </a:lnTo>
+                  <a:lnTo>
+                    <a:pt x="3556000" y="803656"/>
+                  </a:lnTo>
+                  <a:lnTo>
+                    <a:pt x="0" y="803656"/>
+                  </a:lnTo>
+                  <a:lnTo>
+                    <a:pt x="0" y="0"/>
+                  </a:lnTo>
+                  <a:close/>
+                </a:path>
+              </a:pathLst>
+            </a:custGeom>
+            <a:blipFill>
+              <a:blip r:embed="rId6"/>
+              <a:stretch>
+                <a:fillRect l="0" t="0" r="0" b="0"/>
+              </a:stretch>
+            </a:blipFill>
+          </p:spPr>
+        </p:sp>
+        <p:sp>
+          <p:nvSpPr>
+            <p:cNvPr name="Freeform 8" id="8"/>
+            <p:cNvSpPr/>
+            <p:nvPr/>
+          </p:nvSpPr>
+          <p:spPr>
+            <a:xfrm flipH="false" flipV="false" rot="0">
+              <a:off x="812800" y="127000"/>
+              <a:ext cx="2413000" cy="504536"/>
+            </a:xfrm>
+            <a:custGeom>
+              <a:avLst/>
+              <a:gdLst/>
+              <a:ahLst/>
+              <a:cxnLst/>
+              <a:rect r="r" b="b" t="t" l="l"/>
+              <a:pathLst>
+                <a:path h="504536" w="2413000">
+                  <a:moveTo>
+                    <a:pt x="0" y="0"/>
+                  </a:moveTo>
+                  <a:lnTo>
+                    <a:pt x="2413000" y="0"/>
+                  </a:lnTo>
+                  <a:lnTo>
+                    <a:pt x="2413000" y="504536"/>
+                  </a:lnTo>
+                  <a:lnTo>
+                    <a:pt x="0" y="504536"/>
+                  </a:lnTo>
+                  <a:lnTo>
+                    <a:pt x="0" y="0"/>
+                  </a:lnTo>
+                  <a:close/>
+                </a:path>
+              </a:pathLst>
+            </a:custGeom>
+            <a:blipFill>
+              <a:blip r:embed="rId7">
+                <a:extLst>
+                  <a:ext uri="{96DAC541-7B7A-43D3-8B79-37D633B846F1}">
+                    <asvg:svgBlip xmlns:asvg="http://schemas.microsoft.com/office/drawing/2016/SVG/main" r:embed="rId8"/>
+                  </a:ext>
+                </a:extLst>
+              </a:blip>
+              <a:stretch>
+                <a:fillRect l="0" t="0" r="0" b="0"/>
+              </a:stretch>
+            </a:blipFill>
+          </p:spPr>
+        </p:sp>
+      </p:grpSp>
+      <p:sp>
+        <p:nvSpPr>
+          <p:cNvPr name="Freeform 9" id="9"/>
           <p:cNvSpPr/>
           <p:nvPr/>
         </p:nvSpPr>
@@ -6747,10 +6912,10 @@
             </a:pathLst>
           </a:custGeom>
           <a:blipFill>
-            <a:blip r:embed="rId4">
+            <a:blip r:embed="rId9">
               <a:extLst>
                 <a:ext uri="{96DAC541-7B7A-43D3-8B79-37D633B846F1}">
-                  <asvg:svgBlip xmlns:asvg="http://schemas.microsoft.com/office/drawing/2016/SVG/main" r:embed="rId5"/>
+                  <asvg:svgBlip xmlns:asvg="http://schemas.microsoft.com/office/drawing/2016/SVG/main" r:embed="rId10"/>
                 </a:ext>
               </a:extLst>
             </a:blip>
@@ -6762,7 +6927,7 @@
       </p:sp>
       <p:grpSp>
         <p:nvGrpSpPr>
-          <p:cNvPr name="Group 6" id="6"/>
+          <p:cNvPr name="Group 10" id="10"/>
           <p:cNvGrpSpPr/>
           <p:nvPr/>
         </p:nvGrpSpPr>
@@ -6776,7 +6941,7 @@
         </p:grpSpPr>
         <p:sp>
           <p:nvSpPr>
-            <p:cNvPr name="Freeform 7" id="7"/>
+            <p:cNvPr name="Freeform 11" id="11"/>
             <p:cNvSpPr/>
             <p:nvPr/>
           </p:nvSpPr>
@@ -6827,7 +6992,7 @@
         </p:sp>
         <p:sp>
           <p:nvSpPr>
-            <p:cNvPr name="TextBox 8" id="8"/>
+            <p:cNvPr name="TextBox 12" id="12"/>
             <p:cNvSpPr txBox="true"/>
             <p:nvPr/>
           </p:nvSpPr>
@@ -6853,454 +7018,9 @@
           </p:txBody>
         </p:sp>
       </p:grpSp>
-      <p:sp>
-        <p:nvSpPr>
-          <p:cNvPr name="TextBox 9" id="9"/>
-          <p:cNvSpPr txBox="true"/>
-          <p:nvPr/>
-        </p:nvSpPr>
-        <p:spPr>
-          <a:xfrm rot="0">
-            <a:off x="11239500" y="6353175"/>
-            <a:ext cx="428625" cy="168592"/>
-          </a:xfrm>
-          <a:prstGeom prst="rect">
-            <a:avLst/>
-          </a:prstGeom>
-        </p:spPr>
-        <p:txBody>
-          <a:bodyPr anchor="t" rtlCol="false" tIns="0" lIns="0" bIns="0" rIns="0">
-            <a:spAutoFit/>
-          </a:bodyPr>
-          <a:lstStyle/>
-          <a:p>
-            <a:pPr algn="l">
-              <a:lnSpc>
-                <a:spcPts val="1372"/>
-              </a:lnSpc>
-            </a:pPr>
-            <a:r>
-              <a:rPr lang="en-US" sz="1125">
-                <a:solidFill>
-                  <a:srgbClr val="536073"/>
-                </a:solidFill>
-                <a:latin typeface="DM Sans"/>
-                <a:ea typeface="DM Sans"/>
-                <a:cs typeface="DM Sans"/>
-                <a:sym typeface="DM Sans"/>
-              </a:rPr>
-              <a:t>01</a:t>
-            </a:r>
-          </a:p>
-        </p:txBody>
-      </p:sp>
-      <p:sp>
-        <p:nvSpPr>
-          <p:cNvPr name="TextBox 10" id="10"/>
-          <p:cNvSpPr txBox="true"/>
-          <p:nvPr/>
-        </p:nvSpPr>
-        <p:spPr>
-          <a:xfrm rot="0">
-            <a:off x="609600" y="533400"/>
-            <a:ext cx="5715000" cy="393382"/>
-          </a:xfrm>
-          <a:prstGeom prst="rect">
-            <a:avLst/>
-          </a:prstGeom>
-        </p:spPr>
-        <p:txBody>
-          <a:bodyPr anchor="t" rtlCol="false" tIns="0" lIns="0" bIns="0" rIns="0">
-            <a:spAutoFit/>
-          </a:bodyPr>
-          <a:lstStyle/>
-          <a:p>
-            <a:pPr algn="l">
-              <a:lnSpc>
-                <a:spcPts val="3202"/>
-              </a:lnSpc>
-            </a:pPr>
-            <a:r>
-              <a:rPr lang="en-US" b="1" sz="2625">
-                <a:solidFill>
-                  <a:srgbClr val="087E70"/>
-                </a:solidFill>
-                <a:latin typeface="DM Sans"/>
-                <a:ea typeface="DM Sans"/>
-                <a:cs typeface="DM Sans"/>
-                <a:sym typeface="DM Sans"/>
-              </a:rPr>
-              <a:t>backtrack.</a:t>
-            </a:r>
-          </a:p>
-        </p:txBody>
-      </p:sp>
-      <p:sp>
-        <p:nvSpPr>
-          <p:cNvPr name="TextBox 11" id="11"/>
-          <p:cNvSpPr txBox="true"/>
-          <p:nvPr/>
-        </p:nvSpPr>
-        <p:spPr>
-          <a:xfrm rot="0">
-            <a:off x="609600" y="1057275"/>
-            <a:ext cx="10972800" cy="674624"/>
-          </a:xfrm>
-          <a:prstGeom prst="rect">
-            <a:avLst/>
-          </a:prstGeom>
-        </p:spPr>
-        <p:txBody>
-          <a:bodyPr anchor="t" rtlCol="false" tIns="0" lIns="0" bIns="0" rIns="0">
-            <a:spAutoFit/>
-          </a:bodyPr>
-          <a:lstStyle/>
-          <a:p>
-            <a:pPr algn="l">
-              <a:lnSpc>
-                <a:spcPts val="5368"/>
-              </a:lnSpc>
-            </a:pPr>
-            <a:r>
-              <a:rPr lang="en-US" b="1" sz="4400">
-                <a:solidFill>
-                  <a:srgbClr val="151521"/>
-                </a:solidFill>
-                <a:latin typeface="DM Sans"/>
-                <a:ea typeface="DM Sans"/>
-                <a:cs typeface="DM Sans"/>
-                <a:sym typeface="DM Sans"/>
-              </a:rPr>
-              <a:t>Find the missing skill.</a:t>
-            </a:r>
-          </a:p>
-        </p:txBody>
-      </p:sp>
-      <p:sp>
-        <p:nvSpPr>
-          <p:cNvPr name="TextBox 12" id="12"/>
-          <p:cNvSpPr txBox="true"/>
-          <p:nvPr/>
-        </p:nvSpPr>
-        <p:spPr>
-          <a:xfrm rot="0">
-            <a:off x="609600" y="1743075"/>
-            <a:ext cx="10972800" cy="674624"/>
-          </a:xfrm>
-          <a:prstGeom prst="rect">
-            <a:avLst/>
-          </a:prstGeom>
-        </p:spPr>
-        <p:txBody>
-          <a:bodyPr anchor="t" rtlCol="false" tIns="0" lIns="0" bIns="0" rIns="0">
-            <a:spAutoFit/>
-          </a:bodyPr>
-          <a:lstStyle/>
-          <a:p>
-            <a:pPr algn="l">
-              <a:lnSpc>
-                <a:spcPts val="5368"/>
-              </a:lnSpc>
-            </a:pPr>
-            <a:r>
-              <a:rPr lang="en-US" b="1" sz="4400">
-                <a:solidFill>
-                  <a:srgbClr val="5753FA"/>
-                </a:solidFill>
-                <a:latin typeface="DM Sans"/>
-                <a:ea typeface="DM Sans"/>
-                <a:cs typeface="DM Sans"/>
-                <a:sym typeface="DM Sans"/>
-              </a:rPr>
-              <a:t>Get back to today’s lesson.</a:t>
-            </a:r>
-          </a:p>
-        </p:txBody>
-      </p:sp>
-      <p:sp>
-        <p:nvSpPr>
-          <p:cNvPr name="TextBox 13" id="13"/>
-          <p:cNvSpPr txBox="true"/>
-          <p:nvPr/>
-        </p:nvSpPr>
-        <p:spPr>
-          <a:xfrm rot="0">
-            <a:off x="609600" y="2733675"/>
-            <a:ext cx="10972800" cy="651891"/>
-          </a:xfrm>
-          <a:prstGeom prst="rect">
-            <a:avLst/>
-          </a:prstGeom>
-        </p:spPr>
-        <p:txBody>
-          <a:bodyPr anchor="t" rtlCol="false" tIns="0" lIns="0" bIns="0" rIns="0">
-            <a:spAutoFit/>
-          </a:bodyPr>
-          <a:lstStyle/>
-          <a:p>
-            <a:pPr algn="l">
-              <a:lnSpc>
-                <a:spcPts val="2562"/>
-              </a:lnSpc>
-            </a:pPr>
-            <a:r>
-              <a:rPr lang="en-US" sz="2100">
-                <a:solidFill>
-                  <a:srgbClr val="536073"/>
-                </a:solidFill>
-                <a:latin typeface="DM Sans"/>
-                <a:ea typeface="DM Sans"/>
-                <a:cs typeface="DM Sans"/>
-                <a:sym typeface="DM Sans"/>
-              </a:rPr>
-              <a:t>THE PROBLEM</a:t>
-            </a:r>
-          </a:p>
-          <a:p>
-            <a:pPr algn="l">
-              <a:lnSpc>
-                <a:spcPts val="2562"/>
-              </a:lnSpc>
-            </a:pPr>
-            <a:r>
-              <a:rPr lang="en-US" sz="2100">
-                <a:solidFill>
-                  <a:srgbClr val="536073"/>
-                </a:solidFill>
-                <a:latin typeface="DM Sans"/>
-                <a:ea typeface="DM Sans"/>
-                <a:cs typeface="DM Sans"/>
-                <a:sym typeface="DM Sans"/>
-              </a:rPr>
-              <a:t>A student gets stuck, but doesn’t know which earlier skill to review.</a:t>
-            </a:r>
-          </a:p>
-        </p:txBody>
-      </p:sp>
-      <p:sp>
-        <p:nvSpPr>
-          <p:cNvPr name="TextBox 14" id="14"/>
-          <p:cNvSpPr txBox="true"/>
-          <p:nvPr/>
-        </p:nvSpPr>
-        <p:spPr>
-          <a:xfrm rot="0">
-            <a:off x="609600" y="6448425"/>
-            <a:ext cx="9525000" cy="215519"/>
-          </a:xfrm>
-          <a:prstGeom prst="rect">
-            <a:avLst/>
-          </a:prstGeom>
-        </p:spPr>
-        <p:txBody>
-          <a:bodyPr anchor="t" rtlCol="false" tIns="0" lIns="0" bIns="0" rIns="0">
-            <a:spAutoFit/>
-          </a:bodyPr>
-          <a:lstStyle/>
-          <a:p>
-            <a:pPr algn="l">
-              <a:lnSpc>
-                <a:spcPts val="1708"/>
-              </a:lnSpc>
-            </a:pPr>
-            <a:r>
-              <a:rPr lang="en-US" sz="1400">
-                <a:solidFill>
-                  <a:srgbClr val="536073"/>
-                </a:solidFill>
-                <a:latin typeface="DM Sans"/>
-                <a:ea typeface="DM Sans"/>
-                <a:cs typeface="DM Sans"/>
-                <a:sym typeface="DM Sans"/>
-              </a:rPr>
-              <a:t>University of the Philippines Manila</a:t>
-            </a:r>
-          </a:p>
-        </p:txBody>
-      </p:sp>
-      <p:sp>
-        <p:nvSpPr>
-          <p:cNvPr name="TextBox 15" id="15"/>
-          <p:cNvSpPr txBox="true"/>
-          <p:nvPr/>
-        </p:nvSpPr>
-        <p:spPr>
-          <a:xfrm rot="0">
-            <a:off x="285750" y="3790950"/>
-            <a:ext cx="2857500" cy="614045"/>
-          </a:xfrm>
-          <a:prstGeom prst="rect">
-            <a:avLst/>
-          </a:prstGeom>
-        </p:spPr>
-        <p:txBody>
-          <a:bodyPr anchor="t" rtlCol="false" tIns="0" lIns="0" bIns="0" rIns="0">
-            <a:spAutoFit/>
-          </a:bodyPr>
-          <a:lstStyle/>
-          <a:p>
-            <a:pPr algn="ctr">
-              <a:lnSpc>
-                <a:spcPts val="2440"/>
-              </a:lnSpc>
-            </a:pPr>
-            <a:r>
-              <a:rPr lang="en-US" sz="2000" b="1">
-                <a:solidFill>
-                  <a:srgbClr val="536073"/>
-                </a:solidFill>
-                <a:latin typeface="DM Sans"/>
-                <a:ea typeface="DM Sans"/>
-                <a:cs typeface="DM Sans"/>
-                <a:sym typeface="DM Sans"/>
-              </a:rPr>
-              <a:t>Check today’s</a:t>
-            </a:r>
-          </a:p>
-          <a:p>
-            <a:pPr algn="ctr">
-              <a:lnSpc>
-                <a:spcPts val="2440"/>
-              </a:lnSpc>
-            </a:pPr>
-            <a:r>
-              <a:rPr lang="en-US" b="1" sz="2000">
-                <a:solidFill>
-                  <a:srgbClr val="536073"/>
-                </a:solidFill>
-                <a:latin typeface="DM Sans"/>
-                <a:ea typeface="DM Sans"/>
-                <a:cs typeface="DM Sans"/>
-                <a:sym typeface="DM Sans"/>
-              </a:rPr>
-              <a:t>task</a:t>
-            </a:r>
-          </a:p>
-        </p:txBody>
-      </p:sp>
-      <p:sp>
-        <p:nvSpPr>
-          <p:cNvPr name="TextBox 16" id="16"/>
-          <p:cNvSpPr txBox="true"/>
-          <p:nvPr/>
-        </p:nvSpPr>
-        <p:spPr>
-          <a:xfrm rot="0">
-            <a:off x="3619500" y="5610225"/>
-            <a:ext cx="4191000" cy="614045"/>
-          </a:xfrm>
-          <a:prstGeom prst="rect">
-            <a:avLst/>
-          </a:prstGeom>
-        </p:spPr>
-        <p:txBody>
-          <a:bodyPr anchor="t" rtlCol="false" tIns="0" lIns="0" bIns="0" rIns="0">
-            <a:spAutoFit/>
-          </a:bodyPr>
-          <a:lstStyle/>
-          <a:p>
-            <a:pPr algn="ctr">
-              <a:lnSpc>
-                <a:spcPts val="2440"/>
-              </a:lnSpc>
-            </a:pPr>
-            <a:r>
-              <a:rPr lang="en-US" sz="2000" b="1">
-                <a:solidFill>
-                  <a:srgbClr val="536073"/>
-                </a:solidFill>
-                <a:latin typeface="DM Sans"/>
-                <a:ea typeface="DM Sans"/>
-                <a:cs typeface="DM Sans"/>
-                <a:sym typeface="DM Sans"/>
-              </a:rPr>
-              <a:t>Practice the missing skill</a:t>
-            </a:r>
-          </a:p>
-          <a:p>
-            <a:pPr algn="ctr">
-              <a:lnSpc>
-                <a:spcPts val="2440"/>
-              </a:lnSpc>
-            </a:pPr>
-            <a:r>
-              <a:rPr lang="en-US" b="1" sz="2000">
-                <a:solidFill>
-                  <a:srgbClr val="536073"/>
-                </a:solidFill>
-                <a:latin typeface="DM Sans"/>
-                <a:ea typeface="DM Sans"/>
-                <a:cs typeface="DM Sans"/>
-                <a:sym typeface="DM Sans"/>
-              </a:rPr>
-              <a:t>with Khan Academy</a:t>
-            </a:r>
-          </a:p>
-        </p:txBody>
-      </p:sp>
-      <p:sp>
-        <p:nvSpPr>
-          <p:cNvPr name="TextBox 17" id="17"/>
-          <p:cNvSpPr txBox="true"/>
-          <p:nvPr/>
-        </p:nvSpPr>
-        <p:spPr>
-          <a:xfrm rot="0">
-            <a:off x="8286750" y="3467100"/>
-            <a:ext cx="3238500" cy="614045"/>
-          </a:xfrm>
-          <a:prstGeom prst="rect">
-            <a:avLst/>
-          </a:prstGeom>
-        </p:spPr>
-        <p:txBody>
-          <a:bodyPr anchor="t" rtlCol="false" tIns="0" lIns="0" bIns="0" rIns="0">
-            <a:spAutoFit/>
-          </a:bodyPr>
-          <a:lstStyle/>
-          <a:p>
-            <a:pPr algn="ctr">
-              <a:lnSpc>
-                <a:spcPts val="2440"/>
-              </a:lnSpc>
-            </a:pPr>
-            <a:r>
-              <a:rPr lang="en-US" b="1" sz="2000">
-                <a:solidFill>
-                  <a:srgbClr val="087E70"/>
-                </a:solidFill>
-                <a:latin typeface="DM Sans"/>
-                <a:ea typeface="DM Sans"/>
-                <a:cs typeface="DM Sans"/>
-                <a:sym typeface="DM Sans"/>
-              </a:rPr>
-              <a:t>Return to today’s lesson</a:t>
-            </a:r>
-          </a:p>
-          <a:p>
-            <a:pPr algn="ctr">
-              <a:lnSpc>
-                <a:spcPts val="2440"/>
-              </a:lnSpc>
-            </a:pPr>
-            <a:r>
-              <a:rPr lang="en-US" b="1" sz="2000">
-                <a:solidFill>
-                  <a:srgbClr val="087E70"/>
-                </a:solidFill>
-                <a:latin typeface="DM Sans"/>
-                <a:ea typeface="DM Sans"/>
-                <a:cs typeface="DM Sans"/>
-                <a:sym typeface="DM Sans"/>
-              </a:rPr>
-              <a:t>with a fresh check</a:t>
-            </a:r>
-          </a:p>
-        </p:txBody>
-      </p:sp>
       <p:grpSp>
         <p:nvGrpSpPr>
-          <p:cNvPr name="Group 18" id="18"/>
+          <p:cNvPr name="Group 13" id="13"/>
           <p:cNvGrpSpPr/>
           <p:nvPr/>
         </p:nvGrpSpPr>
@@ -7314,7 +7034,7 @@
         </p:grpSpPr>
         <p:sp>
           <p:nvSpPr>
-            <p:cNvPr name="Freeform 19" id="19"/>
+            <p:cNvPr name="Freeform 14" id="14"/>
             <p:cNvSpPr/>
             <p:nvPr/>
           </p:nvSpPr>
@@ -7365,7 +7085,7 @@
         </p:sp>
         <p:sp>
           <p:nvSpPr>
-            <p:cNvPr name="TextBox 20" id="20"/>
+            <p:cNvPr name="TextBox 15" id="15"/>
             <p:cNvSpPr txBox="true"/>
             <p:nvPr/>
           </p:nvSpPr>
@@ -7391,99 +7111,462 @@
           </p:txBody>
         </p:sp>
       </p:grpSp>
-      <p:grpSp>
-        <p:nvGrpSpPr>
-          <p:cNvPr name="Group 21" id="21"/>
-          <p:cNvGrpSpPr/>
-          <p:nvPr/>
-        </p:nvGrpSpPr>
-        <p:grpSpPr>
-          <a:xfrm rot="0">
-            <a:off x="9772650" y="4152900"/>
-            <a:ext cx="266700" cy="266700"/>
-            <a:chOff x="0" y="0"/>
-            <a:chExt cx="105363" cy="105363"/>
-          </a:xfrm>
-        </p:grpSpPr>
-        <p:sp>
-          <p:nvSpPr>
-            <p:cNvPr name="Freeform 22" id="22"/>
-            <p:cNvSpPr/>
-            <p:nvPr/>
-          </p:nvSpPr>
-          <p:spPr>
-            <a:xfrm flipH="false" flipV="false" rot="0">
-              <a:off x="0" y="0"/>
-              <a:ext cx="105363" cy="105363"/>
-            </a:xfrm>
-            <a:custGeom>
-              <a:avLst/>
-              <a:gdLst/>
-              <a:ahLst/>
-              <a:cxnLst/>
-              <a:rect r="r" b="b" t="t" l="l"/>
-              <a:pathLst>
-                <a:path h="105363" w="105363">
-                  <a:moveTo>
-                    <a:pt x="52681" y="0"/>
-                  </a:moveTo>
-                  <a:cubicBezTo>
-                    <a:pt x="23586" y="0"/>
-                    <a:pt x="0" y="23586"/>
-                    <a:pt x="0" y="52681"/>
-                  </a:cubicBezTo>
-                  <a:cubicBezTo>
-                    <a:pt x="0" y="81777"/>
-                    <a:pt x="23586" y="105363"/>
-                    <a:pt x="52681" y="105363"/>
-                  </a:cubicBezTo>
-                  <a:cubicBezTo>
-                    <a:pt x="81777" y="105363"/>
-                    <a:pt x="105363" y="81777"/>
-                    <a:pt x="105363" y="52681"/>
-                  </a:cubicBezTo>
-                  <a:cubicBezTo>
-                    <a:pt x="105363" y="23586"/>
-                    <a:pt x="81777" y="0"/>
-                    <a:pt x="52681" y="0"/>
-                  </a:cubicBezTo>
-                  <a:close/>
-                </a:path>
-              </a:pathLst>
-            </a:custGeom>
-            <a:solidFill>
-              <a:srgbClr val="087E70"/>
-            </a:solidFill>
-          </p:spPr>
-        </p:sp>
-        <p:sp>
-          <p:nvSpPr>
-            <p:cNvPr name="TextBox 23" id="23"/>
-            <p:cNvSpPr txBox="true"/>
-            <p:nvPr/>
-          </p:nvSpPr>
-          <p:spPr>
-            <a:xfrm>
-              <a:off x="9878" y="9878"/>
-              <a:ext cx="85607" cy="85607"/>
-            </a:xfrm>
-            <a:prstGeom prst="rect">
-              <a:avLst/>
-            </a:prstGeom>
-          </p:spPr>
-          <p:txBody>
-            <a:bodyPr anchor="ctr" rtlCol="false" tIns="50800" lIns="50800" bIns="50800" rIns="50800"/>
-            <a:lstStyle/>
-            <a:p>
-              <a:pPr algn="ctr">
-                <a:lnSpc>
-                  <a:spcPts val="1372"/>
-                </a:lnSpc>
-              </a:pPr>
-            </a:p>
-          </p:txBody>
-        </p:sp>
-      </p:grpSp>
+      <p:sp>
+        <p:nvSpPr>
+          <p:cNvPr name="Freeform 16" id="16"/>
+          <p:cNvSpPr/>
+          <p:nvPr/>
+        </p:nvSpPr>
+        <p:spPr>
+          <a:xfrm flipH="false" flipV="false" rot="0">
+            <a:off x="9734550" y="3829050"/>
+            <a:ext cx="342900" cy="457755"/>
+          </a:xfrm>
+          <a:custGeom>
+            <a:avLst/>
+            <a:gdLst/>
+            <a:ahLst/>
+            <a:cxnLst/>
+            <a:rect r="r" b="b" t="t" l="l"/>
+            <a:pathLst>
+              <a:path h="457755" w="342900">
+                <a:moveTo>
+                  <a:pt x="0" y="0"/>
+                </a:moveTo>
+                <a:lnTo>
+                  <a:pt x="342900" y="0"/>
+                </a:lnTo>
+                <a:lnTo>
+                  <a:pt x="342900" y="457755"/>
+                </a:lnTo>
+                <a:lnTo>
+                  <a:pt x="0" y="457755"/>
+                </a:lnTo>
+                <a:lnTo>
+                  <a:pt x="0" y="0"/>
+                </a:lnTo>
+                <a:close/>
+              </a:path>
+            </a:pathLst>
+          </a:custGeom>
+          <a:blipFill>
+            <a:blip r:embed="rId11">
+              <a:extLst>
+                <a:ext uri="{96DAC541-7B7A-43D3-8B79-37D633B846F1}">
+                  <asvg:svgBlip xmlns:asvg="http://schemas.microsoft.com/office/drawing/2016/SVG/main" r:embed="rId12"/>
+                </a:ext>
+              </a:extLst>
+            </a:blip>
+            <a:stretch>
+              <a:fillRect l="0" t="0" r="0" b="0"/>
+            </a:stretch>
+          </a:blipFill>
+        </p:spPr>
+      </p:sp>
+      <p:sp>
+        <p:nvSpPr>
+          <p:cNvPr name="TextBox 17" id="17"/>
+          <p:cNvSpPr txBox="true"/>
+          <p:nvPr/>
+        </p:nvSpPr>
+        <p:spPr>
+          <a:xfrm rot="0">
+            <a:off x="11239500" y="6353175"/>
+            <a:ext cx="428625" cy="168592"/>
+          </a:xfrm>
+          <a:prstGeom prst="rect">
+            <a:avLst/>
+          </a:prstGeom>
+        </p:spPr>
+        <p:txBody>
+          <a:bodyPr anchor="t" rtlCol="false" tIns="0" lIns="0" bIns="0" rIns="0">
+            <a:spAutoFit/>
+          </a:bodyPr>
+          <a:lstStyle/>
+          <a:p>
+            <a:pPr algn="l">
+              <a:lnSpc>
+                <a:spcPts val="1372"/>
+              </a:lnSpc>
+            </a:pPr>
+            <a:r>
+              <a:rPr lang="en-US" sz="1125">
+                <a:solidFill>
+                  <a:srgbClr val="536073"/>
+                </a:solidFill>
+                <a:latin typeface="DM Sans"/>
+                <a:ea typeface="DM Sans"/>
+                <a:cs typeface="DM Sans"/>
+                <a:sym typeface="DM Sans"/>
+              </a:rPr>
+              <a:t>01</a:t>
+            </a:r>
+          </a:p>
+        </p:txBody>
+      </p:sp>
+      <p:sp>
+        <p:nvSpPr>
+          <p:cNvPr name="TextBox 18" id="18"/>
+          <p:cNvSpPr txBox="true"/>
+          <p:nvPr/>
+        </p:nvSpPr>
+        <p:spPr>
+          <a:xfrm rot="0">
+            <a:off x="609600" y="1057275"/>
+            <a:ext cx="10972800" cy="674624"/>
+          </a:xfrm>
+          <a:prstGeom prst="rect">
+            <a:avLst/>
+          </a:prstGeom>
+        </p:spPr>
+        <p:txBody>
+          <a:bodyPr anchor="t" rtlCol="false" tIns="0" lIns="0" bIns="0" rIns="0">
+            <a:spAutoFit/>
+          </a:bodyPr>
+          <a:lstStyle/>
+          <a:p>
+            <a:pPr algn="l">
+              <a:lnSpc>
+                <a:spcPts val="5368"/>
+              </a:lnSpc>
+            </a:pPr>
+            <a:r>
+              <a:rPr lang="en-US" b="1" sz="4400">
+                <a:solidFill>
+                  <a:srgbClr val="151521"/>
+                </a:solidFill>
+                <a:latin typeface="DM Sans"/>
+                <a:ea typeface="DM Sans"/>
+                <a:cs typeface="DM Sans"/>
+                <a:sym typeface="DM Sans"/>
+              </a:rPr>
+              <a:t>Find the missing skill.</a:t>
+            </a:r>
+          </a:p>
+        </p:txBody>
+      </p:sp>
+      <p:sp>
+        <p:nvSpPr>
+          <p:cNvPr name="TextBox 19" id="19"/>
+          <p:cNvSpPr txBox="true"/>
+          <p:nvPr/>
+        </p:nvSpPr>
+        <p:spPr>
+          <a:xfrm rot="0">
+            <a:off x="609600" y="1743075"/>
+            <a:ext cx="10972800" cy="674624"/>
+          </a:xfrm>
+          <a:prstGeom prst="rect">
+            <a:avLst/>
+          </a:prstGeom>
+        </p:spPr>
+        <p:txBody>
+          <a:bodyPr anchor="t" rtlCol="false" tIns="0" lIns="0" bIns="0" rIns="0">
+            <a:spAutoFit/>
+          </a:bodyPr>
+          <a:lstStyle/>
+          <a:p>
+            <a:pPr algn="l">
+              <a:lnSpc>
+                <a:spcPts val="5368"/>
+              </a:lnSpc>
+            </a:pPr>
+            <a:r>
+              <a:rPr lang="en-US" b="1" sz="4400">
+                <a:solidFill>
+                  <a:srgbClr val="5753FA"/>
+                </a:solidFill>
+                <a:latin typeface="DM Sans"/>
+                <a:ea typeface="DM Sans"/>
+                <a:cs typeface="DM Sans"/>
+                <a:sym typeface="DM Sans"/>
+              </a:rPr>
+              <a:t>Get back to today’s lesson.</a:t>
+            </a:r>
+          </a:p>
+        </p:txBody>
+      </p:sp>
+      <p:sp>
+        <p:nvSpPr>
+          <p:cNvPr name="TextBox 20" id="20"/>
+          <p:cNvSpPr txBox="true"/>
+          <p:nvPr/>
+        </p:nvSpPr>
+        <p:spPr>
+          <a:xfrm rot="0">
+            <a:off x="609600" y="2733675"/>
+            <a:ext cx="10972800" cy="651891"/>
+          </a:xfrm>
+          <a:prstGeom prst="rect">
+            <a:avLst/>
+          </a:prstGeom>
+        </p:spPr>
+        <p:txBody>
+          <a:bodyPr anchor="t" rtlCol="false" tIns="0" lIns="0" bIns="0" rIns="0">
+            <a:spAutoFit/>
+          </a:bodyPr>
+          <a:lstStyle/>
+          <a:p>
+            <a:pPr algn="l">
+              <a:lnSpc>
+                <a:spcPts val="2562"/>
+              </a:lnSpc>
+            </a:pPr>
+            <a:r>
+              <a:rPr lang="en-US" sz="2100">
+                <a:solidFill>
+                  <a:srgbClr val="536073"/>
+                </a:solidFill>
+                <a:latin typeface="DM Sans"/>
+                <a:ea typeface="DM Sans"/>
+                <a:cs typeface="DM Sans"/>
+                <a:sym typeface="DM Sans"/>
+              </a:rPr>
+              <a:t>THE PROBLEM</a:t>
+            </a:r>
+          </a:p>
+          <a:p>
+            <a:pPr algn="l">
+              <a:lnSpc>
+                <a:spcPts val="2562"/>
+              </a:lnSpc>
+            </a:pPr>
+            <a:r>
+              <a:rPr lang="en-US" sz="2100">
+                <a:solidFill>
+                  <a:srgbClr val="536073"/>
+                </a:solidFill>
+                <a:latin typeface="DM Sans"/>
+                <a:ea typeface="DM Sans"/>
+                <a:cs typeface="DM Sans"/>
+                <a:sym typeface="DM Sans"/>
+              </a:rPr>
+              <a:t>A student gets stuck, but doesn’t know which earlier skill to review.</a:t>
+            </a:r>
+          </a:p>
+        </p:txBody>
+      </p:sp>
+      <p:sp>
+        <p:nvSpPr>
+          <p:cNvPr name="TextBox 21" id="21"/>
+          <p:cNvSpPr txBox="true"/>
+          <p:nvPr/>
+        </p:nvSpPr>
+        <p:spPr>
+          <a:xfrm rot="0">
+            <a:off x="609600" y="6448425"/>
+            <a:ext cx="9525000" cy="215519"/>
+          </a:xfrm>
+          <a:prstGeom prst="rect">
+            <a:avLst/>
+          </a:prstGeom>
+        </p:spPr>
+        <p:txBody>
+          <a:bodyPr anchor="t" rtlCol="false" tIns="0" lIns="0" bIns="0" rIns="0">
+            <a:spAutoFit/>
+          </a:bodyPr>
+          <a:lstStyle/>
+          <a:p>
+            <a:pPr algn="l">
+              <a:lnSpc>
+                <a:spcPts val="1708"/>
+              </a:lnSpc>
+            </a:pPr>
+            <a:r>
+              <a:rPr lang="en-US" sz="1400">
+                <a:solidFill>
+                  <a:srgbClr val="536073"/>
+                </a:solidFill>
+                <a:latin typeface="DM Sans"/>
+                <a:ea typeface="DM Sans"/>
+                <a:cs typeface="DM Sans"/>
+                <a:sym typeface="DM Sans"/>
+              </a:rPr>
+              <a:t>University of the Philippines Manila</a:t>
+            </a:r>
+          </a:p>
+        </p:txBody>
+      </p:sp>
+      <p:sp>
+        <p:nvSpPr>
+          <p:cNvPr name="TextBox 22" id="22"/>
+          <p:cNvSpPr txBox="true"/>
+          <p:nvPr/>
+        </p:nvSpPr>
+        <p:spPr>
+          <a:xfrm rot="0">
+            <a:off x="285750" y="3790950"/>
+            <a:ext cx="2857500" cy="614045"/>
+          </a:xfrm>
+          <a:prstGeom prst="rect">
+            <a:avLst/>
+          </a:prstGeom>
+        </p:spPr>
+        <p:txBody>
+          <a:bodyPr anchor="t" rtlCol="false" tIns="0" lIns="0" bIns="0" rIns="0">
+            <a:spAutoFit/>
+          </a:bodyPr>
+          <a:lstStyle/>
+          <a:p>
+            <a:pPr algn="ctr">
+              <a:lnSpc>
+                <a:spcPts val="2440"/>
+              </a:lnSpc>
+            </a:pPr>
+            <a:r>
+              <a:rPr lang="en-US" sz="2000" b="1">
+                <a:solidFill>
+                  <a:srgbClr val="536073"/>
+                </a:solidFill>
+                <a:latin typeface="DM Sans"/>
+                <a:ea typeface="DM Sans"/>
+                <a:cs typeface="DM Sans"/>
+                <a:sym typeface="DM Sans"/>
+              </a:rPr>
+              <a:t>Check today’s</a:t>
+            </a:r>
+          </a:p>
+          <a:p>
+            <a:pPr algn="ctr">
+              <a:lnSpc>
+                <a:spcPts val="2440"/>
+              </a:lnSpc>
+            </a:pPr>
+            <a:r>
+              <a:rPr lang="en-US" b="1" sz="2000">
+                <a:solidFill>
+                  <a:srgbClr val="536073"/>
+                </a:solidFill>
+                <a:latin typeface="DM Sans"/>
+                <a:ea typeface="DM Sans"/>
+                <a:cs typeface="DM Sans"/>
+                <a:sym typeface="DM Sans"/>
+              </a:rPr>
+              <a:t>task</a:t>
+            </a:r>
+          </a:p>
+        </p:txBody>
+      </p:sp>
+      <p:sp>
+        <p:nvSpPr>
+          <p:cNvPr name="TextBox 23" id="23"/>
+          <p:cNvSpPr txBox="true"/>
+          <p:nvPr/>
+        </p:nvSpPr>
+        <p:spPr>
+          <a:xfrm rot="0">
+            <a:off x="3619500" y="5610225"/>
+            <a:ext cx="4191000" cy="614045"/>
+          </a:xfrm>
+          <a:prstGeom prst="rect">
+            <a:avLst/>
+          </a:prstGeom>
+        </p:spPr>
+        <p:txBody>
+          <a:bodyPr anchor="t" rtlCol="false" tIns="0" lIns="0" bIns="0" rIns="0">
+            <a:spAutoFit/>
+          </a:bodyPr>
+          <a:lstStyle/>
+          <a:p>
+            <a:pPr algn="ctr">
+              <a:lnSpc>
+                <a:spcPts val="2440"/>
+              </a:lnSpc>
+            </a:pPr>
+            <a:r>
+              <a:rPr lang="en-US" sz="2000" b="1">
+                <a:solidFill>
+                  <a:srgbClr val="536073"/>
+                </a:solidFill>
+                <a:latin typeface="DM Sans"/>
+                <a:ea typeface="DM Sans"/>
+                <a:cs typeface="DM Sans"/>
+                <a:sym typeface="DM Sans"/>
+              </a:rPr>
+              <a:t>Practice the missing skill</a:t>
+            </a:r>
+          </a:p>
+          <a:p>
+            <a:pPr algn="ctr">
+              <a:lnSpc>
+                <a:spcPts val="2440"/>
+              </a:lnSpc>
+            </a:pPr>
+            <a:r>
+              <a:rPr lang="en-US" b="1" sz="2000">
+                <a:solidFill>
+                  <a:srgbClr val="536073"/>
+                </a:solidFill>
+                <a:latin typeface="DM Sans"/>
+                <a:ea typeface="DM Sans"/>
+                <a:cs typeface="DM Sans"/>
+                <a:sym typeface="DM Sans"/>
+              </a:rPr>
+              <a:t>with Khan Academy</a:t>
+            </a:r>
+          </a:p>
+        </p:txBody>
+      </p:sp>
+      <p:sp>
+        <p:nvSpPr>
+          <p:cNvPr name="TextBox 24" id="24"/>
+          <p:cNvSpPr txBox="true"/>
+          <p:nvPr/>
+        </p:nvSpPr>
+        <p:spPr>
+          <a:xfrm rot="0">
+            <a:off x="8286750" y="4629150"/>
+            <a:ext cx="3238500" cy="614045"/>
+          </a:xfrm>
+          <a:prstGeom prst="rect">
+            <a:avLst/>
+          </a:prstGeom>
+        </p:spPr>
+        <p:txBody>
+          <a:bodyPr anchor="t" rtlCol="false" tIns="0" lIns="0" bIns="0" rIns="0">
+            <a:spAutoFit/>
+          </a:bodyPr>
+          <a:lstStyle/>
+          <a:p>
+            <a:pPr algn="ctr">
+              <a:lnSpc>
+                <a:spcPts val="2440"/>
+              </a:lnSpc>
+            </a:pPr>
+            <a:r>
+              <a:rPr lang="en-US" b="1" sz="2000">
+                <a:solidFill>
+                  <a:srgbClr val="087E70"/>
+                </a:solidFill>
+                <a:latin typeface="DM Sans"/>
+                <a:ea typeface="DM Sans"/>
+                <a:cs typeface="DM Sans"/>
+                <a:sym typeface="DM Sans"/>
+              </a:rPr>
+              <a:t>Return to today’s lesson</a:t>
+            </a:r>
+          </a:p>
+          <a:p>
+            <a:pPr algn="ctr">
+              <a:lnSpc>
+                <a:spcPts val="2440"/>
+              </a:lnSpc>
+            </a:pPr>
+            <a:r>
+              <a:rPr lang="en-US" b="1" sz="2000">
+                <a:solidFill>
+                  <a:srgbClr val="087E70"/>
+                </a:solidFill>
+                <a:latin typeface="DM Sans"/>
+                <a:ea typeface="DM Sans"/>
+                <a:cs typeface="DM Sans"/>
+                <a:sym typeface="DM Sans"/>
+              </a:rPr>
+              <a:t>with a fresh check</a:t>
+            </a:r>
+          </a:p>
+        </p:txBody>
+      </p:sp>
     </p:spTree>
   </p:cSld>
   <p:clrMapOvr>
@@ -7589,9 +7672,174 @@
           </p:spPr>
         </p:sp>
       </p:grpSp>
-      <p:sp>
-        <p:nvSpPr>
-          <p:cNvPr name="TextBox 5" id="5"/>
+      <p:grpSp>
+        <p:nvGrpSpPr>
+          <p:cNvPr name="Group 5" id="5"/>
+          <p:cNvGrpSpPr/>
+          <p:nvPr/>
+        </p:nvGrpSpPr>
+        <p:grpSpPr>
+          <a:xfrm rot="0">
+            <a:off x="0" y="0"/>
+            <a:ext cx="12192000" cy="6858000"/>
+            <a:chOff x="0" y="0"/>
+            <a:chExt cx="16256000" cy="9144000"/>
+          </a:xfrm>
+        </p:grpSpPr>
+        <p:sp>
+          <p:nvSpPr>
+            <p:cNvPr name="Freeform 6" id="6"/>
+            <p:cNvSpPr/>
+            <p:nvPr/>
+          </p:nvSpPr>
+          <p:spPr>
+            <a:xfrm flipH="false" flipV="false" rot="0">
+              <a:off x="0" y="0"/>
+              <a:ext cx="16256000" cy="9144000"/>
+            </a:xfrm>
+            <a:custGeom>
+              <a:avLst/>
+              <a:gdLst/>
+              <a:ahLst/>
+              <a:cxnLst/>
+              <a:rect r="r" b="b" t="t" l="l"/>
+              <a:pathLst>
+                <a:path h="9144000" w="16256000">
+                  <a:moveTo>
+                    <a:pt x="0" y="0"/>
+                  </a:moveTo>
+                  <a:lnTo>
+                    <a:pt x="16256000" y="0"/>
+                  </a:lnTo>
+                  <a:lnTo>
+                    <a:pt x="16256000" y="9144000"/>
+                  </a:lnTo>
+                  <a:lnTo>
+                    <a:pt x="0" y="9144000"/>
+                  </a:lnTo>
+                  <a:lnTo>
+                    <a:pt x="0" y="0"/>
+                  </a:lnTo>
+                  <a:close/>
+                </a:path>
+              </a:pathLst>
+            </a:custGeom>
+            <a:blipFill>
+              <a:blip r:embed="rId4">
+                <a:extLst>
+                  <a:ext uri="{96DAC541-7B7A-43D3-8B79-37D633B846F1}">
+                    <asvg:svgBlip xmlns:asvg="http://schemas.microsoft.com/office/drawing/2016/SVG/main" r:embed="rId5"/>
+                  </a:ext>
+                </a:extLst>
+              </a:blip>
+              <a:stretch>
+                <a:fillRect l="0" t="0" r="0" b="0"/>
+              </a:stretch>
+            </a:blipFill>
+          </p:spPr>
+        </p:sp>
+        <p:sp>
+          <p:nvSpPr>
+            <p:cNvPr name="Freeform 7" id="7"/>
+            <p:cNvSpPr/>
+            <p:nvPr/>
+          </p:nvSpPr>
+          <p:spPr>
+            <a:xfrm flipH="false" flipV="false" rot="0">
+              <a:off x="11887200" y="0"/>
+              <a:ext cx="3556000" cy="803656"/>
+            </a:xfrm>
+            <a:custGeom>
+              <a:avLst/>
+              <a:gdLst/>
+              <a:ahLst/>
+              <a:cxnLst/>
+              <a:rect r="r" b="b" t="t" l="l"/>
+              <a:pathLst>
+                <a:path h="803656" w="3556000">
+                  <a:moveTo>
+                    <a:pt x="0" y="0"/>
+                  </a:moveTo>
+                  <a:lnTo>
+                    <a:pt x="3556000" y="0"/>
+                  </a:lnTo>
+                  <a:lnTo>
+                    <a:pt x="3556000" y="803656"/>
+                  </a:lnTo>
+                  <a:lnTo>
+                    <a:pt x="0" y="803656"/>
+                  </a:lnTo>
+                  <a:lnTo>
+                    <a:pt x="0" y="0"/>
+                  </a:lnTo>
+                  <a:close/>
+                </a:path>
+              </a:pathLst>
+            </a:custGeom>
+            <a:blipFill>
+              <a:blip r:embed="rId6"/>
+              <a:stretch>
+                <a:fillRect l="0" t="0" r="0" b="0"/>
+              </a:stretch>
+            </a:blipFill>
+          </p:spPr>
+        </p:sp>
+        <p:sp>
+          <p:nvSpPr>
+            <p:cNvPr name="Freeform 8" id="8"/>
+            <p:cNvSpPr/>
+            <p:nvPr/>
+          </p:nvSpPr>
+          <p:spPr>
+            <a:xfrm flipH="false" flipV="false" rot="0">
+              <a:off x="812800" y="127000"/>
+              <a:ext cx="2413000" cy="504536"/>
+            </a:xfrm>
+            <a:custGeom>
+              <a:avLst/>
+              <a:gdLst/>
+              <a:ahLst/>
+              <a:cxnLst/>
+              <a:rect r="r" b="b" t="t" l="l"/>
+              <a:pathLst>
+                <a:path h="504536" w="2413000">
+                  <a:moveTo>
+                    <a:pt x="0" y="0"/>
+                  </a:moveTo>
+                  <a:lnTo>
+                    <a:pt x="2413000" y="0"/>
+                  </a:lnTo>
+                  <a:lnTo>
+                    <a:pt x="2413000" y="504536"/>
+                  </a:lnTo>
+                  <a:lnTo>
+                    <a:pt x="0" y="504536"/>
+                  </a:lnTo>
+                  <a:lnTo>
+                    <a:pt x="0" y="0"/>
+                  </a:lnTo>
+                  <a:close/>
+                </a:path>
+              </a:pathLst>
+            </a:custGeom>
+            <a:blipFill>
+              <a:blip r:embed="rId7">
+                <a:extLst>
+                  <a:ext uri="{96DAC541-7B7A-43D3-8B79-37D633B846F1}">
+                    <asvg:svgBlip xmlns:asvg="http://schemas.microsoft.com/office/drawing/2016/SVG/main" r:embed="rId8"/>
+                  </a:ext>
+                </a:extLst>
+              </a:blip>
+              <a:stretch>
+                <a:fillRect l="0" t="0" r="0" b="0"/>
+              </a:stretch>
+            </a:blipFill>
+          </p:spPr>
+        </p:sp>
+      </p:grpSp>
+      <p:sp>
+        <p:nvSpPr>
+          <p:cNvPr name="TextBox 9" id="9"/>
           <p:cNvSpPr txBox="true"/>
           <p:nvPr/>
         </p:nvSpPr>
@@ -7632,7 +7880,7 @@
       </p:sp>
       <p:sp>
         <p:nvSpPr>
-          <p:cNvPr name="TextBox 6" id="6"/>
+          <p:cNvPr name="TextBox 10" id="10"/>
           <p:cNvSpPr txBox="true"/>
           <p:nvPr/>
         </p:nvSpPr>
@@ -7673,7 +7921,7 @@
       </p:sp>
       <p:sp>
         <p:nvSpPr>
-          <p:cNvPr name="AutoShape 7" id="7"/>
+          <p:cNvPr name="AutoShape 11" id="11"/>
           <p:cNvSpPr/>
           <p:nvPr/>
         </p:nvSpPr>
@@ -7692,7 +7940,7 @@
       </p:sp>
       <p:sp>
         <p:nvSpPr>
-          <p:cNvPr name="AutoShape 8" id="8"/>
+          <p:cNvPr name="AutoShape 12" id="12"/>
           <p:cNvSpPr/>
           <p:nvPr/>
         </p:nvSpPr>
@@ -7711,7 +7959,7 @@
       </p:sp>
       <p:sp>
         <p:nvSpPr>
-          <p:cNvPr name="TextBox 9" id="9"/>
+          <p:cNvPr name="TextBox 13" id="13"/>
           <p:cNvSpPr txBox="true"/>
           <p:nvPr/>
         </p:nvSpPr>
@@ -7752,7 +8000,7 @@
       </p:sp>
       <p:sp>
         <p:nvSpPr>
-          <p:cNvPr name="TextBox 10" id="10"/>
+          <p:cNvPr name="TextBox 14" id="14"/>
           <p:cNvSpPr txBox="true"/>
           <p:nvPr/>
         </p:nvSpPr>
@@ -7793,7 +8041,7 @@
       </p:sp>
       <p:sp>
         <p:nvSpPr>
-          <p:cNvPr name="TextBox 11" id="11"/>
+          <p:cNvPr name="TextBox 15" id="15"/>
           <p:cNvSpPr txBox="true"/>
           <p:nvPr/>
         </p:nvSpPr>
@@ -7834,7 +8082,7 @@
       </p:sp>
       <p:sp>
         <p:nvSpPr>
-          <p:cNvPr name="TextBox 12" id="12"/>
+          <p:cNvPr name="TextBox 16" id="16"/>
           <p:cNvSpPr txBox="true"/>
           <p:nvPr/>
         </p:nvSpPr>
@@ -7875,7 +8123,7 @@
       </p:sp>
       <p:grpSp>
         <p:nvGrpSpPr>
-          <p:cNvPr name="Group 13" id="13"/>
+          <p:cNvPr name="Group 17" id="17"/>
           <p:cNvGrpSpPr/>
           <p:nvPr/>
         </p:nvGrpSpPr>
@@ -7889,7 +8137,7 @@
         </p:grpSpPr>
         <p:sp>
           <p:nvSpPr>
-            <p:cNvPr name="Freeform 14" id="14"/>
+            <p:cNvPr name="Freeform 18" id="18"/>
             <p:cNvSpPr/>
             <p:nvPr/>
           </p:nvSpPr>
@@ -7921,150 +8169,6 @@
                     <a:pt x="838200" y="39370"/>
                     <a:pt x="826770" y="50800"/>
                     <a:pt x="812800" y="50800"/>
-                  </a:cubicBezTo>
-                  <a:lnTo>
-                    <a:pt x="25400" y="50800"/>
-                  </a:lnTo>
-                  <a:cubicBezTo>
-                    <a:pt x="11430" y="50800"/>
-                    <a:pt x="0" y="39370"/>
-                    <a:pt x="0" y="25400"/>
-                  </a:cubicBezTo>
-                  <a:cubicBezTo>
-                    <a:pt x="0" y="11430"/>
-                    <a:pt x="11430" y="0"/>
-                    <a:pt x="25400" y="0"/>
-                  </a:cubicBezTo>
-                  <a:close/>
-                </a:path>
-              </a:pathLst>
-            </a:custGeom>
-            <a:solidFill>
-              <a:srgbClr val="087E70"/>
-            </a:solidFill>
-          </p:spPr>
-        </p:sp>
-      </p:grpSp>
-      <p:grpSp>
-        <p:nvGrpSpPr>
-          <p:cNvPr name="Group 15" id="15"/>
-          <p:cNvGrpSpPr/>
-          <p:nvPr/>
-        </p:nvGrpSpPr>
-        <p:grpSpPr>
-          <a:xfrm rot="0">
-            <a:off x="3190875" y="4505325"/>
-            <a:ext cx="2914650" cy="38100"/>
-            <a:chOff x="0" y="0"/>
-            <a:chExt cx="3886200" cy="50800"/>
-          </a:xfrm>
-        </p:grpSpPr>
-        <p:sp>
-          <p:nvSpPr>
-            <p:cNvPr name="Freeform 16" id="16"/>
-            <p:cNvSpPr/>
-            <p:nvPr/>
-          </p:nvSpPr>
-          <p:spPr>
-            <a:xfrm flipH="false" flipV="false" rot="0">
-              <a:off x="0" y="0"/>
-              <a:ext cx="3886200" cy="50800"/>
-            </a:xfrm>
-            <a:custGeom>
-              <a:avLst/>
-              <a:gdLst/>
-              <a:ahLst/>
-              <a:cxnLst/>
-              <a:rect r="r" b="b" t="t" l="l"/>
-              <a:pathLst>
-                <a:path h="50800" w="3886200">
-                  <a:moveTo>
-                    <a:pt x="25400" y="0"/>
-                  </a:moveTo>
-                  <a:lnTo>
-                    <a:pt x="3860800" y="0"/>
-                  </a:lnTo>
-                  <a:cubicBezTo>
-                    <a:pt x="3874770" y="0"/>
-                    <a:pt x="3886200" y="11430"/>
-                    <a:pt x="3886200" y="25400"/>
-                  </a:cubicBezTo>
-                  <a:cubicBezTo>
-                    <a:pt x="3886200" y="39370"/>
-                    <a:pt x="3874770" y="50800"/>
-                    <a:pt x="3860800" y="50800"/>
-                  </a:cubicBezTo>
-                  <a:lnTo>
-                    <a:pt x="25400" y="50800"/>
-                  </a:lnTo>
-                  <a:cubicBezTo>
-                    <a:pt x="11430" y="50800"/>
-                    <a:pt x="0" y="39370"/>
-                    <a:pt x="0" y="25400"/>
-                  </a:cubicBezTo>
-                  <a:cubicBezTo>
-                    <a:pt x="0" y="11430"/>
-                    <a:pt x="11430" y="0"/>
-                    <a:pt x="25400" y="0"/>
-                  </a:cubicBezTo>
-                  <a:close/>
-                </a:path>
-              </a:pathLst>
-            </a:custGeom>
-            <a:solidFill>
-              <a:srgbClr val="087E70"/>
-            </a:solidFill>
-          </p:spPr>
-        </p:sp>
-      </p:grpSp>
-      <p:grpSp>
-        <p:nvGrpSpPr>
-          <p:cNvPr name="Group 17" id="17"/>
-          <p:cNvGrpSpPr/>
-          <p:nvPr/>
-        </p:nvGrpSpPr>
-        <p:grpSpPr>
-          <a:xfrm rot="5400000">
-            <a:off x="5872162" y="4729162"/>
-            <a:ext cx="447675" cy="38100"/>
-            <a:chOff x="0" y="0"/>
-            <a:chExt cx="596900" cy="50800"/>
-          </a:xfrm>
-        </p:grpSpPr>
-        <p:sp>
-          <p:nvSpPr>
-            <p:cNvPr name="Freeform 18" id="18"/>
-            <p:cNvSpPr/>
-            <p:nvPr/>
-          </p:nvSpPr>
-          <p:spPr>
-            <a:xfrm flipH="false" flipV="false" rot="0">
-              <a:off x="0" y="0"/>
-              <a:ext cx="596900" cy="50800"/>
-            </a:xfrm>
-            <a:custGeom>
-              <a:avLst/>
-              <a:gdLst/>
-              <a:ahLst/>
-              <a:cxnLst/>
-              <a:rect r="r" b="b" t="t" l="l"/>
-              <a:pathLst>
-                <a:path h="50800" w="596900">
-                  <a:moveTo>
-                    <a:pt x="25400" y="0"/>
-                  </a:moveTo>
-                  <a:lnTo>
-                    <a:pt x="571500" y="0"/>
-                  </a:lnTo>
-                  <a:cubicBezTo>
-                    <a:pt x="585470" y="0"/>
-                    <a:pt x="596900" y="11430"/>
-                    <a:pt x="596900" y="25400"/>
-                  </a:cubicBezTo>
-                  <a:cubicBezTo>
-                    <a:pt x="596900" y="39370"/>
-                    <a:pt x="585470" y="50800"/>
-                    <a:pt x="571500" y="50800"/>
                   </a:cubicBezTo>
                   <a:lnTo>
                     <a:pt x="25400" y="50800"/>
@@ -8096,6 +8200,150 @@
           <p:nvPr/>
         </p:nvGrpSpPr>
         <p:grpSpPr>
+          <a:xfrm rot="0">
+            <a:off x="3190875" y="4505325"/>
+            <a:ext cx="2914650" cy="38100"/>
+            <a:chOff x="0" y="0"/>
+            <a:chExt cx="3886200" cy="50800"/>
+          </a:xfrm>
+        </p:grpSpPr>
+        <p:sp>
+          <p:nvSpPr>
+            <p:cNvPr name="Freeform 20" id="20"/>
+            <p:cNvSpPr/>
+            <p:nvPr/>
+          </p:nvSpPr>
+          <p:spPr>
+            <a:xfrm flipH="false" flipV="false" rot="0">
+              <a:off x="0" y="0"/>
+              <a:ext cx="3886200" cy="50800"/>
+            </a:xfrm>
+            <a:custGeom>
+              <a:avLst/>
+              <a:gdLst/>
+              <a:ahLst/>
+              <a:cxnLst/>
+              <a:rect r="r" b="b" t="t" l="l"/>
+              <a:pathLst>
+                <a:path h="50800" w="3886200">
+                  <a:moveTo>
+                    <a:pt x="25400" y="0"/>
+                  </a:moveTo>
+                  <a:lnTo>
+                    <a:pt x="3860800" y="0"/>
+                  </a:lnTo>
+                  <a:cubicBezTo>
+                    <a:pt x="3874770" y="0"/>
+                    <a:pt x="3886200" y="11430"/>
+                    <a:pt x="3886200" y="25400"/>
+                  </a:cubicBezTo>
+                  <a:cubicBezTo>
+                    <a:pt x="3886200" y="39370"/>
+                    <a:pt x="3874770" y="50800"/>
+                    <a:pt x="3860800" y="50800"/>
+                  </a:cubicBezTo>
+                  <a:lnTo>
+                    <a:pt x="25400" y="50800"/>
+                  </a:lnTo>
+                  <a:cubicBezTo>
+                    <a:pt x="11430" y="50800"/>
+                    <a:pt x="0" y="39370"/>
+                    <a:pt x="0" y="25400"/>
+                  </a:cubicBezTo>
+                  <a:cubicBezTo>
+                    <a:pt x="0" y="11430"/>
+                    <a:pt x="11430" y="0"/>
+                    <a:pt x="25400" y="0"/>
+                  </a:cubicBezTo>
+                  <a:close/>
+                </a:path>
+              </a:pathLst>
+            </a:custGeom>
+            <a:solidFill>
+              <a:srgbClr val="087E70"/>
+            </a:solidFill>
+          </p:spPr>
+        </p:sp>
+      </p:grpSp>
+      <p:grpSp>
+        <p:nvGrpSpPr>
+          <p:cNvPr name="Group 21" id="21"/>
+          <p:cNvGrpSpPr/>
+          <p:nvPr/>
+        </p:nvGrpSpPr>
+        <p:grpSpPr>
+          <a:xfrm rot="5400000">
+            <a:off x="5872162" y="4729162"/>
+            <a:ext cx="447675" cy="38100"/>
+            <a:chOff x="0" y="0"/>
+            <a:chExt cx="596900" cy="50800"/>
+          </a:xfrm>
+        </p:grpSpPr>
+        <p:sp>
+          <p:nvSpPr>
+            <p:cNvPr name="Freeform 22" id="22"/>
+            <p:cNvSpPr/>
+            <p:nvPr/>
+          </p:nvSpPr>
+          <p:spPr>
+            <a:xfrm flipH="false" flipV="false" rot="0">
+              <a:off x="0" y="0"/>
+              <a:ext cx="596900" cy="50800"/>
+            </a:xfrm>
+            <a:custGeom>
+              <a:avLst/>
+              <a:gdLst/>
+              <a:ahLst/>
+              <a:cxnLst/>
+              <a:rect r="r" b="b" t="t" l="l"/>
+              <a:pathLst>
+                <a:path h="50800" w="596900">
+                  <a:moveTo>
+                    <a:pt x="25400" y="0"/>
+                  </a:moveTo>
+                  <a:lnTo>
+                    <a:pt x="571500" y="0"/>
+                  </a:lnTo>
+                  <a:cubicBezTo>
+                    <a:pt x="585470" y="0"/>
+                    <a:pt x="596900" y="11430"/>
+                    <a:pt x="596900" y="25400"/>
+                  </a:cubicBezTo>
+                  <a:cubicBezTo>
+                    <a:pt x="596900" y="39370"/>
+                    <a:pt x="585470" y="50800"/>
+                    <a:pt x="571500" y="50800"/>
+                  </a:cubicBezTo>
+                  <a:lnTo>
+                    <a:pt x="25400" y="50800"/>
+                  </a:lnTo>
+                  <a:cubicBezTo>
+                    <a:pt x="11430" y="50800"/>
+                    <a:pt x="0" y="39370"/>
+                    <a:pt x="0" y="25400"/>
+                  </a:cubicBezTo>
+                  <a:cubicBezTo>
+                    <a:pt x="0" y="11430"/>
+                    <a:pt x="11430" y="0"/>
+                    <a:pt x="25400" y="0"/>
+                  </a:cubicBezTo>
+                  <a:close/>
+                </a:path>
+              </a:pathLst>
+            </a:custGeom>
+            <a:solidFill>
+              <a:srgbClr val="087E70"/>
+            </a:solidFill>
+          </p:spPr>
+        </p:sp>
+      </p:grpSp>
+      <p:grpSp>
+        <p:nvGrpSpPr>
+          <p:cNvPr name="Group 23" id="23"/>
+          <p:cNvGrpSpPr/>
+          <p:nvPr/>
+        </p:nvGrpSpPr>
+        <p:grpSpPr>
           <a:xfrm rot="5400000">
             <a:off x="8543925" y="4200525"/>
             <a:ext cx="628650" cy="38100"/>
@@ -8105,7 +8353,7 @@
         </p:grpSpPr>
         <p:sp>
           <p:nvSpPr>
-            <p:cNvPr name="Freeform 20" id="20"/>
+            <p:cNvPr name="Freeform 24" id="24"/>
             <p:cNvSpPr/>
             <p:nvPr/>
           </p:nvSpPr>
@@ -8163,7 +8411,7 @@
       </p:grpSp>
       <p:grpSp>
         <p:nvGrpSpPr>
-          <p:cNvPr name="Group 21" id="21"/>
+          <p:cNvPr name="Group 25" id="25"/>
           <p:cNvGrpSpPr/>
           <p:nvPr/>
         </p:nvGrpSpPr>
@@ -8177,7 +8425,7 @@
         </p:grpSpPr>
         <p:sp>
           <p:nvSpPr>
-            <p:cNvPr name="Freeform 22" id="22"/>
+            <p:cNvPr name="Freeform 26" id="26"/>
             <p:cNvSpPr/>
             <p:nvPr/>
           </p:nvSpPr>
@@ -8235,7 +8483,7 @@
       </p:grpSp>
       <p:sp>
         <p:nvSpPr>
-          <p:cNvPr name="AutoShape 23" id="23"/>
+          <p:cNvPr name="AutoShape 27" id="27"/>
           <p:cNvSpPr/>
           <p:nvPr/>
         </p:nvSpPr>
@@ -8254,7 +8502,7 @@
       </p:sp>
       <p:sp>
         <p:nvSpPr>
-          <p:cNvPr name="TextBox 24" id="24"/>
+          <p:cNvPr name="TextBox 28" id="28"/>
           <p:cNvSpPr txBox="true"/>
           <p:nvPr/>
         </p:nvSpPr>
@@ -8295,7 +8543,7 @@
       </p:sp>
       <p:sp>
         <p:nvSpPr>
-          <p:cNvPr name="TextBox 25" id="25"/>
+          <p:cNvPr name="TextBox 29" id="29"/>
           <p:cNvSpPr txBox="true"/>
           <p:nvPr/>
         </p:nvSpPr>
@@ -8336,7 +8584,7 @@
       </p:sp>
       <p:sp>
         <p:nvSpPr>
-          <p:cNvPr name="AutoShape 26" id="26"/>
+          <p:cNvPr name="AutoShape 30" id="30"/>
           <p:cNvSpPr/>
           <p:nvPr/>
         </p:nvSpPr>
@@ -8463,9 +8711,174 @@
           </p:spPr>
         </p:sp>
       </p:grpSp>
-      <p:sp>
-        <p:nvSpPr>
-          <p:cNvPr name="TextBox 5" id="5"/>
+      <p:grpSp>
+        <p:nvGrpSpPr>
+          <p:cNvPr name="Group 5" id="5"/>
+          <p:cNvGrpSpPr/>
+          <p:nvPr/>
+        </p:nvGrpSpPr>
+        <p:grpSpPr>
+          <a:xfrm rot="0">
+            <a:off x="0" y="0"/>
+            <a:ext cx="12192000" cy="6858000"/>
+            <a:chOff x="0" y="0"/>
+            <a:chExt cx="16256000" cy="9144000"/>
+          </a:xfrm>
+        </p:grpSpPr>
+        <p:sp>
+          <p:nvSpPr>
+            <p:cNvPr name="Freeform 6" id="6"/>
+            <p:cNvSpPr/>
+            <p:nvPr/>
+          </p:nvSpPr>
+          <p:spPr>
+            <a:xfrm flipH="false" flipV="false" rot="0">
+              <a:off x="0" y="0"/>
+              <a:ext cx="16256000" cy="9144000"/>
+            </a:xfrm>
+            <a:custGeom>
+              <a:avLst/>
+              <a:gdLst/>
+              <a:ahLst/>
+              <a:cxnLst/>
+              <a:rect r="r" b="b" t="t" l="l"/>
+              <a:pathLst>
+                <a:path h="9144000" w="16256000">
+                  <a:moveTo>
+                    <a:pt x="0" y="0"/>
+                  </a:moveTo>
+                  <a:lnTo>
+                    <a:pt x="16256000" y="0"/>
+                  </a:lnTo>
+                  <a:lnTo>
+                    <a:pt x="16256000" y="9144000"/>
+                  </a:lnTo>
+                  <a:lnTo>
+                    <a:pt x="0" y="9144000"/>
+                  </a:lnTo>
+                  <a:lnTo>
+                    <a:pt x="0" y="0"/>
+                  </a:lnTo>
+                  <a:close/>
+                </a:path>
+              </a:pathLst>
+            </a:custGeom>
+            <a:blipFill>
+              <a:blip r:embed="rId4">
+                <a:extLst>
+                  <a:ext uri="{96DAC541-7B7A-43D3-8B79-37D633B846F1}">
+                    <asvg:svgBlip xmlns:asvg="http://schemas.microsoft.com/office/drawing/2016/SVG/main" r:embed="rId5"/>
+                  </a:ext>
+                </a:extLst>
+              </a:blip>
+              <a:stretch>
+                <a:fillRect l="0" t="0" r="0" b="0"/>
+              </a:stretch>
+            </a:blipFill>
+          </p:spPr>
+        </p:sp>
+        <p:sp>
+          <p:nvSpPr>
+            <p:cNvPr name="Freeform 7" id="7"/>
+            <p:cNvSpPr/>
+            <p:nvPr/>
+          </p:nvSpPr>
+          <p:spPr>
+            <a:xfrm flipH="false" flipV="false" rot="0">
+              <a:off x="11887200" y="0"/>
+              <a:ext cx="3556000" cy="803656"/>
+            </a:xfrm>
+            <a:custGeom>
+              <a:avLst/>
+              <a:gdLst/>
+              <a:ahLst/>
+              <a:cxnLst/>
+              <a:rect r="r" b="b" t="t" l="l"/>
+              <a:pathLst>
+                <a:path h="803656" w="3556000">
+                  <a:moveTo>
+                    <a:pt x="0" y="0"/>
+                  </a:moveTo>
+                  <a:lnTo>
+                    <a:pt x="3556000" y="0"/>
+                  </a:lnTo>
+                  <a:lnTo>
+                    <a:pt x="3556000" y="803656"/>
+                  </a:lnTo>
+                  <a:lnTo>
+                    <a:pt x="0" y="803656"/>
+                  </a:lnTo>
+                  <a:lnTo>
+                    <a:pt x="0" y="0"/>
+                  </a:lnTo>
+                  <a:close/>
+                </a:path>
+              </a:pathLst>
+            </a:custGeom>
+            <a:blipFill>
+              <a:blip r:embed="rId6"/>
+              <a:stretch>
+                <a:fillRect l="0" t="0" r="0" b="0"/>
+              </a:stretch>
+            </a:blipFill>
+          </p:spPr>
+        </p:sp>
+        <p:sp>
+          <p:nvSpPr>
+            <p:cNvPr name="Freeform 8" id="8"/>
+            <p:cNvSpPr/>
+            <p:nvPr/>
+          </p:nvSpPr>
+          <p:spPr>
+            <a:xfrm flipH="false" flipV="false" rot="0">
+              <a:off x="812800" y="127000"/>
+              <a:ext cx="2413000" cy="504536"/>
+            </a:xfrm>
+            <a:custGeom>
+              <a:avLst/>
+              <a:gdLst/>
+              <a:ahLst/>
+              <a:cxnLst/>
+              <a:rect r="r" b="b" t="t" l="l"/>
+              <a:pathLst>
+                <a:path h="504536" w="2413000">
+                  <a:moveTo>
+                    <a:pt x="0" y="0"/>
+                  </a:moveTo>
+                  <a:lnTo>
+                    <a:pt x="2413000" y="0"/>
+                  </a:lnTo>
+                  <a:lnTo>
+                    <a:pt x="2413000" y="504536"/>
+                  </a:lnTo>
+                  <a:lnTo>
+                    <a:pt x="0" y="504536"/>
+                  </a:lnTo>
+                  <a:lnTo>
+                    <a:pt x="0" y="0"/>
+                  </a:lnTo>
+                  <a:close/>
+                </a:path>
+              </a:pathLst>
+            </a:custGeom>
+            <a:blipFill>
+              <a:blip r:embed="rId7">
+                <a:extLst>
+                  <a:ext uri="{96DAC541-7B7A-43D3-8B79-37D633B846F1}">
+                    <asvg:svgBlip xmlns:asvg="http://schemas.microsoft.com/office/drawing/2016/SVG/main" r:embed="rId8"/>
+                  </a:ext>
+                </a:extLst>
+              </a:blip>
+              <a:stretch>
+                <a:fillRect l="0" t="0" r="0" b="0"/>
+              </a:stretch>
+            </a:blipFill>
+          </p:spPr>
+        </p:sp>
+      </p:grpSp>
+      <p:sp>
+        <p:nvSpPr>
+          <p:cNvPr name="TextBox 9" id="9"/>
           <p:cNvSpPr txBox="true"/>
           <p:nvPr/>
         </p:nvSpPr>
@@ -8506,7 +8919,7 @@
       </p:sp>
       <p:sp>
         <p:nvSpPr>
-          <p:cNvPr name="TextBox 6" id="6"/>
+          <p:cNvPr name="TextBox 10" id="10"/>
           <p:cNvSpPr txBox="true"/>
           <p:nvPr/>
         </p:nvSpPr>
@@ -8547,7 +8960,7 @@
       </p:sp>
       <p:sp>
         <p:nvSpPr>
-          <p:cNvPr name="TextBox 7" id="7"/>
+          <p:cNvPr name="TextBox 11" id="11"/>
           <p:cNvSpPr txBox="true"/>
           <p:nvPr/>
         </p:nvSpPr>
@@ -8588,7 +9001,7 @@
       </p:sp>
       <p:sp>
         <p:nvSpPr>
-          <p:cNvPr name="TextBox 8" id="8"/>
+          <p:cNvPr name="TextBox 12" id="12"/>
           <p:cNvSpPr txBox="true"/>
           <p:nvPr/>
         </p:nvSpPr>
@@ -8629,7 +9042,7 @@
       </p:sp>
       <p:sp>
         <p:nvSpPr>
-          <p:cNvPr name="TextBox 9" id="9"/>
+          <p:cNvPr name="TextBox 13" id="13"/>
           <p:cNvSpPr txBox="true"/>
           <p:nvPr/>
         </p:nvSpPr>
@@ -8670,7 +9083,7 @@
       </p:sp>
       <p:sp>
         <p:nvSpPr>
-          <p:cNvPr name="AutoShape 10" id="10"/>
+          <p:cNvPr name="AutoShape 14" id="14"/>
           <p:cNvSpPr/>
           <p:nvPr/>
         </p:nvSpPr>
@@ -8689,7 +9102,7 @@
       </p:sp>
       <p:grpSp>
         <p:nvGrpSpPr>
-          <p:cNvPr name="Group 11" id="11"/>
+          <p:cNvPr name="Group 15" id="15"/>
           <p:cNvGrpSpPr/>
           <p:nvPr/>
         </p:nvGrpSpPr>
@@ -8703,7 +9116,7 @@
         </p:grpSpPr>
         <p:sp>
           <p:nvSpPr>
-            <p:cNvPr name="Freeform 12" id="12"/>
+            <p:cNvPr name="Freeform 16" id="16"/>
             <p:cNvSpPr/>
             <p:nvPr/>
           </p:nvSpPr>
@@ -8761,7 +9174,7 @@
       </p:grpSp>
       <p:grpSp>
         <p:nvGrpSpPr>
-          <p:cNvPr name="Group 13" id="13"/>
+          <p:cNvPr name="Group 17" id="17"/>
           <p:cNvGrpSpPr/>
           <p:nvPr/>
         </p:nvGrpSpPr>
@@ -8775,7 +9188,7 @@
         </p:grpSpPr>
         <p:sp>
           <p:nvSpPr>
-            <p:cNvPr name="Freeform 14" id="14"/>
+            <p:cNvPr name="Freeform 18" id="18"/>
             <p:cNvSpPr/>
             <p:nvPr/>
           </p:nvSpPr>
@@ -8833,7 +9246,7 @@
       </p:grpSp>
       <p:sp>
         <p:nvSpPr>
-          <p:cNvPr name="TextBox 15" id="15"/>
+          <p:cNvPr name="TextBox 19" id="19"/>
           <p:cNvSpPr txBox="true"/>
           <p:nvPr/>
         </p:nvSpPr>
@@ -8874,7 +9287,7 @@
       </p:sp>
       <p:sp>
         <p:nvSpPr>
-          <p:cNvPr name="AutoShape 16" id="16"/>
+          <p:cNvPr name="AutoShape 20" id="20"/>
           <p:cNvSpPr/>
           <p:nvPr/>
         </p:nvSpPr>
@@ -8893,7 +9306,7 @@
       </p:sp>
       <p:sp>
         <p:nvSpPr>
-          <p:cNvPr name="TextBox 17" id="17"/>
+          <p:cNvPr name="TextBox 21" id="21"/>
           <p:cNvSpPr txBox="true"/>
           <p:nvPr/>
         </p:nvSpPr>
@@ -8934,7 +9347,7 @@
       </p:sp>
       <p:sp>
         <p:nvSpPr>
-          <p:cNvPr name="AutoShape 18" id="18"/>
+          <p:cNvPr name="AutoShape 22" id="22"/>
           <p:cNvSpPr/>
           <p:nvPr/>
         </p:nvSpPr>
@@ -8953,7 +9366,7 @@
       </p:sp>
       <p:grpSp>
         <p:nvGrpSpPr>
-          <p:cNvPr name="Group 19" id="19"/>
+          <p:cNvPr name="Group 23" id="23"/>
           <p:cNvGrpSpPr/>
           <p:nvPr/>
         </p:nvGrpSpPr>
@@ -8967,7 +9380,7 @@
         </p:grpSpPr>
         <p:sp>
           <p:nvSpPr>
-            <p:cNvPr name="Freeform 20" id="20"/>
+            <p:cNvPr name="Freeform 24" id="24"/>
             <p:cNvSpPr/>
             <p:nvPr/>
           </p:nvSpPr>
@@ -9025,7 +9438,7 @@
       </p:grpSp>
       <p:grpSp>
         <p:nvGrpSpPr>
-          <p:cNvPr name="Group 21" id="21"/>
+          <p:cNvPr name="Group 25" id="25"/>
           <p:cNvGrpSpPr/>
           <p:nvPr/>
         </p:nvGrpSpPr>
@@ -9039,7 +9452,7 @@
         </p:grpSpPr>
         <p:sp>
           <p:nvSpPr>
-            <p:cNvPr name="Freeform 22" id="22"/>
+            <p:cNvPr name="Freeform 26" id="26"/>
             <p:cNvSpPr/>
             <p:nvPr/>
           </p:nvSpPr>
@@ -9097,7 +9510,7 @@
       </p:grpSp>
       <p:sp>
         <p:nvSpPr>
-          <p:cNvPr name="TextBox 23" id="23"/>
+          <p:cNvPr name="TextBox 27" id="27"/>
           <p:cNvSpPr txBox="true"/>
           <p:nvPr/>
         </p:nvSpPr>
@@ -9138,7 +9551,7 @@
       </p:sp>
       <p:sp>
         <p:nvSpPr>
-          <p:cNvPr name="AutoShape 24" id="24"/>
+          <p:cNvPr name="AutoShape 28" id="28"/>
           <p:cNvSpPr/>
           <p:nvPr/>
         </p:nvSpPr>
@@ -9157,7 +9570,7 @@
       </p:sp>
       <p:sp>
         <p:nvSpPr>
-          <p:cNvPr name="TextBox 25" id="25"/>
+          <p:cNvPr name="TextBox 29" id="29"/>
           <p:cNvSpPr txBox="true"/>
           <p:nvPr/>
         </p:nvSpPr>
@@ -9198,7 +9611,7 @@
       </p:sp>
       <p:sp>
         <p:nvSpPr>
-          <p:cNvPr name="AutoShape 26" id="26"/>
+          <p:cNvPr name="AutoShape 30" id="30"/>
           <p:cNvSpPr/>
           <p:nvPr/>
         </p:nvSpPr>
@@ -9217,7 +9630,7 @@
       </p:sp>
       <p:grpSp>
         <p:nvGrpSpPr>
-          <p:cNvPr name="Group 27" id="27"/>
+          <p:cNvPr name="Group 31" id="31"/>
           <p:cNvGrpSpPr/>
           <p:nvPr/>
         </p:nvGrpSpPr>
@@ -9231,7 +9644,7 @@
         </p:grpSpPr>
         <p:sp>
           <p:nvSpPr>
-            <p:cNvPr name="Freeform 28" id="28"/>
+            <p:cNvPr name="Freeform 32" id="32"/>
             <p:cNvSpPr/>
             <p:nvPr/>
           </p:nvSpPr>
@@ -9289,7 +9702,7 @@
       </p:grpSp>
       <p:grpSp>
         <p:nvGrpSpPr>
-          <p:cNvPr name="Group 29" id="29"/>
+          <p:cNvPr name="Group 33" id="33"/>
           <p:cNvGrpSpPr/>
           <p:nvPr/>
         </p:nvGrpSpPr>
@@ -9303,7 +9716,7 @@
         </p:grpSpPr>
         <p:sp>
           <p:nvSpPr>
-            <p:cNvPr name="Freeform 30" id="30"/>
+            <p:cNvPr name="Freeform 34" id="34"/>
             <p:cNvSpPr/>
             <p:nvPr/>
           </p:nvSpPr>
@@ -9361,7 +9774,7 @@
       </p:grpSp>
       <p:sp>
         <p:nvSpPr>
-          <p:cNvPr name="TextBox 31" id="31"/>
+          <p:cNvPr name="TextBox 35" id="35"/>
           <p:cNvSpPr txBox="true"/>
           <p:nvPr/>
         </p:nvSpPr>
@@ -9402,7 +9815,7 @@
       </p:sp>
       <p:sp>
         <p:nvSpPr>
-          <p:cNvPr name="TextBox 32" id="32"/>
+          <p:cNvPr name="TextBox 36" id="36"/>
           <p:cNvSpPr txBox="true"/>
           <p:nvPr/>
         </p:nvSpPr>
@@ -9443,7 +9856,7 @@
       </p:sp>
       <p:sp>
         <p:nvSpPr>
-          <p:cNvPr name="AutoShape 33" id="33"/>
+          <p:cNvPr name="AutoShape 37" id="37"/>
           <p:cNvSpPr/>
           <p:nvPr/>
         </p:nvSpPr>
@@ -9570,9 +9983,174 @@
           </p:spPr>
         </p:sp>
       </p:grpSp>
-      <p:sp>
-        <p:nvSpPr>
-          <p:cNvPr name="TextBox 5" id="5"/>
+      <p:grpSp>
+        <p:nvGrpSpPr>
+          <p:cNvPr name="Group 5" id="5"/>
+          <p:cNvGrpSpPr/>
+          <p:nvPr/>
+        </p:nvGrpSpPr>
+        <p:grpSpPr>
+          <a:xfrm rot="0">
+            <a:off x="0" y="0"/>
+            <a:ext cx="12192000" cy="6858000"/>
+            <a:chOff x="0" y="0"/>
+            <a:chExt cx="16256000" cy="9144000"/>
+          </a:xfrm>
+        </p:grpSpPr>
+        <p:sp>
+          <p:nvSpPr>
+            <p:cNvPr name="Freeform 6" id="6"/>
+            <p:cNvSpPr/>
+            <p:nvPr/>
+          </p:nvSpPr>
+          <p:spPr>
+            <a:xfrm flipH="false" flipV="false" rot="0">
+              <a:off x="0" y="0"/>
+              <a:ext cx="16256000" cy="9144000"/>
+            </a:xfrm>
+            <a:custGeom>
+              <a:avLst/>
+              <a:gdLst/>
+              <a:ahLst/>
+              <a:cxnLst/>
+              <a:rect r="r" b="b" t="t" l="l"/>
+              <a:pathLst>
+                <a:path h="9144000" w="16256000">
+                  <a:moveTo>
+                    <a:pt x="0" y="0"/>
+                  </a:moveTo>
+                  <a:lnTo>
+                    <a:pt x="16256000" y="0"/>
+                  </a:lnTo>
+                  <a:lnTo>
+                    <a:pt x="16256000" y="9144000"/>
+                  </a:lnTo>
+                  <a:lnTo>
+                    <a:pt x="0" y="9144000"/>
+                  </a:lnTo>
+                  <a:lnTo>
+                    <a:pt x="0" y="0"/>
+                  </a:lnTo>
+                  <a:close/>
+                </a:path>
+              </a:pathLst>
+            </a:custGeom>
+            <a:blipFill>
+              <a:blip r:embed="rId4">
+                <a:extLst>
+                  <a:ext uri="{96DAC541-7B7A-43D3-8B79-37D633B846F1}">
+                    <asvg:svgBlip xmlns:asvg="http://schemas.microsoft.com/office/drawing/2016/SVG/main" r:embed="rId5"/>
+                  </a:ext>
+                </a:extLst>
+              </a:blip>
+              <a:stretch>
+                <a:fillRect l="0" t="0" r="0" b="0"/>
+              </a:stretch>
+            </a:blipFill>
+          </p:spPr>
+        </p:sp>
+        <p:sp>
+          <p:nvSpPr>
+            <p:cNvPr name="Freeform 7" id="7"/>
+            <p:cNvSpPr/>
+            <p:nvPr/>
+          </p:nvSpPr>
+          <p:spPr>
+            <a:xfrm flipH="false" flipV="false" rot="0">
+              <a:off x="11887200" y="0"/>
+              <a:ext cx="3556000" cy="803656"/>
+            </a:xfrm>
+            <a:custGeom>
+              <a:avLst/>
+              <a:gdLst/>
+              <a:ahLst/>
+              <a:cxnLst/>
+              <a:rect r="r" b="b" t="t" l="l"/>
+              <a:pathLst>
+                <a:path h="803656" w="3556000">
+                  <a:moveTo>
+                    <a:pt x="0" y="0"/>
+                  </a:moveTo>
+                  <a:lnTo>
+                    <a:pt x="3556000" y="0"/>
+                  </a:lnTo>
+                  <a:lnTo>
+                    <a:pt x="3556000" y="803656"/>
+                  </a:lnTo>
+                  <a:lnTo>
+                    <a:pt x="0" y="803656"/>
+                  </a:lnTo>
+                  <a:lnTo>
+                    <a:pt x="0" y="0"/>
+                  </a:lnTo>
+                  <a:close/>
+                </a:path>
+              </a:pathLst>
+            </a:custGeom>
+            <a:blipFill>
+              <a:blip r:embed="rId6"/>
+              <a:stretch>
+                <a:fillRect l="0" t="0" r="0" b="0"/>
+              </a:stretch>
+            </a:blipFill>
+          </p:spPr>
+        </p:sp>
+        <p:sp>
+          <p:nvSpPr>
+            <p:cNvPr name="Freeform 8" id="8"/>
+            <p:cNvSpPr/>
+            <p:nvPr/>
+          </p:nvSpPr>
+          <p:spPr>
+            <a:xfrm flipH="false" flipV="false" rot="0">
+              <a:off x="812800" y="127000"/>
+              <a:ext cx="2413000" cy="504536"/>
+            </a:xfrm>
+            <a:custGeom>
+              <a:avLst/>
+              <a:gdLst/>
+              <a:ahLst/>
+              <a:cxnLst/>
+              <a:rect r="r" b="b" t="t" l="l"/>
+              <a:pathLst>
+                <a:path h="504536" w="2413000">
+                  <a:moveTo>
+                    <a:pt x="0" y="0"/>
+                  </a:moveTo>
+                  <a:lnTo>
+                    <a:pt x="2413000" y="0"/>
+                  </a:lnTo>
+                  <a:lnTo>
+                    <a:pt x="2413000" y="504536"/>
+                  </a:lnTo>
+                  <a:lnTo>
+                    <a:pt x="0" y="504536"/>
+                  </a:lnTo>
+                  <a:lnTo>
+                    <a:pt x="0" y="0"/>
+                  </a:lnTo>
+                  <a:close/>
+                </a:path>
+              </a:pathLst>
+            </a:custGeom>
+            <a:blipFill>
+              <a:blip r:embed="rId7">
+                <a:extLst>
+                  <a:ext uri="{96DAC541-7B7A-43D3-8B79-37D633B846F1}">
+                    <asvg:svgBlip xmlns:asvg="http://schemas.microsoft.com/office/drawing/2016/SVG/main" r:embed="rId8"/>
+                  </a:ext>
+                </a:extLst>
+              </a:blip>
+              <a:stretch>
+                <a:fillRect l="0" t="0" r="0" b="0"/>
+              </a:stretch>
+            </a:blipFill>
+          </p:spPr>
+        </p:sp>
+      </p:grpSp>
+      <p:sp>
+        <p:nvSpPr>
+          <p:cNvPr name="TextBox 9" id="9"/>
           <p:cNvSpPr txBox="true"/>
           <p:nvPr/>
         </p:nvSpPr>
@@ -9613,7 +10191,7 @@
       </p:sp>
       <p:sp>
         <p:nvSpPr>
-          <p:cNvPr name="TextBox 6" id="6"/>
+          <p:cNvPr name="TextBox 10" id="10"/>
           <p:cNvSpPr txBox="true"/>
           <p:nvPr/>
         </p:nvSpPr>
@@ -9654,7 +10232,7 @@
       </p:sp>
       <p:sp>
         <p:nvSpPr>
-          <p:cNvPr name="AutoShape 7" id="7"/>
+          <p:cNvPr name="AutoShape 11" id="11"/>
           <p:cNvSpPr/>
           <p:nvPr/>
         </p:nvSpPr>
@@ -9673,7 +10251,7 @@
       </p:sp>
       <p:sp>
         <p:nvSpPr>
-          <p:cNvPr name="TextBox 8" id="8"/>
+          <p:cNvPr name="TextBox 12" id="12"/>
           <p:cNvSpPr txBox="true"/>
           <p:nvPr/>
         </p:nvSpPr>
@@ -9714,7 +10292,7 @@
       </p:sp>
       <p:sp>
         <p:nvSpPr>
-          <p:cNvPr name="AutoShape 9" id="9"/>
+          <p:cNvPr name="AutoShape 13" id="13"/>
           <p:cNvSpPr/>
           <p:nvPr/>
         </p:nvSpPr>
@@ -9733,7 +10311,7 @@
       </p:sp>
       <p:sp>
         <p:nvSpPr>
-          <p:cNvPr name="TextBox 10" id="10"/>
+          <p:cNvPr name="TextBox 14" id="14"/>
           <p:cNvSpPr txBox="true"/>
           <p:nvPr/>
         </p:nvSpPr>
@@ -9774,7 +10352,7 @@
       </p:sp>
       <p:sp>
         <p:nvSpPr>
-          <p:cNvPr name="AutoShape 11" id="11"/>
+          <p:cNvPr name="AutoShape 15" id="15"/>
           <p:cNvSpPr/>
           <p:nvPr/>
         </p:nvSpPr>
@@ -9793,7 +10371,7 @@
       </p:sp>
       <p:sp>
         <p:nvSpPr>
-          <p:cNvPr name="TextBox 12" id="12"/>
+          <p:cNvPr name="TextBox 16" id="16"/>
           <p:cNvSpPr txBox="true"/>
           <p:nvPr/>
         </p:nvSpPr>
@@ -9834,7 +10412,7 @@
       </p:sp>
       <p:sp>
         <p:nvSpPr>
-          <p:cNvPr name="TextBox 13" id="13"/>
+          <p:cNvPr name="TextBox 17" id="17"/>
           <p:cNvSpPr txBox="true"/>
           <p:nvPr/>
         </p:nvSpPr>
@@ -9875,7 +10453,7 @@
       </p:sp>
       <p:sp>
         <p:nvSpPr>
-          <p:cNvPr name="TextBox 14" id="14"/>
+          <p:cNvPr name="TextBox 18" id="18"/>
           <p:cNvSpPr txBox="true"/>
           <p:nvPr/>
         </p:nvSpPr>
@@ -9916,7 +10494,7 @@
       </p:sp>
       <p:sp>
         <p:nvSpPr>
-          <p:cNvPr name="TextBox 15" id="15"/>
+          <p:cNvPr name="TextBox 19" id="19"/>
           <p:cNvSpPr txBox="true"/>
           <p:nvPr/>
         </p:nvSpPr>
@@ -9957,7 +10535,7 @@
       </p:sp>
       <p:sp>
         <p:nvSpPr>
-          <p:cNvPr name="TextBox 16" id="16"/>
+          <p:cNvPr name="TextBox 20" id="20"/>
           <p:cNvSpPr txBox="true"/>
           <p:nvPr/>
         </p:nvSpPr>
@@ -9998,7 +10576,7 @@
       </p:sp>
       <p:sp>
         <p:nvSpPr>
-          <p:cNvPr name="AutoShape 17" id="17"/>
+          <p:cNvPr name="AutoShape 21" id="21"/>
           <p:cNvSpPr/>
           <p:nvPr/>
         </p:nvSpPr>
@@ -10125,9 +10703,174 @@
           </p:spPr>
         </p:sp>
       </p:grpSp>
-      <p:sp>
-        <p:nvSpPr>
-          <p:cNvPr name="TextBox 5" id="5"/>
+      <p:grpSp>
+        <p:nvGrpSpPr>
+          <p:cNvPr name="Group 5" id="5"/>
+          <p:cNvGrpSpPr/>
+          <p:nvPr/>
+        </p:nvGrpSpPr>
+        <p:grpSpPr>
+          <a:xfrm rot="0">
+            <a:off x="0" y="0"/>
+            <a:ext cx="12192000" cy="6858000"/>
+            <a:chOff x="0" y="0"/>
+            <a:chExt cx="16256000" cy="9144000"/>
+          </a:xfrm>
+        </p:grpSpPr>
+        <p:sp>
+          <p:nvSpPr>
+            <p:cNvPr name="Freeform 6" id="6"/>
+            <p:cNvSpPr/>
+            <p:nvPr/>
+          </p:nvSpPr>
+          <p:spPr>
+            <a:xfrm flipH="false" flipV="false" rot="0">
+              <a:off x="0" y="0"/>
+              <a:ext cx="16256000" cy="9144000"/>
+            </a:xfrm>
+            <a:custGeom>
+              <a:avLst/>
+              <a:gdLst/>
+              <a:ahLst/>
+              <a:cxnLst/>
+              <a:rect r="r" b="b" t="t" l="l"/>
+              <a:pathLst>
+                <a:path h="9144000" w="16256000">
+                  <a:moveTo>
+                    <a:pt x="0" y="0"/>
+                  </a:moveTo>
+                  <a:lnTo>
+                    <a:pt x="16256000" y="0"/>
+                  </a:lnTo>
+                  <a:lnTo>
+                    <a:pt x="16256000" y="9144000"/>
+                  </a:lnTo>
+                  <a:lnTo>
+                    <a:pt x="0" y="9144000"/>
+                  </a:lnTo>
+                  <a:lnTo>
+                    <a:pt x="0" y="0"/>
+                  </a:lnTo>
+                  <a:close/>
+                </a:path>
+              </a:pathLst>
+            </a:custGeom>
+            <a:blipFill>
+              <a:blip r:embed="rId4">
+                <a:extLst>
+                  <a:ext uri="{96DAC541-7B7A-43D3-8B79-37D633B846F1}">
+                    <asvg:svgBlip xmlns:asvg="http://schemas.microsoft.com/office/drawing/2016/SVG/main" r:embed="rId5"/>
+                  </a:ext>
+                </a:extLst>
+              </a:blip>
+              <a:stretch>
+                <a:fillRect l="0" t="0" r="0" b="0"/>
+              </a:stretch>
+            </a:blipFill>
+          </p:spPr>
+        </p:sp>
+        <p:sp>
+          <p:nvSpPr>
+            <p:cNvPr name="Freeform 7" id="7"/>
+            <p:cNvSpPr/>
+            <p:nvPr/>
+          </p:nvSpPr>
+          <p:spPr>
+            <a:xfrm flipH="false" flipV="false" rot="0">
+              <a:off x="11887200" y="0"/>
+              <a:ext cx="3556000" cy="803656"/>
+            </a:xfrm>
+            <a:custGeom>
+              <a:avLst/>
+              <a:gdLst/>
+              <a:ahLst/>
+              <a:cxnLst/>
+              <a:rect r="r" b="b" t="t" l="l"/>
+              <a:pathLst>
+                <a:path h="803656" w="3556000">
+                  <a:moveTo>
+                    <a:pt x="0" y="0"/>
+                  </a:moveTo>
+                  <a:lnTo>
+                    <a:pt x="3556000" y="0"/>
+                  </a:lnTo>
+                  <a:lnTo>
+                    <a:pt x="3556000" y="803656"/>
+                  </a:lnTo>
+                  <a:lnTo>
+                    <a:pt x="0" y="803656"/>
+                  </a:lnTo>
+                  <a:lnTo>
+                    <a:pt x="0" y="0"/>
+                  </a:lnTo>
+                  <a:close/>
+                </a:path>
+              </a:pathLst>
+            </a:custGeom>
+            <a:blipFill>
+              <a:blip r:embed="rId6"/>
+              <a:stretch>
+                <a:fillRect l="0" t="0" r="0" b="0"/>
+              </a:stretch>
+            </a:blipFill>
+          </p:spPr>
+        </p:sp>
+        <p:sp>
+          <p:nvSpPr>
+            <p:cNvPr name="Freeform 8" id="8"/>
+            <p:cNvSpPr/>
+            <p:nvPr/>
+          </p:nvSpPr>
+          <p:spPr>
+            <a:xfrm flipH="false" flipV="false" rot="0">
+              <a:off x="812800" y="127000"/>
+              <a:ext cx="2413000" cy="504536"/>
+            </a:xfrm>
+            <a:custGeom>
+              <a:avLst/>
+              <a:gdLst/>
+              <a:ahLst/>
+              <a:cxnLst/>
+              <a:rect r="r" b="b" t="t" l="l"/>
+              <a:pathLst>
+                <a:path h="504536" w="2413000">
+                  <a:moveTo>
+                    <a:pt x="0" y="0"/>
+                  </a:moveTo>
+                  <a:lnTo>
+                    <a:pt x="2413000" y="0"/>
+                  </a:lnTo>
+                  <a:lnTo>
+                    <a:pt x="2413000" y="504536"/>
+                  </a:lnTo>
+                  <a:lnTo>
+                    <a:pt x="0" y="504536"/>
+                  </a:lnTo>
+                  <a:lnTo>
+                    <a:pt x="0" y="0"/>
+                  </a:lnTo>
+                  <a:close/>
+                </a:path>
+              </a:pathLst>
+            </a:custGeom>
+            <a:blipFill>
+              <a:blip r:embed="rId7">
+                <a:extLst>
+                  <a:ext uri="{96DAC541-7B7A-43D3-8B79-37D633B846F1}">
+                    <asvg:svgBlip xmlns:asvg="http://schemas.microsoft.com/office/drawing/2016/SVG/main" r:embed="rId8"/>
+                  </a:ext>
+                </a:extLst>
+              </a:blip>
+              <a:stretch>
+                <a:fillRect l="0" t="0" r="0" b="0"/>
+              </a:stretch>
+            </a:blipFill>
+          </p:spPr>
+        </p:sp>
+      </p:grpSp>
+      <p:sp>
+        <p:nvSpPr>
+          <p:cNvPr name="TextBox 9" id="9"/>
           <p:cNvSpPr txBox="true"/>
           <p:nvPr/>
         </p:nvSpPr>
@@ -10168,7 +10911,7 @@
       </p:sp>
       <p:sp>
         <p:nvSpPr>
-          <p:cNvPr name="TextBox 6" id="6"/>
+          <p:cNvPr name="TextBox 10" id="10"/>
           <p:cNvSpPr txBox="true"/>
           <p:nvPr/>
         </p:nvSpPr>
@@ -10209,7 +10952,7 @@
       </p:sp>
       <p:sp>
         <p:nvSpPr>
-          <p:cNvPr name="TextBox 7" id="7"/>
+          <p:cNvPr name="TextBox 11" id="11"/>
           <p:cNvSpPr txBox="true"/>
           <p:nvPr/>
         </p:nvSpPr>
@@ -10250,7 +10993,7 @@
       </p:sp>
       <p:sp>
         <p:nvSpPr>
-          <p:cNvPr name="TextBox 8" id="8"/>
+          <p:cNvPr name="TextBox 12" id="12"/>
           <p:cNvSpPr txBox="true"/>
           <p:nvPr/>
         </p:nvSpPr>
@@ -10291,7 +11034,7 @@
       </p:sp>
       <p:sp>
         <p:nvSpPr>
-          <p:cNvPr name="TextBox 9" id="9"/>
+          <p:cNvPr name="TextBox 13" id="13"/>
           <p:cNvSpPr txBox="true"/>
           <p:nvPr/>
         </p:nvSpPr>
@@ -10332,7 +11075,7 @@
       </p:sp>
       <p:sp>
         <p:nvSpPr>
-          <p:cNvPr name="TextBox 10" id="10"/>
+          <p:cNvPr name="TextBox 14" id="14"/>
           <p:cNvSpPr txBox="true"/>
           <p:nvPr/>
         </p:nvSpPr>
@@ -10373,7 +11116,7 @@
       </p:sp>
       <p:grpSp>
         <p:nvGrpSpPr>
-          <p:cNvPr name="Group 11" id="11"/>
+          <p:cNvPr name="Group 15" id="15"/>
           <p:cNvGrpSpPr/>
           <p:nvPr/>
         </p:nvGrpSpPr>
@@ -10387,7 +11130,7 @@
         </p:grpSpPr>
         <p:sp>
           <p:nvSpPr>
-            <p:cNvPr name="Freeform 12" id="12"/>
+            <p:cNvPr name="Freeform 16" id="16"/>
             <p:cNvSpPr/>
             <p:nvPr/>
           </p:nvSpPr>
@@ -10430,7 +11173,7 @@
         </p:sp>
         <p:sp>
           <p:nvSpPr>
-            <p:cNvPr name="Freeform 13" id="13"/>
+            <p:cNvPr name="Freeform 17" id="17"/>
             <p:cNvSpPr/>
             <p:nvPr/>
           </p:nvSpPr>
@@ -10482,7 +11225,7 @@
         </p:sp>
         <p:sp>
           <p:nvSpPr>
-            <p:cNvPr name="TextBox 14" id="14"/>
+            <p:cNvPr name="TextBox 18" id="18"/>
             <p:cNvSpPr txBox="true"/>
             <p:nvPr/>
           </p:nvSpPr>
@@ -10522,7 +11265,7 @@
       </p:grpSp>
       <p:grpSp>
         <p:nvGrpSpPr>
-          <p:cNvPr name="Group 15" id="15"/>
+          <p:cNvPr name="Group 19" id="19"/>
           <p:cNvGrpSpPr/>
           <p:nvPr/>
         </p:nvGrpSpPr>
@@ -10536,7 +11279,7 @@
         </p:grpSpPr>
         <p:sp>
           <p:nvSpPr>
-            <p:cNvPr name="Freeform 16" id="16"/>
+            <p:cNvPr name="Freeform 20" id="20"/>
             <p:cNvSpPr/>
             <p:nvPr/>
           </p:nvSpPr>
@@ -10579,7 +11322,7 @@
         </p:sp>
         <p:sp>
           <p:nvSpPr>
-            <p:cNvPr name="Freeform 17" id="17"/>
+            <p:cNvPr name="Freeform 21" id="21"/>
             <p:cNvSpPr/>
             <p:nvPr/>
           </p:nvSpPr>
@@ -10631,7 +11374,7 @@
         </p:sp>
         <p:sp>
           <p:nvSpPr>
-            <p:cNvPr name="TextBox 18" id="18"/>
+            <p:cNvPr name="TextBox 22" id="22"/>
             <p:cNvSpPr txBox="true"/>
             <p:nvPr/>
           </p:nvSpPr>
@@ -10671,7 +11414,7 @@
       </p:grpSp>
       <p:grpSp>
         <p:nvGrpSpPr>
-          <p:cNvPr name="Group 19" id="19"/>
+          <p:cNvPr name="Group 23" id="23"/>
           <p:cNvGrpSpPr/>
           <p:nvPr/>
         </p:nvGrpSpPr>
@@ -10685,7 +11428,7 @@
         </p:grpSpPr>
         <p:sp>
           <p:nvSpPr>
-            <p:cNvPr name="Freeform 20" id="20"/>
+            <p:cNvPr name="Freeform 24" id="24"/>
             <p:cNvSpPr/>
             <p:nvPr/>
           </p:nvSpPr>
@@ -10728,7 +11471,7 @@
         </p:sp>
         <p:sp>
           <p:nvSpPr>
-            <p:cNvPr name="Freeform 21" id="21"/>
+            <p:cNvPr name="Freeform 25" id="25"/>
             <p:cNvSpPr/>
             <p:nvPr/>
           </p:nvSpPr>
@@ -10780,7 +11523,7 @@
         </p:sp>
         <p:sp>
           <p:nvSpPr>
-            <p:cNvPr name="TextBox 22" id="22"/>
+            <p:cNvPr name="TextBox 26" id="26"/>
             <p:cNvSpPr txBox="true"/>
             <p:nvPr/>
           </p:nvSpPr>
@@ -10820,7 +11563,7 @@
       </p:grpSp>
       <p:grpSp>
         <p:nvGrpSpPr>
-          <p:cNvPr name="Group 23" id="23"/>
+          <p:cNvPr name="Group 27" id="27"/>
           <p:cNvGrpSpPr/>
           <p:nvPr/>
         </p:nvGrpSpPr>
@@ -10834,7 +11577,7 @@
         </p:grpSpPr>
         <p:sp>
           <p:nvSpPr>
-            <p:cNvPr name="Freeform 24" id="24"/>
+            <p:cNvPr name="Freeform 28" id="28"/>
             <p:cNvSpPr/>
             <p:nvPr/>
           </p:nvSpPr>
@@ -10877,7 +11620,7 @@
         </p:sp>
         <p:sp>
           <p:nvSpPr>
-            <p:cNvPr name="Freeform 25" id="25"/>
+            <p:cNvPr name="Freeform 29" id="29"/>
             <p:cNvSpPr/>
             <p:nvPr/>
           </p:nvSpPr>
@@ -10929,7 +11672,7 @@
         </p:sp>
         <p:sp>
           <p:nvSpPr>
-            <p:cNvPr name="TextBox 26" id="26"/>
+            <p:cNvPr name="TextBox 30" id="30"/>
             <p:cNvSpPr txBox="true"/>
             <p:nvPr/>
           </p:nvSpPr>
@@ -10969,7 +11712,7 @@
       </p:grpSp>
       <p:grpSp>
         <p:nvGrpSpPr>
-          <p:cNvPr name="Group 27" id="27"/>
+          <p:cNvPr name="Group 31" id="31"/>
           <p:cNvGrpSpPr/>
           <p:nvPr/>
         </p:nvGrpSpPr>
@@ -10983,7 +11726,7 @@
         </p:grpSpPr>
         <p:sp>
           <p:nvSpPr>
-            <p:cNvPr name="Freeform 28" id="28"/>
+            <p:cNvPr name="Freeform 32" id="32"/>
             <p:cNvSpPr/>
             <p:nvPr/>
           </p:nvSpPr>
@@ -11026,7 +11769,7 @@
         </p:sp>
         <p:sp>
           <p:nvSpPr>
-            <p:cNvPr name="Freeform 29" id="29"/>
+            <p:cNvPr name="Freeform 33" id="33"/>
             <p:cNvSpPr/>
             <p:nvPr/>
           </p:nvSpPr>
@@ -11078,7 +11821,7 @@
         </p:sp>
         <p:sp>
           <p:nvSpPr>
-            <p:cNvPr name="TextBox 30" id="30"/>
+            <p:cNvPr name="TextBox 34" id="34"/>
             <p:cNvSpPr txBox="true"/>
             <p:nvPr/>
           </p:nvSpPr>
@@ -11118,7 +11861,7 @@
       </p:grpSp>
       <p:grpSp>
         <p:nvGrpSpPr>
-          <p:cNvPr name="Group 31" id="31"/>
+          <p:cNvPr name="Group 35" id="35"/>
           <p:cNvGrpSpPr/>
           <p:nvPr/>
         </p:nvGrpSpPr>
@@ -11132,7 +11875,7 @@
         </p:grpSpPr>
         <p:sp>
           <p:nvSpPr>
-            <p:cNvPr name="Freeform 32" id="32"/>
+            <p:cNvPr name="Freeform 36" id="36"/>
             <p:cNvSpPr/>
             <p:nvPr/>
           </p:nvSpPr>
@@ -11175,7 +11918,7 @@
         </p:sp>
         <p:sp>
           <p:nvSpPr>
-            <p:cNvPr name="Freeform 33" id="33"/>
+            <p:cNvPr name="Freeform 37" id="37"/>
             <p:cNvSpPr/>
             <p:nvPr/>
           </p:nvSpPr>
@@ -11227,7 +11970,7 @@
         </p:sp>
         <p:sp>
           <p:nvSpPr>
-            <p:cNvPr name="TextBox 34" id="34"/>
+            <p:cNvPr name="TextBox 38" id="38"/>
             <p:cNvSpPr txBox="true"/>
             <p:nvPr/>
           </p:nvSpPr>
@@ -11267,7 +12010,7 @@
       </p:grpSp>
       <p:grpSp>
         <p:nvGrpSpPr>
-          <p:cNvPr name="Group 35" id="35"/>
+          <p:cNvPr name="Group 39" id="39"/>
           <p:cNvGrpSpPr/>
           <p:nvPr/>
         </p:nvGrpSpPr>
@@ -11281,7 +12024,7 @@
         </p:grpSpPr>
         <p:sp>
           <p:nvSpPr>
-            <p:cNvPr name="Freeform 36" id="36"/>
+            <p:cNvPr name="Freeform 40" id="40"/>
             <p:cNvSpPr/>
             <p:nvPr/>
           </p:nvSpPr>
@@ -11324,7 +12067,7 @@
         </p:sp>
         <p:sp>
           <p:nvSpPr>
-            <p:cNvPr name="Freeform 37" id="37"/>
+            <p:cNvPr name="Freeform 41" id="41"/>
             <p:cNvSpPr/>
             <p:nvPr/>
           </p:nvSpPr>
@@ -11376,7 +12119,7 @@
         </p:sp>
         <p:sp>
           <p:nvSpPr>
-            <p:cNvPr name="TextBox 38" id="38"/>
+            <p:cNvPr name="TextBox 42" id="42"/>
             <p:cNvSpPr txBox="true"/>
             <p:nvPr/>
           </p:nvSpPr>
@@ -11416,7 +12159,7 @@
       </p:grpSp>
       <p:grpSp>
         <p:nvGrpSpPr>
-          <p:cNvPr name="Group 39" id="39"/>
+          <p:cNvPr name="Group 43" id="43"/>
           <p:cNvGrpSpPr/>
           <p:nvPr/>
         </p:nvGrpSpPr>
@@ -11430,7 +12173,7 @@
         </p:grpSpPr>
         <p:sp>
           <p:nvSpPr>
-            <p:cNvPr name="Freeform 40" id="40"/>
+            <p:cNvPr name="Freeform 44" id="44"/>
             <p:cNvSpPr/>
             <p:nvPr/>
           </p:nvSpPr>
@@ -11473,7 +12216,7 @@
         </p:sp>
         <p:sp>
           <p:nvSpPr>
-            <p:cNvPr name="Freeform 41" id="41"/>
+            <p:cNvPr name="Freeform 45" id="45"/>
             <p:cNvSpPr/>
             <p:nvPr/>
           </p:nvSpPr>
@@ -11525,7 +12268,7 @@
         </p:sp>
         <p:sp>
           <p:nvSpPr>
-            <p:cNvPr name="TextBox 42" id="42"/>
+            <p:cNvPr name="TextBox 46" id="46"/>
             <p:cNvSpPr txBox="true"/>
             <p:nvPr/>
           </p:nvSpPr>
@@ -11565,7 +12308,7 @@
       </p:grpSp>
       <p:grpSp>
         <p:nvGrpSpPr>
-          <p:cNvPr name="Group 43" id="43"/>
+          <p:cNvPr name="Group 47" id="47"/>
           <p:cNvGrpSpPr/>
           <p:nvPr/>
         </p:nvGrpSpPr>
@@ -11579,7 +12322,7 @@
         </p:grpSpPr>
         <p:sp>
           <p:nvSpPr>
-            <p:cNvPr name="Freeform 44" id="44"/>
+            <p:cNvPr name="Freeform 48" id="48"/>
             <p:cNvSpPr/>
             <p:nvPr/>
           </p:nvSpPr>
@@ -11622,7 +12365,7 @@
         </p:sp>
         <p:sp>
           <p:nvSpPr>
-            <p:cNvPr name="Freeform 45" id="45"/>
+            <p:cNvPr name="Freeform 49" id="49"/>
             <p:cNvSpPr/>
             <p:nvPr/>
           </p:nvSpPr>
@@ -11674,7 +12417,7 @@
         </p:sp>
         <p:sp>
           <p:nvSpPr>
-            <p:cNvPr name="TextBox 46" id="46"/>
+            <p:cNvPr name="TextBox 50" id="50"/>
             <p:cNvSpPr txBox="true"/>
             <p:nvPr/>
           </p:nvSpPr>
@@ -11714,7 +12457,7 @@
       </p:grpSp>
       <p:grpSp>
         <p:nvGrpSpPr>
-          <p:cNvPr name="Group 47" id="47"/>
+          <p:cNvPr name="Group 51" id="51"/>
           <p:cNvGrpSpPr/>
           <p:nvPr/>
         </p:nvGrpSpPr>
@@ -11728,7 +12471,7 @@
         </p:grpSpPr>
         <p:sp>
           <p:nvSpPr>
-            <p:cNvPr name="Freeform 48" id="48"/>
+            <p:cNvPr name="Freeform 52" id="52"/>
             <p:cNvSpPr/>
             <p:nvPr/>
           </p:nvSpPr>
@@ -11771,7 +12514,7 @@
         </p:sp>
         <p:sp>
           <p:nvSpPr>
-            <p:cNvPr name="Freeform 49" id="49"/>
+            <p:cNvPr name="Freeform 53" id="53"/>
             <p:cNvSpPr/>
             <p:nvPr/>
           </p:nvSpPr>
@@ -11823,7 +12566,7 @@
         </p:sp>
         <p:sp>
           <p:nvSpPr>
-            <p:cNvPr name="TextBox 50" id="50"/>
+            <p:cNvPr name="TextBox 54" id="54"/>
             <p:cNvSpPr txBox="true"/>
             <p:nvPr/>
           </p:nvSpPr>
@@ -11863,7 +12606,7 @@
       </p:grpSp>
       <p:grpSp>
         <p:nvGrpSpPr>
-          <p:cNvPr name="Group 51" id="51"/>
+          <p:cNvPr name="Group 55" id="55"/>
           <p:cNvGrpSpPr/>
           <p:nvPr/>
         </p:nvGrpSpPr>
@@ -11877,7 +12620,7 @@
         </p:grpSpPr>
         <p:sp>
           <p:nvSpPr>
-            <p:cNvPr name="Freeform 52" id="52"/>
+            <p:cNvPr name="Freeform 56" id="56"/>
             <p:cNvSpPr/>
             <p:nvPr/>
           </p:nvSpPr>
@@ -11920,7 +12663,7 @@
         </p:sp>
         <p:sp>
           <p:nvSpPr>
-            <p:cNvPr name="Freeform 53" id="53"/>
+            <p:cNvPr name="Freeform 57" id="57"/>
             <p:cNvSpPr/>
             <p:nvPr/>
           </p:nvSpPr>
@@ -11972,7 +12715,7 @@
         </p:sp>
         <p:sp>
           <p:nvSpPr>
-            <p:cNvPr name="TextBox 54" id="54"/>
+            <p:cNvPr name="TextBox 58" id="58"/>
             <p:cNvSpPr txBox="true"/>
             <p:nvPr/>
           </p:nvSpPr>
@@ -12012,7 +12755,7 @@
       </p:grpSp>
       <p:grpSp>
         <p:nvGrpSpPr>
-          <p:cNvPr name="Group 55" id="55"/>
+          <p:cNvPr name="Group 59" id="59"/>
           <p:cNvGrpSpPr/>
           <p:nvPr/>
         </p:nvGrpSpPr>
@@ -12026,7 +12769,7 @@
         </p:grpSpPr>
         <p:sp>
           <p:nvSpPr>
-            <p:cNvPr name="Freeform 56" id="56"/>
+            <p:cNvPr name="Freeform 60" id="60"/>
             <p:cNvSpPr/>
             <p:nvPr/>
           </p:nvSpPr>
@@ -12069,7 +12812,7 @@
         </p:sp>
         <p:sp>
           <p:nvSpPr>
-            <p:cNvPr name="Freeform 57" id="57"/>
+            <p:cNvPr name="Freeform 61" id="61"/>
             <p:cNvSpPr/>
             <p:nvPr/>
           </p:nvSpPr>
@@ -12121,7 +12864,7 @@
         </p:sp>
         <p:sp>
           <p:nvSpPr>
-            <p:cNvPr name="TextBox 58" id="58"/>
+            <p:cNvPr name="TextBox 62" id="62"/>
             <p:cNvSpPr txBox="true"/>
             <p:nvPr/>
           </p:nvSpPr>
@@ -12161,7 +12904,7 @@
       </p:grpSp>
       <p:grpSp>
         <p:nvGrpSpPr>
-          <p:cNvPr name="Group 59" id="59"/>
+          <p:cNvPr name="Group 63" id="63"/>
           <p:cNvGrpSpPr/>
           <p:nvPr/>
         </p:nvGrpSpPr>
@@ -12175,7 +12918,7 @@
         </p:grpSpPr>
         <p:sp>
           <p:nvSpPr>
-            <p:cNvPr name="Freeform 60" id="60"/>
+            <p:cNvPr name="Freeform 64" id="64"/>
             <p:cNvSpPr/>
             <p:nvPr/>
           </p:nvSpPr>
@@ -12218,7 +12961,7 @@
         </p:sp>
         <p:sp>
           <p:nvSpPr>
-            <p:cNvPr name="Freeform 61" id="61"/>
+            <p:cNvPr name="Freeform 65" id="65"/>
             <p:cNvSpPr/>
             <p:nvPr/>
           </p:nvSpPr>
@@ -12270,7 +13013,7 @@
         </p:sp>
         <p:sp>
           <p:nvSpPr>
-            <p:cNvPr name="TextBox 62" id="62"/>
+            <p:cNvPr name="TextBox 66" id="66"/>
             <p:cNvSpPr txBox="true"/>
             <p:nvPr/>
           </p:nvSpPr>
@@ -12310,7 +13053,7 @@
       </p:grpSp>
       <p:grpSp>
         <p:nvGrpSpPr>
-          <p:cNvPr name="Group 63" id="63"/>
+          <p:cNvPr name="Group 67" id="67"/>
           <p:cNvGrpSpPr/>
           <p:nvPr/>
         </p:nvGrpSpPr>
@@ -12324,7 +13067,7 @@
         </p:grpSpPr>
         <p:sp>
           <p:nvSpPr>
-            <p:cNvPr name="Freeform 64" id="64"/>
+            <p:cNvPr name="Freeform 68" id="68"/>
             <p:cNvSpPr/>
             <p:nvPr/>
           </p:nvSpPr>
@@ -12367,7 +13110,7 @@
         </p:sp>
         <p:sp>
           <p:nvSpPr>
-            <p:cNvPr name="Freeform 65" id="65"/>
+            <p:cNvPr name="Freeform 69" id="69"/>
             <p:cNvSpPr/>
             <p:nvPr/>
           </p:nvSpPr>
@@ -12419,7 +13162,7 @@
         </p:sp>
         <p:sp>
           <p:nvSpPr>
-            <p:cNvPr name="TextBox 66" id="66"/>
+            <p:cNvPr name="TextBox 70" id="70"/>
             <p:cNvSpPr txBox="true"/>
             <p:nvPr/>
           </p:nvSpPr>
@@ -12459,7 +13202,7 @@
       </p:grpSp>
       <p:grpSp>
         <p:nvGrpSpPr>
-          <p:cNvPr name="Group 67" id="67"/>
+          <p:cNvPr name="Group 71" id="71"/>
           <p:cNvGrpSpPr/>
           <p:nvPr/>
         </p:nvGrpSpPr>
@@ -12473,7 +13216,7 @@
         </p:grpSpPr>
         <p:sp>
           <p:nvSpPr>
-            <p:cNvPr name="Freeform 68" id="68"/>
+            <p:cNvPr name="Freeform 72" id="72"/>
             <p:cNvSpPr/>
             <p:nvPr/>
           </p:nvSpPr>
@@ -12516,7 +13259,7 @@
         </p:sp>
         <p:sp>
           <p:nvSpPr>
-            <p:cNvPr name="Freeform 69" id="69"/>
+            <p:cNvPr name="Freeform 73" id="73"/>
             <p:cNvSpPr/>
             <p:nvPr/>
           </p:nvSpPr>
@@ -12568,7 +13311,7 @@
         </p:sp>
         <p:sp>
           <p:nvSpPr>
-            <p:cNvPr name="TextBox 70" id="70"/>
+            <p:cNvPr name="TextBox 74" id="74"/>
             <p:cNvSpPr txBox="true"/>
             <p:nvPr/>
           </p:nvSpPr>
@@ -12608,7 +13351,7 @@
       </p:grpSp>
       <p:grpSp>
         <p:nvGrpSpPr>
-          <p:cNvPr name="Group 71" id="71"/>
+          <p:cNvPr name="Group 75" id="75"/>
           <p:cNvGrpSpPr/>
           <p:nvPr/>
         </p:nvGrpSpPr>
@@ -12622,7 +13365,7 @@
         </p:grpSpPr>
         <p:sp>
           <p:nvSpPr>
-            <p:cNvPr name="Freeform 72" id="72"/>
+            <p:cNvPr name="Freeform 76" id="76"/>
             <p:cNvSpPr/>
             <p:nvPr/>
           </p:nvSpPr>
@@ -12665,7 +13408,7 @@
         </p:sp>
         <p:sp>
           <p:nvSpPr>
-            <p:cNvPr name="Freeform 73" id="73"/>
+            <p:cNvPr name="Freeform 77" id="77"/>
             <p:cNvSpPr/>
             <p:nvPr/>
           </p:nvSpPr>
@@ -12717,7 +13460,7 @@
         </p:sp>
         <p:sp>
           <p:nvSpPr>
-            <p:cNvPr name="TextBox 74" id="74"/>
+            <p:cNvPr name="TextBox 78" id="78"/>
             <p:cNvSpPr txBox="true"/>
             <p:nvPr/>
           </p:nvSpPr>
@@ -12757,7 +13500,7 @@
       </p:grpSp>
       <p:grpSp>
         <p:nvGrpSpPr>
-          <p:cNvPr name="Group 75" id="75"/>
+          <p:cNvPr name="Group 79" id="79"/>
           <p:cNvGrpSpPr/>
           <p:nvPr/>
         </p:nvGrpSpPr>
@@ -12771,7 +13514,7 @@
         </p:grpSpPr>
         <p:sp>
           <p:nvSpPr>
-            <p:cNvPr name="Freeform 76" id="76"/>
+            <p:cNvPr name="Freeform 80" id="80"/>
             <p:cNvSpPr/>
             <p:nvPr/>
           </p:nvSpPr>
@@ -12814,7 +13557,7 @@
         </p:sp>
         <p:sp>
           <p:nvSpPr>
-            <p:cNvPr name="Freeform 77" id="77"/>
+            <p:cNvPr name="Freeform 81" id="81"/>
             <p:cNvSpPr/>
             <p:nvPr/>
           </p:nvSpPr>
@@ -12866,7 +13609,7 @@
         </p:sp>
         <p:sp>
           <p:nvSpPr>
-            <p:cNvPr name="TextBox 78" id="78"/>
+            <p:cNvPr name="TextBox 82" id="82"/>
             <p:cNvSpPr txBox="true"/>
             <p:nvPr/>
           </p:nvSpPr>
@@ -12906,7 +13649,7 @@
       </p:grpSp>
       <p:grpSp>
         <p:nvGrpSpPr>
-          <p:cNvPr name="Group 79" id="79"/>
+          <p:cNvPr name="Group 83" id="83"/>
           <p:cNvGrpSpPr/>
           <p:nvPr/>
         </p:nvGrpSpPr>
@@ -12920,7 +13663,7 @@
         </p:grpSpPr>
         <p:sp>
           <p:nvSpPr>
-            <p:cNvPr name="Freeform 80" id="80"/>
+            <p:cNvPr name="Freeform 84" id="84"/>
             <p:cNvSpPr/>
             <p:nvPr/>
           </p:nvSpPr>
@@ -12963,7 +13706,7 @@
         </p:sp>
         <p:sp>
           <p:nvSpPr>
-            <p:cNvPr name="Freeform 81" id="81"/>
+            <p:cNvPr name="Freeform 85" id="85"/>
             <p:cNvSpPr/>
             <p:nvPr/>
           </p:nvSpPr>
@@ -13015,7 +13758,7 @@
         </p:sp>
         <p:sp>
           <p:nvSpPr>
-            <p:cNvPr name="TextBox 82" id="82"/>
+            <p:cNvPr name="TextBox 86" id="86"/>
             <p:cNvSpPr txBox="true"/>
             <p:nvPr/>
           </p:nvSpPr>
@@ -13055,7 +13798,7 @@
       </p:grpSp>
       <p:grpSp>
         <p:nvGrpSpPr>
-          <p:cNvPr name="Group 83" id="83"/>
+          <p:cNvPr name="Group 87" id="87"/>
           <p:cNvGrpSpPr/>
           <p:nvPr/>
         </p:nvGrpSpPr>
@@ -13069,7 +13812,7 @@
         </p:grpSpPr>
         <p:sp>
           <p:nvSpPr>
-            <p:cNvPr name="Freeform 84" id="84"/>
+            <p:cNvPr name="Freeform 88" id="88"/>
             <p:cNvSpPr/>
             <p:nvPr/>
           </p:nvSpPr>
@@ -13112,7 +13855,7 @@
         </p:sp>
         <p:sp>
           <p:nvSpPr>
-            <p:cNvPr name="Freeform 85" id="85"/>
+            <p:cNvPr name="Freeform 89" id="89"/>
             <p:cNvSpPr/>
             <p:nvPr/>
           </p:nvSpPr>
@@ -13164,7 +13907,7 @@
         </p:sp>
         <p:sp>
           <p:nvSpPr>
-            <p:cNvPr name="TextBox 86" id="86"/>
+            <p:cNvPr name="TextBox 90" id="90"/>
             <p:cNvSpPr txBox="true"/>
             <p:nvPr/>
           </p:nvSpPr>
@@ -13204,7 +13947,7 @@
       </p:grpSp>
       <p:grpSp>
         <p:nvGrpSpPr>
-          <p:cNvPr name="Group 87" id="87"/>
+          <p:cNvPr name="Group 91" id="91"/>
           <p:cNvGrpSpPr/>
           <p:nvPr/>
         </p:nvGrpSpPr>
@@ -13218,7 +13961,7 @@
         </p:grpSpPr>
         <p:sp>
           <p:nvSpPr>
-            <p:cNvPr name="Freeform 88" id="88"/>
+            <p:cNvPr name="Freeform 92" id="92"/>
             <p:cNvSpPr/>
             <p:nvPr/>
           </p:nvSpPr>
@@ -13261,7 +14004,7 @@
         </p:sp>
         <p:sp>
           <p:nvSpPr>
-            <p:cNvPr name="Freeform 89" id="89"/>
+            <p:cNvPr name="Freeform 93" id="93"/>
             <p:cNvSpPr/>
             <p:nvPr/>
           </p:nvSpPr>
@@ -13313,7 +14056,7 @@
         </p:sp>
         <p:sp>
           <p:nvSpPr>
-            <p:cNvPr name="TextBox 90" id="90"/>
+            <p:cNvPr name="TextBox 94" id="94"/>
             <p:cNvSpPr txBox="true"/>
             <p:nvPr/>
           </p:nvSpPr>
@@ -13353,7 +14096,7 @@
       </p:grpSp>
       <p:sp>
         <p:nvSpPr>
-          <p:cNvPr name="TextBox 91" id="91"/>
+          <p:cNvPr name="TextBox 95" id="95"/>
           <p:cNvSpPr txBox="true"/>
           <p:nvPr/>
         </p:nvSpPr>
@@ -13394,7 +14137,7 @@
       </p:sp>
       <p:sp>
         <p:nvSpPr>
-          <p:cNvPr name="AutoShape 92" id="92"/>
+          <p:cNvPr name="AutoShape 96" id="96"/>
           <p:cNvSpPr/>
           <p:nvPr/>
         </p:nvSpPr>
@@ -13521,9 +14264,174 @@
           </p:spPr>
         </p:sp>
       </p:grpSp>
-      <p:sp>
-        <p:nvSpPr>
-          <p:cNvPr name="Freeform 5" id="5"/>
+      <p:grpSp>
+        <p:nvGrpSpPr>
+          <p:cNvPr name="Group 5" id="5"/>
+          <p:cNvGrpSpPr/>
+          <p:nvPr/>
+        </p:nvGrpSpPr>
+        <p:grpSpPr>
+          <a:xfrm rot="0">
+            <a:off x="0" y="0"/>
+            <a:ext cx="12192000" cy="6858000"/>
+            <a:chOff x="0" y="0"/>
+            <a:chExt cx="16256000" cy="9144000"/>
+          </a:xfrm>
+        </p:grpSpPr>
+        <p:sp>
+          <p:nvSpPr>
+            <p:cNvPr name="Freeform 6" id="6"/>
+            <p:cNvSpPr/>
+            <p:nvPr/>
+          </p:nvSpPr>
+          <p:spPr>
+            <a:xfrm flipH="false" flipV="false" rot="0">
+              <a:off x="0" y="0"/>
+              <a:ext cx="16256000" cy="9144000"/>
+            </a:xfrm>
+            <a:custGeom>
+              <a:avLst/>
+              <a:gdLst/>
+              <a:ahLst/>
+              <a:cxnLst/>
+              <a:rect r="r" b="b" t="t" l="l"/>
+              <a:pathLst>
+                <a:path h="9144000" w="16256000">
+                  <a:moveTo>
+                    <a:pt x="0" y="0"/>
+                  </a:moveTo>
+                  <a:lnTo>
+                    <a:pt x="16256000" y="0"/>
+                  </a:lnTo>
+                  <a:lnTo>
+                    <a:pt x="16256000" y="9144000"/>
+                  </a:lnTo>
+                  <a:lnTo>
+                    <a:pt x="0" y="9144000"/>
+                  </a:lnTo>
+                  <a:lnTo>
+                    <a:pt x="0" y="0"/>
+                  </a:lnTo>
+                  <a:close/>
+                </a:path>
+              </a:pathLst>
+            </a:custGeom>
+            <a:blipFill>
+              <a:blip r:embed="rId4">
+                <a:extLst>
+                  <a:ext uri="{96DAC541-7B7A-43D3-8B79-37D633B846F1}">
+                    <asvg:svgBlip xmlns:asvg="http://schemas.microsoft.com/office/drawing/2016/SVG/main" r:embed="rId5"/>
+                  </a:ext>
+                </a:extLst>
+              </a:blip>
+              <a:stretch>
+                <a:fillRect l="0" t="0" r="0" b="0"/>
+              </a:stretch>
+            </a:blipFill>
+          </p:spPr>
+        </p:sp>
+        <p:sp>
+          <p:nvSpPr>
+            <p:cNvPr name="Freeform 7" id="7"/>
+            <p:cNvSpPr/>
+            <p:nvPr/>
+          </p:nvSpPr>
+          <p:spPr>
+            <a:xfrm flipH="false" flipV="false" rot="0">
+              <a:off x="11887200" y="0"/>
+              <a:ext cx="3556000" cy="803656"/>
+            </a:xfrm>
+            <a:custGeom>
+              <a:avLst/>
+              <a:gdLst/>
+              <a:ahLst/>
+              <a:cxnLst/>
+              <a:rect r="r" b="b" t="t" l="l"/>
+              <a:pathLst>
+                <a:path h="803656" w="3556000">
+                  <a:moveTo>
+                    <a:pt x="0" y="0"/>
+                  </a:moveTo>
+                  <a:lnTo>
+                    <a:pt x="3556000" y="0"/>
+                  </a:lnTo>
+                  <a:lnTo>
+                    <a:pt x="3556000" y="803656"/>
+                  </a:lnTo>
+                  <a:lnTo>
+                    <a:pt x="0" y="803656"/>
+                  </a:lnTo>
+                  <a:lnTo>
+                    <a:pt x="0" y="0"/>
+                  </a:lnTo>
+                  <a:close/>
+                </a:path>
+              </a:pathLst>
+            </a:custGeom>
+            <a:blipFill>
+              <a:blip r:embed="rId6"/>
+              <a:stretch>
+                <a:fillRect l="0" t="0" r="0" b="0"/>
+              </a:stretch>
+            </a:blipFill>
+          </p:spPr>
+        </p:sp>
+        <p:sp>
+          <p:nvSpPr>
+            <p:cNvPr name="Freeform 8" id="8"/>
+            <p:cNvSpPr/>
+            <p:nvPr/>
+          </p:nvSpPr>
+          <p:spPr>
+            <a:xfrm flipH="false" flipV="false" rot="0">
+              <a:off x="812800" y="127000"/>
+              <a:ext cx="2413000" cy="504536"/>
+            </a:xfrm>
+            <a:custGeom>
+              <a:avLst/>
+              <a:gdLst/>
+              <a:ahLst/>
+              <a:cxnLst/>
+              <a:rect r="r" b="b" t="t" l="l"/>
+              <a:pathLst>
+                <a:path h="504536" w="2413000">
+                  <a:moveTo>
+                    <a:pt x="0" y="0"/>
+                  </a:moveTo>
+                  <a:lnTo>
+                    <a:pt x="2413000" y="0"/>
+                  </a:lnTo>
+                  <a:lnTo>
+                    <a:pt x="2413000" y="504536"/>
+                  </a:lnTo>
+                  <a:lnTo>
+                    <a:pt x="0" y="504536"/>
+                  </a:lnTo>
+                  <a:lnTo>
+                    <a:pt x="0" y="0"/>
+                  </a:lnTo>
+                  <a:close/>
+                </a:path>
+              </a:pathLst>
+            </a:custGeom>
+            <a:blipFill>
+              <a:blip r:embed="rId7">
+                <a:extLst>
+                  <a:ext uri="{96DAC541-7B7A-43D3-8B79-37D633B846F1}">
+                    <asvg:svgBlip xmlns:asvg="http://schemas.microsoft.com/office/drawing/2016/SVG/main" r:embed="rId8"/>
+                  </a:ext>
+                </a:extLst>
+              </a:blip>
+              <a:stretch>
+                <a:fillRect l="0" t="0" r="0" b="0"/>
+              </a:stretch>
+            </a:blipFill>
+          </p:spPr>
+        </p:sp>
+      </p:grpSp>
+      <p:sp>
+        <p:nvSpPr>
+          <p:cNvPr name="Freeform 9" id="9"/>
           <p:cNvSpPr/>
           <p:nvPr/>
         </p:nvSpPr>
@@ -13560,10 +14468,10 @@
             </a:pathLst>
           </a:custGeom>
           <a:blipFill>
-            <a:blip r:embed="rId4">
+            <a:blip r:embed="rId9">
               <a:extLst>
                 <a:ext uri="{96DAC541-7B7A-43D3-8B79-37D633B846F1}">
-                  <asvg:svgBlip xmlns:asvg="http://schemas.microsoft.com/office/drawing/2016/SVG/main" r:embed="rId5"/>
+                  <asvg:svgBlip xmlns:asvg="http://schemas.microsoft.com/office/drawing/2016/SVG/main" r:embed="rId10"/>
                 </a:ext>
               </a:extLst>
             </a:blip>
@@ -13575,7 +14483,59 @@
       </p:sp>
       <p:sp>
         <p:nvSpPr>
-          <p:cNvPr name="TextBox 6" id="6"/>
+          <p:cNvPr name="Freeform 10" id="10"/>
+          <p:cNvSpPr/>
+          <p:nvPr/>
+        </p:nvSpPr>
+        <p:spPr>
+          <a:xfrm flipH="false" flipV="false" rot="0">
+            <a:off x="9667875" y="2971800"/>
+            <a:ext cx="342900" cy="457755"/>
+          </a:xfrm>
+          <a:custGeom>
+            <a:avLst/>
+            <a:gdLst/>
+            <a:ahLst/>
+            <a:cxnLst/>
+            <a:rect r="r" b="b" t="t" l="l"/>
+            <a:pathLst>
+              <a:path h="457755" w="342900">
+                <a:moveTo>
+                  <a:pt x="0" y="0"/>
+                </a:moveTo>
+                <a:lnTo>
+                  <a:pt x="342900" y="0"/>
+                </a:lnTo>
+                <a:lnTo>
+                  <a:pt x="342900" y="457755"/>
+                </a:lnTo>
+                <a:lnTo>
+                  <a:pt x="0" y="457755"/>
+                </a:lnTo>
+                <a:lnTo>
+                  <a:pt x="0" y="0"/>
+                </a:lnTo>
+                <a:close/>
+              </a:path>
+            </a:pathLst>
+          </a:custGeom>
+          <a:blipFill>
+            <a:blip r:embed="rId11">
+              <a:extLst>
+                <a:ext uri="{96DAC541-7B7A-43D3-8B79-37D633B846F1}">
+                  <asvg:svgBlip xmlns:asvg="http://schemas.microsoft.com/office/drawing/2016/SVG/main" r:embed="rId12"/>
+                </a:ext>
+              </a:extLst>
+            </a:blip>
+            <a:stretch>
+              <a:fillRect l="0" t="0" r="0" b="0"/>
+            </a:stretch>
+          </a:blipFill>
+        </p:spPr>
+      </p:sp>
+      <p:sp>
+        <p:nvSpPr>
+          <p:cNvPr name="TextBox 11" id="11"/>
           <p:cNvSpPr txBox="true"/>
           <p:nvPr/>
         </p:nvSpPr>
@@ -13616,48 +14576,7 @@
       </p:sp>
       <p:sp>
         <p:nvSpPr>
-          <p:cNvPr name="TextBox 7" id="7"/>
-          <p:cNvSpPr txBox="true"/>
-          <p:nvPr/>
-        </p:nvSpPr>
-        <p:spPr>
-          <a:xfrm rot="0">
-            <a:off x="609600" y="533400"/>
-            <a:ext cx="5715000" cy="393382"/>
-          </a:xfrm>
-          <a:prstGeom prst="rect">
-            <a:avLst/>
-          </a:prstGeom>
-        </p:spPr>
-        <p:txBody>
-          <a:bodyPr anchor="t" rtlCol="false" tIns="0" lIns="0" bIns="0" rIns="0">
-            <a:spAutoFit/>
-          </a:bodyPr>
-          <a:lstStyle/>
-          <a:p>
-            <a:pPr algn="l">
-              <a:lnSpc>
-                <a:spcPts val="3202"/>
-              </a:lnSpc>
-            </a:pPr>
-            <a:r>
-              <a:rPr lang="en-US" b="1" sz="2625">
-                <a:solidFill>
-                  <a:srgbClr val="087E70"/>
-                </a:solidFill>
-                <a:latin typeface="DM Sans"/>
-                <a:ea typeface="DM Sans"/>
-                <a:cs typeface="DM Sans"/>
-                <a:sym typeface="DM Sans"/>
-              </a:rPr>
-              <a:t>backtrack.</a:t>
-            </a:r>
-          </a:p>
-        </p:txBody>
-      </p:sp>
-      <p:sp>
-        <p:nvSpPr>
-          <p:cNvPr name="TextBox 8" id="8"/>
+          <p:cNvPr name="TextBox 12" id="12"/>
           <p:cNvSpPr txBox="true"/>
           <p:nvPr/>
         </p:nvSpPr>
@@ -13717,7 +14636,7 @@
       </p:sp>
       <p:sp>
         <p:nvSpPr>
-          <p:cNvPr name="TextBox 9" id="9"/>
+          <p:cNvPr name="TextBox 13" id="13"/>
           <p:cNvSpPr txBox="true"/>
           <p:nvPr/>
         </p:nvSpPr>
@@ -13758,7 +14677,7 @@
       </p:sp>
       <p:sp>
         <p:nvSpPr>
-          <p:cNvPr name="TextBox 10" id="10"/>
+          <p:cNvPr name="TextBox 14" id="14"/>
           <p:cNvSpPr txBox="true"/>
           <p:nvPr/>
         </p:nvSpPr>
@@ -13799,7 +14718,7 @@
       </p:sp>
       <p:sp>
         <p:nvSpPr>
-          <p:cNvPr name="TextBox 11" id="11"/>
+          <p:cNvPr name="TextBox 15" id="15"/>
           <p:cNvSpPr txBox="true"/>
           <p:nvPr/>
         </p:nvSpPr>
@@ -13943,9 +14862,174 @@
           </p:spPr>
         </p:sp>
       </p:grpSp>
-      <p:sp>
-        <p:nvSpPr>
-          <p:cNvPr name="TextBox 5" id="5"/>
+      <p:grpSp>
+        <p:nvGrpSpPr>
+          <p:cNvPr name="Group 5" id="5"/>
+          <p:cNvGrpSpPr/>
+          <p:nvPr/>
+        </p:nvGrpSpPr>
+        <p:grpSpPr>
+          <a:xfrm rot="0">
+            <a:off x="0" y="0"/>
+            <a:ext cx="12192000" cy="6858000"/>
+            <a:chOff x="0" y="0"/>
+            <a:chExt cx="16256000" cy="9144000"/>
+          </a:xfrm>
+        </p:grpSpPr>
+        <p:sp>
+          <p:nvSpPr>
+            <p:cNvPr name="Freeform 6" id="6"/>
+            <p:cNvSpPr/>
+            <p:nvPr/>
+          </p:nvSpPr>
+          <p:spPr>
+            <a:xfrm flipH="false" flipV="false" rot="0">
+              <a:off x="0" y="0"/>
+              <a:ext cx="16256000" cy="9144000"/>
+            </a:xfrm>
+            <a:custGeom>
+              <a:avLst/>
+              <a:gdLst/>
+              <a:ahLst/>
+              <a:cxnLst/>
+              <a:rect r="r" b="b" t="t" l="l"/>
+              <a:pathLst>
+                <a:path h="9144000" w="16256000">
+                  <a:moveTo>
+                    <a:pt x="0" y="0"/>
+                  </a:moveTo>
+                  <a:lnTo>
+                    <a:pt x="16256000" y="0"/>
+                  </a:lnTo>
+                  <a:lnTo>
+                    <a:pt x="16256000" y="9144000"/>
+                  </a:lnTo>
+                  <a:lnTo>
+                    <a:pt x="0" y="9144000"/>
+                  </a:lnTo>
+                  <a:lnTo>
+                    <a:pt x="0" y="0"/>
+                  </a:lnTo>
+                  <a:close/>
+                </a:path>
+              </a:pathLst>
+            </a:custGeom>
+            <a:blipFill>
+              <a:blip r:embed="rId4">
+                <a:extLst>
+                  <a:ext uri="{96DAC541-7B7A-43D3-8B79-37D633B846F1}">
+                    <asvg:svgBlip xmlns:asvg="http://schemas.microsoft.com/office/drawing/2016/SVG/main" r:embed="rId5"/>
+                  </a:ext>
+                </a:extLst>
+              </a:blip>
+              <a:stretch>
+                <a:fillRect l="0" t="0" r="0" b="0"/>
+              </a:stretch>
+            </a:blipFill>
+          </p:spPr>
+        </p:sp>
+        <p:sp>
+          <p:nvSpPr>
+            <p:cNvPr name="Freeform 7" id="7"/>
+            <p:cNvSpPr/>
+            <p:nvPr/>
+          </p:nvSpPr>
+          <p:spPr>
+            <a:xfrm flipH="false" flipV="false" rot="0">
+              <a:off x="11887200" y="0"/>
+              <a:ext cx="3556000" cy="803656"/>
+            </a:xfrm>
+            <a:custGeom>
+              <a:avLst/>
+              <a:gdLst/>
+              <a:ahLst/>
+              <a:cxnLst/>
+              <a:rect r="r" b="b" t="t" l="l"/>
+              <a:pathLst>
+                <a:path h="803656" w="3556000">
+                  <a:moveTo>
+                    <a:pt x="0" y="0"/>
+                  </a:moveTo>
+                  <a:lnTo>
+                    <a:pt x="3556000" y="0"/>
+                  </a:lnTo>
+                  <a:lnTo>
+                    <a:pt x="3556000" y="803656"/>
+                  </a:lnTo>
+                  <a:lnTo>
+                    <a:pt x="0" y="803656"/>
+                  </a:lnTo>
+                  <a:lnTo>
+                    <a:pt x="0" y="0"/>
+                  </a:lnTo>
+                  <a:close/>
+                </a:path>
+              </a:pathLst>
+            </a:custGeom>
+            <a:blipFill>
+              <a:blip r:embed="rId6"/>
+              <a:stretch>
+                <a:fillRect l="0" t="0" r="0" b="0"/>
+              </a:stretch>
+            </a:blipFill>
+          </p:spPr>
+        </p:sp>
+        <p:sp>
+          <p:nvSpPr>
+            <p:cNvPr name="Freeform 8" id="8"/>
+            <p:cNvSpPr/>
+            <p:nvPr/>
+          </p:nvSpPr>
+          <p:spPr>
+            <a:xfrm flipH="false" flipV="false" rot="0">
+              <a:off x="812800" y="127000"/>
+              <a:ext cx="2413000" cy="504536"/>
+            </a:xfrm>
+            <a:custGeom>
+              <a:avLst/>
+              <a:gdLst/>
+              <a:ahLst/>
+              <a:cxnLst/>
+              <a:rect r="r" b="b" t="t" l="l"/>
+              <a:pathLst>
+                <a:path h="504536" w="2413000">
+                  <a:moveTo>
+                    <a:pt x="0" y="0"/>
+                  </a:moveTo>
+                  <a:lnTo>
+                    <a:pt x="2413000" y="0"/>
+                  </a:lnTo>
+                  <a:lnTo>
+                    <a:pt x="2413000" y="504536"/>
+                  </a:lnTo>
+                  <a:lnTo>
+                    <a:pt x="0" y="504536"/>
+                  </a:lnTo>
+                  <a:lnTo>
+                    <a:pt x="0" y="0"/>
+                  </a:lnTo>
+                  <a:close/>
+                </a:path>
+              </a:pathLst>
+            </a:custGeom>
+            <a:blipFill>
+              <a:blip r:embed="rId7">
+                <a:extLst>
+                  <a:ext uri="{96DAC541-7B7A-43D3-8B79-37D633B846F1}">
+                    <asvg:svgBlip xmlns:asvg="http://schemas.microsoft.com/office/drawing/2016/SVG/main" r:embed="rId8"/>
+                  </a:ext>
+                </a:extLst>
+              </a:blip>
+              <a:stretch>
+                <a:fillRect l="0" t="0" r="0" b="0"/>
+              </a:stretch>
+            </a:blipFill>
+          </p:spPr>
+        </p:sp>
+      </p:grpSp>
+      <p:sp>
+        <p:nvSpPr>
+          <p:cNvPr name="TextBox 9" id="9"/>
           <p:cNvSpPr txBox="true"/>
           <p:nvPr/>
         </p:nvSpPr>
@@ -13986,7 +15070,7 @@
       </p:sp>
       <p:sp>
         <p:nvSpPr>
-          <p:cNvPr name="TextBox 6" id="6"/>
+          <p:cNvPr name="TextBox 10" id="10"/>
           <p:cNvSpPr txBox="true"/>
           <p:nvPr/>
         </p:nvSpPr>
@@ -14027,7 +15111,7 @@
       </p:sp>
       <p:sp>
         <p:nvSpPr>
-          <p:cNvPr name="TextBox 7" id="7"/>
+          <p:cNvPr name="TextBox 11" id="11"/>
           <p:cNvSpPr txBox="true"/>
           <p:nvPr/>
         </p:nvSpPr>
@@ -14060,7 +15144,7 @@
                 <a:ea typeface="DM Sans"/>
                 <a:cs typeface="DM Sans"/>
                 <a:sym typeface="DM Sans"/>
-                <a:hlinkClick r:id="rId4" tooltip="https://support.khanacademy.org/hc/en-us/articles/360031129891-What-reporting-options-are-available-on-Khan-Academy-for-teachers-to-track-student-performance"/>
+                <a:hlinkClick r:id="rId9" tooltip="https://support.khanacademy.org/hc/en-us/articles/360031129891-What-reporting-options-are-available-on-Khan-Academy-for-teachers-to-track-student-performance"/>
               </a:rPr>
               <a:t>Khan Academy teacher reports</a:t>
             </a:r>
@@ -14069,7 +15153,7 @@
       </p:sp>
       <p:sp>
         <p:nvSpPr>
-          <p:cNvPr name="TextBox 8" id="8"/>
+          <p:cNvPr name="TextBox 12" id="12"/>
           <p:cNvSpPr txBox="true"/>
           <p:nvPr/>
         </p:nvSpPr>
@@ -14102,7 +15186,7 @@
                 <a:ea typeface="DM Sans"/>
                 <a:cs typeface="DM Sans"/>
                 <a:sym typeface="DM Sans"/>
-                <a:hlinkClick r:id="rId5" tooltip="https://www.mheducation.com/unitas/school/explore/sites/aleks/customizing-custom-objectives.pdf"/>
+                <a:hlinkClick r:id="rId10" tooltip="https://www.mheducation.com/unitas/school/explore/sites/aleks/customizing-custom-objectives.pdf"/>
               </a:rPr>
               <a:t>ALEKS custom objectives</a:t>
             </a:r>
@@ -14111,7 +15195,7 @@
       </p:sp>
       <p:sp>
         <p:nvSpPr>
-          <p:cNvPr name="TextBox 9" id="9"/>
+          <p:cNvPr name="TextBox 13" id="13"/>
           <p:cNvSpPr txBox="true"/>
           <p:nvPr/>
         </p:nvSpPr>
@@ -14144,7 +15228,7 @@
                 <a:ea typeface="DM Sans"/>
                 <a:cs typeface="DM Sans"/>
                 <a:sym typeface="DM Sans"/>
-                <a:hlinkClick r:id="rId6" tooltip="https://blog.google/innovation-and-ai/products/gemini-app/gemini-study-notebooks/"/>
+                <a:hlinkClick r:id="rId11" tooltip="https://blog.google/innovation-and-ai/products/gemini-app/gemini-study-notebooks/"/>
               </a:rPr>
               <a:t>Gemini study notebooks · 2026</a:t>
             </a:r>
@@ -14153,7 +15237,7 @@
       </p:sp>
       <p:sp>
         <p:nvSpPr>
-          <p:cNvPr name="TextBox 10" id="10"/>
+          <p:cNvPr name="TextBox 14" id="14"/>
           <p:cNvSpPr txBox="true"/>
           <p:nvPr/>
         </p:nvSpPr>
@@ -14186,7 +15270,7 @@
                 <a:ea typeface="DM Sans"/>
                 <a:cs typeface="DM Sans"/>
                 <a:sym typeface="DM Sans"/>
-                <a:hlinkClick r:id="rId7" tooltip="https://ies.ed.gov/ncee/wwc/practiceguide/1"/>
+                <a:hlinkClick r:id="rId12" tooltip="https://ies.ed.gov/ncee/wwc/practiceguide/1"/>
               </a:rPr>
               <a:t>IES learning practice guide</a:t>
             </a:r>
@@ -14195,7 +15279,7 @@
       </p:sp>
       <p:sp>
         <p:nvSpPr>
-          <p:cNvPr name="TextBox 11" id="11"/>
+          <p:cNvPr name="TextBox 15" id="15"/>
           <p:cNvSpPr txBox="true"/>
           <p:nvPr/>
         </p:nvSpPr>
@@ -14228,7 +15312,7 @@
                 <a:ea typeface="DM Sans"/>
                 <a:cs typeface="DM Sans"/>
                 <a:sym typeface="DM Sans"/>
-                <a:hlinkClick r:id="rId8" tooltip="https://doi.org/10.1038/s44159-022-00089-1"/>
+                <a:hlinkClick r:id="rId13" tooltip="https://doi.org/10.1038/s44159-022-00089-1"/>
               </a:rPr>
               <a:t>Spacing and retrieval · 2022</a:t>
             </a:r>
@@ -14237,7 +15321,7 @@
       </p:sp>
       <p:sp>
         <p:nvSpPr>
-          <p:cNvPr name="TextBox 12" id="12"/>
+          <p:cNvPr name="TextBox 16" id="16"/>
           <p:cNvSpPr txBox="true"/>
           <p:nvPr/>
         </p:nvSpPr>
@@ -14270,7 +15354,7 @@
                 <a:ea typeface="DM Sans"/>
                 <a:cs typeface="DM Sans"/>
                 <a:sym typeface="DM Sans"/>
-                <a:hlinkClick r:id="rId9" tooltip="https://doi.org/10.1007/s10763-021-10207-9"/>
+                <a:hlinkClick r:id="rId14" tooltip="https://doi.org/10.1007/s10763-021-10207-9"/>
               </a:rPr>
               <a:t>Confidence assessment · Foster</a:t>
             </a:r>
@@ -14279,7 +15363,7 @@
       </p:sp>
       <p:sp>
         <p:nvSpPr>
-          <p:cNvPr name="TextBox 13" id="13"/>
+          <p:cNvPr name="TextBox 17" id="17"/>
           <p:cNvSpPr txBox="true"/>
           <p:nvPr/>
         </p:nvSpPr>
@@ -14312,7 +15396,7 @@
                 <a:ea typeface="DM Sans"/>
                 <a:cs typeface="DM Sans"/>
                 <a:sym typeface="DM Sans"/>
-                <a:hlinkClick r:id="rId10" tooltip="https://selfdeterminationtheory.org/topics/application-education/"/>
+                <a:hlinkClick r:id="rId15" tooltip="https://selfdeterminationtheory.org/topics/application-education/"/>
               </a:rPr>
               <a:t>Self-Determination Theory in education</a:t>
             </a:r>
@@ -14321,7 +15405,7 @@
       </p:sp>
       <p:sp>
         <p:nvSpPr>
-          <p:cNvPr name="AutoShape 14" id="14"/>
+          <p:cNvPr name="AutoShape 18" id="18"/>
           <p:cNvSpPr/>
           <p:nvPr/>
         </p:nvSpPr>
@@ -14448,9 +15532,174 @@
           </p:spPr>
         </p:sp>
       </p:grpSp>
-      <p:sp>
-        <p:nvSpPr>
-          <p:cNvPr name="TextBox 5" id="5"/>
+      <p:grpSp>
+        <p:nvGrpSpPr>
+          <p:cNvPr name="Group 5" id="5"/>
+          <p:cNvGrpSpPr/>
+          <p:nvPr/>
+        </p:nvGrpSpPr>
+        <p:grpSpPr>
+          <a:xfrm rot="0">
+            <a:off x="0" y="0"/>
+            <a:ext cx="12192000" cy="6858000"/>
+            <a:chOff x="0" y="0"/>
+            <a:chExt cx="16256000" cy="9144000"/>
+          </a:xfrm>
+        </p:grpSpPr>
+        <p:sp>
+          <p:nvSpPr>
+            <p:cNvPr name="Freeform 6" id="6"/>
+            <p:cNvSpPr/>
+            <p:nvPr/>
+          </p:nvSpPr>
+          <p:spPr>
+            <a:xfrm flipH="false" flipV="false" rot="0">
+              <a:off x="0" y="0"/>
+              <a:ext cx="16256000" cy="9144000"/>
+            </a:xfrm>
+            <a:custGeom>
+              <a:avLst/>
+              <a:gdLst/>
+              <a:ahLst/>
+              <a:cxnLst/>
+              <a:rect r="r" b="b" t="t" l="l"/>
+              <a:pathLst>
+                <a:path h="9144000" w="16256000">
+                  <a:moveTo>
+                    <a:pt x="0" y="0"/>
+                  </a:moveTo>
+                  <a:lnTo>
+                    <a:pt x="16256000" y="0"/>
+                  </a:lnTo>
+                  <a:lnTo>
+                    <a:pt x="16256000" y="9144000"/>
+                  </a:lnTo>
+                  <a:lnTo>
+                    <a:pt x="0" y="9144000"/>
+                  </a:lnTo>
+                  <a:lnTo>
+                    <a:pt x="0" y="0"/>
+                  </a:lnTo>
+                  <a:close/>
+                </a:path>
+              </a:pathLst>
+            </a:custGeom>
+            <a:blipFill>
+              <a:blip r:embed="rId4">
+                <a:extLst>
+                  <a:ext uri="{96DAC541-7B7A-43D3-8B79-37D633B846F1}">
+                    <asvg:svgBlip xmlns:asvg="http://schemas.microsoft.com/office/drawing/2016/SVG/main" r:embed="rId5"/>
+                  </a:ext>
+                </a:extLst>
+              </a:blip>
+              <a:stretch>
+                <a:fillRect l="0" t="0" r="0" b="0"/>
+              </a:stretch>
+            </a:blipFill>
+          </p:spPr>
+        </p:sp>
+        <p:sp>
+          <p:nvSpPr>
+            <p:cNvPr name="Freeform 7" id="7"/>
+            <p:cNvSpPr/>
+            <p:nvPr/>
+          </p:nvSpPr>
+          <p:spPr>
+            <a:xfrm flipH="false" flipV="false" rot="0">
+              <a:off x="11887200" y="0"/>
+              <a:ext cx="3556000" cy="803656"/>
+            </a:xfrm>
+            <a:custGeom>
+              <a:avLst/>
+              <a:gdLst/>
+              <a:ahLst/>
+              <a:cxnLst/>
+              <a:rect r="r" b="b" t="t" l="l"/>
+              <a:pathLst>
+                <a:path h="803656" w="3556000">
+                  <a:moveTo>
+                    <a:pt x="0" y="0"/>
+                  </a:moveTo>
+                  <a:lnTo>
+                    <a:pt x="3556000" y="0"/>
+                  </a:lnTo>
+                  <a:lnTo>
+                    <a:pt x="3556000" y="803656"/>
+                  </a:lnTo>
+                  <a:lnTo>
+                    <a:pt x="0" y="803656"/>
+                  </a:lnTo>
+                  <a:lnTo>
+                    <a:pt x="0" y="0"/>
+                  </a:lnTo>
+                  <a:close/>
+                </a:path>
+              </a:pathLst>
+            </a:custGeom>
+            <a:blipFill>
+              <a:blip r:embed="rId6"/>
+              <a:stretch>
+                <a:fillRect l="0" t="0" r="0" b="0"/>
+              </a:stretch>
+            </a:blipFill>
+          </p:spPr>
+        </p:sp>
+        <p:sp>
+          <p:nvSpPr>
+            <p:cNvPr name="Freeform 8" id="8"/>
+            <p:cNvSpPr/>
+            <p:nvPr/>
+          </p:nvSpPr>
+          <p:spPr>
+            <a:xfrm flipH="false" flipV="false" rot="0">
+              <a:off x="812800" y="127000"/>
+              <a:ext cx="2413000" cy="504536"/>
+            </a:xfrm>
+            <a:custGeom>
+              <a:avLst/>
+              <a:gdLst/>
+              <a:ahLst/>
+              <a:cxnLst/>
+              <a:rect r="r" b="b" t="t" l="l"/>
+              <a:pathLst>
+                <a:path h="504536" w="2413000">
+                  <a:moveTo>
+                    <a:pt x="0" y="0"/>
+                  </a:moveTo>
+                  <a:lnTo>
+                    <a:pt x="2413000" y="0"/>
+                  </a:lnTo>
+                  <a:lnTo>
+                    <a:pt x="2413000" y="504536"/>
+                  </a:lnTo>
+                  <a:lnTo>
+                    <a:pt x="0" y="504536"/>
+                  </a:lnTo>
+                  <a:lnTo>
+                    <a:pt x="0" y="0"/>
+                  </a:lnTo>
+                  <a:close/>
+                </a:path>
+              </a:pathLst>
+            </a:custGeom>
+            <a:blipFill>
+              <a:blip r:embed="rId7">
+                <a:extLst>
+                  <a:ext uri="{96DAC541-7B7A-43D3-8B79-37D633B846F1}">
+                    <asvg:svgBlip xmlns:asvg="http://schemas.microsoft.com/office/drawing/2016/SVG/main" r:embed="rId8"/>
+                  </a:ext>
+                </a:extLst>
+              </a:blip>
+              <a:stretch>
+                <a:fillRect l="0" t="0" r="0" b="0"/>
+              </a:stretch>
+            </a:blipFill>
+          </p:spPr>
+        </p:sp>
+      </p:grpSp>
+      <p:sp>
+        <p:nvSpPr>
+          <p:cNvPr name="TextBox 9" id="9"/>
           <p:cNvSpPr txBox="true"/>
           <p:nvPr/>
         </p:nvSpPr>
@@ -14491,7 +15740,7 @@
       </p:sp>
       <p:sp>
         <p:nvSpPr>
-          <p:cNvPr name="TextBox 6" id="6"/>
+          <p:cNvPr name="TextBox 10" id="10"/>
           <p:cNvSpPr txBox="true"/>
           <p:nvPr/>
         </p:nvSpPr>
@@ -14532,7 +15781,7 @@
       </p:sp>
       <p:sp>
         <p:nvSpPr>
-          <p:cNvPr name="TextBox 7" id="7"/>
+          <p:cNvPr name="TextBox 11" id="11"/>
           <p:cNvSpPr txBox="true"/>
           <p:nvPr/>
         </p:nvSpPr>
@@ -14573,7 +15822,7 @@
       </p:sp>
       <p:sp>
         <p:nvSpPr>
-          <p:cNvPr name="AutoShape 8" id="8"/>
+          <p:cNvPr name="AutoShape 12" id="12"/>
           <p:cNvSpPr/>
           <p:nvPr/>
         </p:nvSpPr>
@@ -14592,7 +15841,7 @@
       </p:sp>
       <p:sp>
         <p:nvSpPr>
-          <p:cNvPr name="TextBox 9" id="9"/>
+          <p:cNvPr name="TextBox 13" id="13"/>
           <p:cNvSpPr txBox="true"/>
           <p:nvPr/>
         </p:nvSpPr>
@@ -14633,7 +15882,7 @@
       </p:sp>
       <p:sp>
         <p:nvSpPr>
-          <p:cNvPr name="TextBox 10" id="10"/>
+          <p:cNvPr name="TextBox 14" id="14"/>
           <p:cNvSpPr txBox="true"/>
           <p:nvPr/>
         </p:nvSpPr>
@@ -14674,7 +15923,7 @@
       </p:sp>
       <p:sp>
         <p:nvSpPr>
-          <p:cNvPr name="TextBox 11" id="11"/>
+          <p:cNvPr name="TextBox 15" id="15"/>
           <p:cNvSpPr txBox="true"/>
           <p:nvPr/>
         </p:nvSpPr>
@@ -14715,7 +15964,7 @@
       </p:sp>
       <p:sp>
         <p:nvSpPr>
-          <p:cNvPr name="AutoShape 12" id="12"/>
+          <p:cNvPr name="AutoShape 16" id="16"/>
           <p:cNvSpPr/>
           <p:nvPr/>
         </p:nvSpPr>
@@ -14734,7 +15983,7 @@
       </p:sp>
       <p:grpSp>
         <p:nvGrpSpPr>
-          <p:cNvPr name="Group 13" id="13"/>
+          <p:cNvPr name="Group 17" id="17"/>
           <p:cNvGrpSpPr/>
           <p:nvPr/>
         </p:nvGrpSpPr>
@@ -14748,7 +15997,7 @@
         </p:grpSpPr>
         <p:sp>
           <p:nvSpPr>
-            <p:cNvPr name="Freeform 14" id="14"/>
+            <p:cNvPr name="Freeform 18" id="18"/>
             <p:cNvSpPr/>
             <p:nvPr/>
           </p:nvSpPr>
@@ -14806,7 +16055,7 @@
       </p:grpSp>
       <p:grpSp>
         <p:nvGrpSpPr>
-          <p:cNvPr name="Group 15" id="15"/>
+          <p:cNvPr name="Group 19" id="19"/>
           <p:cNvGrpSpPr/>
           <p:nvPr/>
         </p:nvGrpSpPr>
@@ -14820,7 +16069,7 @@
         </p:grpSpPr>
         <p:sp>
           <p:nvSpPr>
-            <p:cNvPr name="Freeform 16" id="16"/>
+            <p:cNvPr name="Freeform 20" id="20"/>
             <p:cNvSpPr/>
             <p:nvPr/>
           </p:nvSpPr>
@@ -14878,7 +16127,7 @@
       </p:grpSp>
       <p:sp>
         <p:nvSpPr>
-          <p:cNvPr name="TextBox 17" id="17"/>
+          <p:cNvPr name="TextBox 21" id="21"/>
           <p:cNvSpPr txBox="true"/>
           <p:nvPr/>
         </p:nvSpPr>
@@ -14919,7 +16168,7 @@
       </p:sp>
       <p:sp>
         <p:nvSpPr>
-          <p:cNvPr name="AutoShape 18" id="18"/>
+          <p:cNvPr name="AutoShape 22" id="22"/>
           <p:cNvSpPr/>
           <p:nvPr/>
         </p:nvSpPr>
@@ -14938,7 +16187,7 @@
       </p:sp>
       <p:sp>
         <p:nvSpPr>
-          <p:cNvPr name="TextBox 19" id="19"/>
+          <p:cNvPr name="TextBox 23" id="23"/>
           <p:cNvSpPr txBox="true"/>
           <p:nvPr/>
         </p:nvSpPr>
@@ -14979,7 +16228,7 @@
       </p:sp>
       <p:sp>
         <p:nvSpPr>
-          <p:cNvPr name="TextBox 20" id="20"/>
+          <p:cNvPr name="TextBox 24" id="24"/>
           <p:cNvSpPr txBox="true"/>
           <p:nvPr/>
         </p:nvSpPr>
@@ -15020,7 +16269,7 @@
       </p:sp>
       <p:sp>
         <p:nvSpPr>
-          <p:cNvPr name="TextBox 21" id="21"/>
+          <p:cNvPr name="TextBox 25" id="25"/>
           <p:cNvSpPr txBox="true"/>
           <p:nvPr/>
         </p:nvSpPr>
@@ -15061,7 +16310,7 @@
       </p:sp>
       <p:sp>
         <p:nvSpPr>
-          <p:cNvPr name="AutoShape 22" id="22"/>
+          <p:cNvPr name="AutoShape 26" id="26"/>
           <p:cNvSpPr/>
           <p:nvPr/>
         </p:nvSpPr>
@@ -15188,9 +16437,174 @@
           </p:spPr>
         </p:sp>
       </p:grpSp>
-      <p:sp>
-        <p:nvSpPr>
-          <p:cNvPr name="TextBox 5" id="5"/>
+      <p:grpSp>
+        <p:nvGrpSpPr>
+          <p:cNvPr name="Group 5" id="5"/>
+          <p:cNvGrpSpPr/>
+          <p:nvPr/>
+        </p:nvGrpSpPr>
+        <p:grpSpPr>
+          <a:xfrm rot="0">
+            <a:off x="0" y="0"/>
+            <a:ext cx="12192000" cy="6858000"/>
+            <a:chOff x="0" y="0"/>
+            <a:chExt cx="16256000" cy="9144000"/>
+          </a:xfrm>
+        </p:grpSpPr>
+        <p:sp>
+          <p:nvSpPr>
+            <p:cNvPr name="Freeform 6" id="6"/>
+            <p:cNvSpPr/>
+            <p:nvPr/>
+          </p:nvSpPr>
+          <p:spPr>
+            <a:xfrm flipH="false" flipV="false" rot="0">
+              <a:off x="0" y="0"/>
+              <a:ext cx="16256000" cy="9144000"/>
+            </a:xfrm>
+            <a:custGeom>
+              <a:avLst/>
+              <a:gdLst/>
+              <a:ahLst/>
+              <a:cxnLst/>
+              <a:rect r="r" b="b" t="t" l="l"/>
+              <a:pathLst>
+                <a:path h="9144000" w="16256000">
+                  <a:moveTo>
+                    <a:pt x="0" y="0"/>
+                  </a:moveTo>
+                  <a:lnTo>
+                    <a:pt x="16256000" y="0"/>
+                  </a:lnTo>
+                  <a:lnTo>
+                    <a:pt x="16256000" y="9144000"/>
+                  </a:lnTo>
+                  <a:lnTo>
+                    <a:pt x="0" y="9144000"/>
+                  </a:lnTo>
+                  <a:lnTo>
+                    <a:pt x="0" y="0"/>
+                  </a:lnTo>
+                  <a:close/>
+                </a:path>
+              </a:pathLst>
+            </a:custGeom>
+            <a:blipFill>
+              <a:blip r:embed="rId4">
+                <a:extLst>
+                  <a:ext uri="{96DAC541-7B7A-43D3-8B79-37D633B846F1}">
+                    <asvg:svgBlip xmlns:asvg="http://schemas.microsoft.com/office/drawing/2016/SVG/main" r:embed="rId5"/>
+                  </a:ext>
+                </a:extLst>
+              </a:blip>
+              <a:stretch>
+                <a:fillRect l="0" t="0" r="0" b="0"/>
+              </a:stretch>
+            </a:blipFill>
+          </p:spPr>
+        </p:sp>
+        <p:sp>
+          <p:nvSpPr>
+            <p:cNvPr name="Freeform 7" id="7"/>
+            <p:cNvSpPr/>
+            <p:nvPr/>
+          </p:nvSpPr>
+          <p:spPr>
+            <a:xfrm flipH="false" flipV="false" rot="0">
+              <a:off x="11887200" y="0"/>
+              <a:ext cx="3556000" cy="803656"/>
+            </a:xfrm>
+            <a:custGeom>
+              <a:avLst/>
+              <a:gdLst/>
+              <a:ahLst/>
+              <a:cxnLst/>
+              <a:rect r="r" b="b" t="t" l="l"/>
+              <a:pathLst>
+                <a:path h="803656" w="3556000">
+                  <a:moveTo>
+                    <a:pt x="0" y="0"/>
+                  </a:moveTo>
+                  <a:lnTo>
+                    <a:pt x="3556000" y="0"/>
+                  </a:lnTo>
+                  <a:lnTo>
+                    <a:pt x="3556000" y="803656"/>
+                  </a:lnTo>
+                  <a:lnTo>
+                    <a:pt x="0" y="803656"/>
+                  </a:lnTo>
+                  <a:lnTo>
+                    <a:pt x="0" y="0"/>
+                  </a:lnTo>
+                  <a:close/>
+                </a:path>
+              </a:pathLst>
+            </a:custGeom>
+            <a:blipFill>
+              <a:blip r:embed="rId6"/>
+              <a:stretch>
+                <a:fillRect l="0" t="0" r="0" b="0"/>
+              </a:stretch>
+            </a:blipFill>
+          </p:spPr>
+        </p:sp>
+        <p:sp>
+          <p:nvSpPr>
+            <p:cNvPr name="Freeform 8" id="8"/>
+            <p:cNvSpPr/>
+            <p:nvPr/>
+          </p:nvSpPr>
+          <p:spPr>
+            <a:xfrm flipH="false" flipV="false" rot="0">
+              <a:off x="812800" y="127000"/>
+              <a:ext cx="2413000" cy="504536"/>
+            </a:xfrm>
+            <a:custGeom>
+              <a:avLst/>
+              <a:gdLst/>
+              <a:ahLst/>
+              <a:cxnLst/>
+              <a:rect r="r" b="b" t="t" l="l"/>
+              <a:pathLst>
+                <a:path h="504536" w="2413000">
+                  <a:moveTo>
+                    <a:pt x="0" y="0"/>
+                  </a:moveTo>
+                  <a:lnTo>
+                    <a:pt x="2413000" y="0"/>
+                  </a:lnTo>
+                  <a:lnTo>
+                    <a:pt x="2413000" y="504536"/>
+                  </a:lnTo>
+                  <a:lnTo>
+                    <a:pt x="0" y="504536"/>
+                  </a:lnTo>
+                  <a:lnTo>
+                    <a:pt x="0" y="0"/>
+                  </a:lnTo>
+                  <a:close/>
+                </a:path>
+              </a:pathLst>
+            </a:custGeom>
+            <a:blipFill>
+              <a:blip r:embed="rId7">
+                <a:extLst>
+                  <a:ext uri="{96DAC541-7B7A-43D3-8B79-37D633B846F1}">
+                    <asvg:svgBlip xmlns:asvg="http://schemas.microsoft.com/office/drawing/2016/SVG/main" r:embed="rId8"/>
+                  </a:ext>
+                </a:extLst>
+              </a:blip>
+              <a:stretch>
+                <a:fillRect l="0" t="0" r="0" b="0"/>
+              </a:stretch>
+            </a:blipFill>
+          </p:spPr>
+        </p:sp>
+      </p:grpSp>
+      <p:sp>
+        <p:nvSpPr>
+          <p:cNvPr name="TextBox 9" id="9"/>
           <p:cNvSpPr txBox="true"/>
           <p:nvPr/>
         </p:nvSpPr>
@@ -15231,7 +16645,7 @@
       </p:sp>
       <p:sp>
         <p:nvSpPr>
-          <p:cNvPr name="TextBox 6" id="6"/>
+          <p:cNvPr name="TextBox 10" id="10"/>
           <p:cNvSpPr txBox="true"/>
           <p:nvPr/>
         </p:nvSpPr>
@@ -15272,7 +16686,7 @@
       </p:sp>
       <p:grpSp>
         <p:nvGrpSpPr>
-          <p:cNvPr name="Group 7" id="7"/>
+          <p:cNvPr name="Group 11" id="11"/>
           <p:cNvGrpSpPr/>
           <p:nvPr/>
         </p:nvGrpSpPr>
@@ -15286,7 +16700,7 @@
         </p:grpSpPr>
         <p:sp>
           <p:nvSpPr>
-            <p:cNvPr name="Freeform 8" id="8"/>
+            <p:cNvPr name="Freeform 12" id="12"/>
             <p:cNvSpPr/>
             <p:nvPr/>
           </p:nvSpPr>
@@ -15338,7 +16752,7 @@
       </p:grpSp>
       <p:sp>
         <p:nvSpPr>
-          <p:cNvPr name="TextBox 9" id="9"/>
+          <p:cNvPr name="TextBox 13" id="13"/>
           <p:cNvSpPr txBox="true"/>
           <p:nvPr/>
         </p:nvSpPr>
@@ -15379,7 +16793,7 @@
       </p:sp>
       <p:sp>
         <p:nvSpPr>
-          <p:cNvPr name="TextBox 10" id="10"/>
+          <p:cNvPr name="TextBox 14" id="14"/>
           <p:cNvSpPr txBox="true"/>
           <p:nvPr/>
         </p:nvSpPr>
@@ -15439,7 +16853,7 @@
       </p:sp>
       <p:sp>
         <p:nvSpPr>
-          <p:cNvPr name="AutoShape 11" id="11"/>
+          <p:cNvPr name="AutoShape 15" id="15"/>
           <p:cNvSpPr/>
           <p:nvPr/>
         </p:nvSpPr>
@@ -15458,7 +16872,7 @@
       </p:sp>
       <p:grpSp>
         <p:nvGrpSpPr>
-          <p:cNvPr name="Group 12" id="12"/>
+          <p:cNvPr name="Group 16" id="16"/>
           <p:cNvGrpSpPr/>
           <p:nvPr/>
         </p:nvGrpSpPr>
@@ -15472,7 +16886,7 @@
         </p:grpSpPr>
         <p:sp>
           <p:nvSpPr>
-            <p:cNvPr name="Freeform 13" id="13"/>
+            <p:cNvPr name="Freeform 17" id="17"/>
             <p:cNvSpPr/>
             <p:nvPr/>
           </p:nvSpPr>
@@ -15530,7 +16944,7 @@
       </p:grpSp>
       <p:grpSp>
         <p:nvGrpSpPr>
-          <p:cNvPr name="Group 14" id="14"/>
+          <p:cNvPr name="Group 18" id="18"/>
           <p:cNvGrpSpPr/>
           <p:nvPr/>
         </p:nvGrpSpPr>
@@ -15544,7 +16958,7 @@
         </p:grpSpPr>
         <p:sp>
           <p:nvSpPr>
-            <p:cNvPr name="Freeform 15" id="15"/>
+            <p:cNvPr name="Freeform 19" id="19"/>
             <p:cNvSpPr/>
             <p:nvPr/>
           </p:nvSpPr>
@@ -15602,7 +17016,7 @@
       </p:grpSp>
       <p:grpSp>
         <p:nvGrpSpPr>
-          <p:cNvPr name="Group 16" id="16"/>
+          <p:cNvPr name="Group 20" id="20"/>
           <p:cNvGrpSpPr/>
           <p:nvPr/>
         </p:nvGrpSpPr>
@@ -15616,7 +17030,7 @@
         </p:grpSpPr>
         <p:sp>
           <p:nvSpPr>
-            <p:cNvPr name="Freeform 17" id="17"/>
+            <p:cNvPr name="Freeform 21" id="21"/>
             <p:cNvSpPr/>
             <p:nvPr/>
           </p:nvSpPr>
@@ -15668,7 +17082,7 @@
       </p:grpSp>
       <p:sp>
         <p:nvSpPr>
-          <p:cNvPr name="TextBox 18" id="18"/>
+          <p:cNvPr name="TextBox 22" id="22"/>
           <p:cNvSpPr txBox="true"/>
           <p:nvPr/>
         </p:nvSpPr>
@@ -15709,7 +17123,7 @@
       </p:sp>
       <p:sp>
         <p:nvSpPr>
-          <p:cNvPr name="TextBox 19" id="19"/>
+          <p:cNvPr name="TextBox 23" id="23"/>
           <p:cNvSpPr txBox="true"/>
           <p:nvPr/>
         </p:nvSpPr>
@@ -15769,7 +17183,7 @@
       </p:sp>
       <p:sp>
         <p:nvSpPr>
-          <p:cNvPr name="AutoShape 20" id="20"/>
+          <p:cNvPr name="AutoShape 24" id="24"/>
           <p:cNvSpPr/>
           <p:nvPr/>
         </p:nvSpPr>
@@ -15788,7 +17202,7 @@
       </p:sp>
       <p:grpSp>
         <p:nvGrpSpPr>
-          <p:cNvPr name="Group 21" id="21"/>
+          <p:cNvPr name="Group 25" id="25"/>
           <p:cNvGrpSpPr/>
           <p:nvPr/>
         </p:nvGrpSpPr>
@@ -15802,7 +17216,7 @@
         </p:grpSpPr>
         <p:sp>
           <p:nvSpPr>
-            <p:cNvPr name="Freeform 22" id="22"/>
+            <p:cNvPr name="Freeform 26" id="26"/>
             <p:cNvSpPr/>
             <p:nvPr/>
           </p:nvSpPr>
@@ -15860,7 +17274,7 @@
       </p:grpSp>
       <p:grpSp>
         <p:nvGrpSpPr>
-          <p:cNvPr name="Group 23" id="23"/>
+          <p:cNvPr name="Group 27" id="27"/>
           <p:cNvGrpSpPr/>
           <p:nvPr/>
         </p:nvGrpSpPr>
@@ -15874,7 +17288,7 @@
         </p:grpSpPr>
         <p:sp>
           <p:nvSpPr>
-            <p:cNvPr name="Freeform 24" id="24"/>
+            <p:cNvPr name="Freeform 28" id="28"/>
             <p:cNvSpPr/>
             <p:nvPr/>
           </p:nvSpPr>
@@ -15932,7 +17346,7 @@
       </p:grpSp>
       <p:grpSp>
         <p:nvGrpSpPr>
-          <p:cNvPr name="Group 25" id="25"/>
+          <p:cNvPr name="Group 29" id="29"/>
           <p:cNvGrpSpPr/>
           <p:nvPr/>
         </p:nvGrpSpPr>
@@ -15946,7 +17360,7 @@
         </p:grpSpPr>
         <p:sp>
           <p:nvSpPr>
-            <p:cNvPr name="Freeform 26" id="26"/>
+            <p:cNvPr name="Freeform 30" id="30"/>
             <p:cNvSpPr/>
             <p:nvPr/>
           </p:nvSpPr>
@@ -15998,7 +17412,7 @@
       </p:grpSp>
       <p:sp>
         <p:nvSpPr>
-          <p:cNvPr name="TextBox 27" id="27"/>
+          <p:cNvPr name="TextBox 31" id="31"/>
           <p:cNvSpPr txBox="true"/>
           <p:nvPr/>
         </p:nvSpPr>
@@ -16039,7 +17453,7 @@
       </p:sp>
       <p:sp>
         <p:nvSpPr>
-          <p:cNvPr name="TextBox 28" id="28"/>
+          <p:cNvPr name="TextBox 32" id="32"/>
           <p:cNvSpPr txBox="true"/>
           <p:nvPr/>
         </p:nvSpPr>
@@ -16099,7 +17513,7 @@
       </p:sp>
       <p:sp>
         <p:nvSpPr>
-          <p:cNvPr name="AutoShape 29" id="29"/>
+          <p:cNvPr name="AutoShape 33" id="33"/>
           <p:cNvSpPr/>
           <p:nvPr/>
         </p:nvSpPr>
@@ -16118,7 +17532,7 @@
       </p:sp>
       <p:grpSp>
         <p:nvGrpSpPr>
-          <p:cNvPr name="Group 30" id="30"/>
+          <p:cNvPr name="Group 34" id="34"/>
           <p:cNvGrpSpPr/>
           <p:nvPr/>
         </p:nvGrpSpPr>
@@ -16132,7 +17546,7 @@
         </p:grpSpPr>
         <p:sp>
           <p:nvSpPr>
-            <p:cNvPr name="Freeform 31" id="31"/>
+            <p:cNvPr name="Freeform 35" id="35"/>
             <p:cNvSpPr/>
             <p:nvPr/>
           </p:nvSpPr>
@@ -16190,7 +17604,7 @@
       </p:grpSp>
       <p:grpSp>
         <p:nvGrpSpPr>
-          <p:cNvPr name="Group 32" id="32"/>
+          <p:cNvPr name="Group 36" id="36"/>
           <p:cNvGrpSpPr/>
           <p:nvPr/>
         </p:nvGrpSpPr>
@@ -16204,7 +17618,7 @@
         </p:grpSpPr>
         <p:sp>
           <p:nvSpPr>
-            <p:cNvPr name="Freeform 33" id="33"/>
+            <p:cNvPr name="Freeform 37" id="37"/>
             <p:cNvSpPr/>
             <p:nvPr/>
           </p:nvSpPr>
@@ -16262,7 +17676,7 @@
       </p:grpSp>
       <p:grpSp>
         <p:nvGrpSpPr>
-          <p:cNvPr name="Group 34" id="34"/>
+          <p:cNvPr name="Group 38" id="38"/>
           <p:cNvGrpSpPr/>
           <p:nvPr/>
         </p:nvGrpSpPr>
@@ -16276,7 +17690,7 @@
         </p:grpSpPr>
         <p:sp>
           <p:nvSpPr>
-            <p:cNvPr name="Freeform 35" id="35"/>
+            <p:cNvPr name="Freeform 39" id="39"/>
             <p:cNvSpPr/>
             <p:nvPr/>
           </p:nvSpPr>
@@ -16328,7 +17742,7 @@
       </p:grpSp>
       <p:sp>
         <p:nvSpPr>
-          <p:cNvPr name="TextBox 36" id="36"/>
+          <p:cNvPr name="TextBox 40" id="40"/>
           <p:cNvSpPr txBox="true"/>
           <p:nvPr/>
         </p:nvSpPr>
@@ -16369,7 +17783,7 @@
       </p:sp>
       <p:sp>
         <p:nvSpPr>
-          <p:cNvPr name="TextBox 37" id="37"/>
+          <p:cNvPr name="TextBox 41" id="41"/>
           <p:cNvSpPr txBox="true"/>
           <p:nvPr/>
         </p:nvSpPr>
@@ -16429,7 +17843,7 @@
       </p:sp>
       <p:sp>
         <p:nvSpPr>
-          <p:cNvPr name="TextBox 38" id="38"/>
+          <p:cNvPr name="TextBox 42" id="42"/>
           <p:cNvSpPr txBox="true"/>
           <p:nvPr/>
         </p:nvSpPr>
@@ -16470,7 +17884,7 @@
       </p:sp>
       <p:sp>
         <p:nvSpPr>
-          <p:cNvPr name="AutoShape 39" id="39"/>
+          <p:cNvPr name="AutoShape 43" id="43"/>
           <p:cNvSpPr/>
           <p:nvPr/>
         </p:nvSpPr>
@@ -16597,9 +18011,174 @@
           </p:spPr>
         </p:sp>
       </p:grpSp>
-      <p:sp>
-        <p:nvSpPr>
-          <p:cNvPr name="Freeform 5" id="5"/>
+      <p:grpSp>
+        <p:nvGrpSpPr>
+          <p:cNvPr name="Group 5" id="5"/>
+          <p:cNvGrpSpPr/>
+          <p:nvPr/>
+        </p:nvGrpSpPr>
+        <p:grpSpPr>
+          <a:xfrm rot="0">
+            <a:off x="0" y="0"/>
+            <a:ext cx="12192000" cy="6858000"/>
+            <a:chOff x="0" y="0"/>
+            <a:chExt cx="16256000" cy="9144000"/>
+          </a:xfrm>
+        </p:grpSpPr>
+        <p:sp>
+          <p:nvSpPr>
+            <p:cNvPr name="Freeform 6" id="6"/>
+            <p:cNvSpPr/>
+            <p:nvPr/>
+          </p:nvSpPr>
+          <p:spPr>
+            <a:xfrm flipH="false" flipV="false" rot="0">
+              <a:off x="0" y="0"/>
+              <a:ext cx="16256000" cy="9144000"/>
+            </a:xfrm>
+            <a:custGeom>
+              <a:avLst/>
+              <a:gdLst/>
+              <a:ahLst/>
+              <a:cxnLst/>
+              <a:rect r="r" b="b" t="t" l="l"/>
+              <a:pathLst>
+                <a:path h="9144000" w="16256000">
+                  <a:moveTo>
+                    <a:pt x="0" y="0"/>
+                  </a:moveTo>
+                  <a:lnTo>
+                    <a:pt x="16256000" y="0"/>
+                  </a:lnTo>
+                  <a:lnTo>
+                    <a:pt x="16256000" y="9144000"/>
+                  </a:lnTo>
+                  <a:lnTo>
+                    <a:pt x="0" y="9144000"/>
+                  </a:lnTo>
+                  <a:lnTo>
+                    <a:pt x="0" y="0"/>
+                  </a:lnTo>
+                  <a:close/>
+                </a:path>
+              </a:pathLst>
+            </a:custGeom>
+            <a:blipFill>
+              <a:blip r:embed="rId4">
+                <a:extLst>
+                  <a:ext uri="{96DAC541-7B7A-43D3-8B79-37D633B846F1}">
+                    <asvg:svgBlip xmlns:asvg="http://schemas.microsoft.com/office/drawing/2016/SVG/main" r:embed="rId5"/>
+                  </a:ext>
+                </a:extLst>
+              </a:blip>
+              <a:stretch>
+                <a:fillRect l="0" t="0" r="0" b="0"/>
+              </a:stretch>
+            </a:blipFill>
+          </p:spPr>
+        </p:sp>
+        <p:sp>
+          <p:nvSpPr>
+            <p:cNvPr name="Freeform 7" id="7"/>
+            <p:cNvSpPr/>
+            <p:nvPr/>
+          </p:nvSpPr>
+          <p:spPr>
+            <a:xfrm flipH="false" flipV="false" rot="0">
+              <a:off x="11887200" y="0"/>
+              <a:ext cx="3556000" cy="803656"/>
+            </a:xfrm>
+            <a:custGeom>
+              <a:avLst/>
+              <a:gdLst/>
+              <a:ahLst/>
+              <a:cxnLst/>
+              <a:rect r="r" b="b" t="t" l="l"/>
+              <a:pathLst>
+                <a:path h="803656" w="3556000">
+                  <a:moveTo>
+                    <a:pt x="0" y="0"/>
+                  </a:moveTo>
+                  <a:lnTo>
+                    <a:pt x="3556000" y="0"/>
+                  </a:lnTo>
+                  <a:lnTo>
+                    <a:pt x="3556000" y="803656"/>
+                  </a:lnTo>
+                  <a:lnTo>
+                    <a:pt x="0" y="803656"/>
+                  </a:lnTo>
+                  <a:lnTo>
+                    <a:pt x="0" y="0"/>
+                  </a:lnTo>
+                  <a:close/>
+                </a:path>
+              </a:pathLst>
+            </a:custGeom>
+            <a:blipFill>
+              <a:blip r:embed="rId6"/>
+              <a:stretch>
+                <a:fillRect l="0" t="0" r="0" b="0"/>
+              </a:stretch>
+            </a:blipFill>
+          </p:spPr>
+        </p:sp>
+        <p:sp>
+          <p:nvSpPr>
+            <p:cNvPr name="Freeform 8" id="8"/>
+            <p:cNvSpPr/>
+            <p:nvPr/>
+          </p:nvSpPr>
+          <p:spPr>
+            <a:xfrm flipH="false" flipV="false" rot="0">
+              <a:off x="812800" y="127000"/>
+              <a:ext cx="2413000" cy="504536"/>
+            </a:xfrm>
+            <a:custGeom>
+              <a:avLst/>
+              <a:gdLst/>
+              <a:ahLst/>
+              <a:cxnLst/>
+              <a:rect r="r" b="b" t="t" l="l"/>
+              <a:pathLst>
+                <a:path h="504536" w="2413000">
+                  <a:moveTo>
+                    <a:pt x="0" y="0"/>
+                  </a:moveTo>
+                  <a:lnTo>
+                    <a:pt x="2413000" y="0"/>
+                  </a:lnTo>
+                  <a:lnTo>
+                    <a:pt x="2413000" y="504536"/>
+                  </a:lnTo>
+                  <a:lnTo>
+                    <a:pt x="0" y="504536"/>
+                  </a:lnTo>
+                  <a:lnTo>
+                    <a:pt x="0" y="0"/>
+                  </a:lnTo>
+                  <a:close/>
+                </a:path>
+              </a:pathLst>
+            </a:custGeom>
+            <a:blipFill>
+              <a:blip r:embed="rId7">
+                <a:extLst>
+                  <a:ext uri="{96DAC541-7B7A-43D3-8B79-37D633B846F1}">
+                    <asvg:svgBlip xmlns:asvg="http://schemas.microsoft.com/office/drawing/2016/SVG/main" r:embed="rId8"/>
+                  </a:ext>
+                </a:extLst>
+              </a:blip>
+              <a:stretch>
+                <a:fillRect l="0" t="0" r="0" b="0"/>
+              </a:stretch>
+            </a:blipFill>
+          </p:spPr>
+        </p:sp>
+      </p:grpSp>
+      <p:sp>
+        <p:nvSpPr>
+          <p:cNvPr name="Freeform 9" id="9"/>
           <p:cNvSpPr/>
           <p:nvPr/>
         </p:nvSpPr>
@@ -16636,10 +18215,10 @@
             </a:pathLst>
           </a:custGeom>
           <a:blipFill>
-            <a:blip r:embed="rId4">
+            <a:blip r:embed="rId9">
               <a:extLst>
                 <a:ext uri="{96DAC541-7B7A-43D3-8B79-37D633B846F1}">
-                  <asvg:svgBlip xmlns:asvg="http://schemas.microsoft.com/office/drawing/2016/SVG/main" r:embed="rId5"/>
+                  <asvg:svgBlip xmlns:asvg="http://schemas.microsoft.com/office/drawing/2016/SVG/main" r:embed="rId10"/>
                 </a:ext>
               </a:extLst>
             </a:blip>
@@ -16651,7 +18230,7 @@
       </p:sp>
       <p:sp>
         <p:nvSpPr>
-          <p:cNvPr name="AutoShape 6" id="6"/>
+          <p:cNvPr name="AutoShape 10" id="10"/>
           <p:cNvSpPr/>
           <p:nvPr/>
         </p:nvSpPr>
@@ -16675,7 +18254,7 @@
       </p:sp>
       <p:grpSp>
         <p:nvGrpSpPr>
-          <p:cNvPr name="Group 7" id="7"/>
+          <p:cNvPr name="Group 11" id="11"/>
           <p:cNvGrpSpPr/>
           <p:nvPr/>
         </p:nvGrpSpPr>
@@ -16689,7 +18268,7 @@
         </p:grpSpPr>
         <p:sp>
           <p:nvSpPr>
-            <p:cNvPr name="Freeform 8" id="8"/>
+            <p:cNvPr name="Freeform 12" id="12"/>
             <p:cNvSpPr/>
             <p:nvPr/>
           </p:nvSpPr>
@@ -16772,7 +18351,7 @@
         </p:sp>
         <p:sp>
           <p:nvSpPr>
-            <p:cNvPr name="TextBox 9" id="9"/>
+            <p:cNvPr name="TextBox 13" id="13"/>
             <p:cNvSpPr txBox="true"/>
             <p:nvPr/>
           </p:nvSpPr>
@@ -16800,7 +18379,7 @@
       </p:grpSp>
       <p:grpSp>
         <p:nvGrpSpPr>
-          <p:cNvPr name="Group 10" id="10"/>
+          <p:cNvPr name="Group 14" id="14"/>
           <p:cNvGrpSpPr/>
           <p:nvPr/>
         </p:nvGrpSpPr>
@@ -16814,7 +18393,7 @@
         </p:grpSpPr>
         <p:sp>
           <p:nvSpPr>
-            <p:cNvPr name="Freeform 11" id="11"/>
+            <p:cNvPr name="Freeform 15" id="15"/>
             <p:cNvSpPr/>
             <p:nvPr/>
           </p:nvSpPr>
@@ -16897,7 +18476,7 @@
         </p:sp>
         <p:sp>
           <p:nvSpPr>
-            <p:cNvPr name="TextBox 12" id="12"/>
+            <p:cNvPr name="TextBox 16" id="16"/>
             <p:cNvSpPr txBox="true"/>
             <p:nvPr/>
           </p:nvSpPr>
@@ -16925,7 +18504,7 @@
       </p:grpSp>
       <p:grpSp>
         <p:nvGrpSpPr>
-          <p:cNvPr name="Group 13" id="13"/>
+          <p:cNvPr name="Group 17" id="17"/>
           <p:cNvGrpSpPr/>
           <p:nvPr/>
         </p:nvGrpSpPr>
@@ -16939,7 +18518,7 @@
         </p:grpSpPr>
         <p:sp>
           <p:nvSpPr>
-            <p:cNvPr name="Freeform 14" id="14"/>
+            <p:cNvPr name="Freeform 18" id="18"/>
             <p:cNvSpPr/>
             <p:nvPr/>
           </p:nvSpPr>
@@ -17022,7 +18601,7 @@
         </p:sp>
         <p:sp>
           <p:nvSpPr>
-            <p:cNvPr name="TextBox 15" id="15"/>
+            <p:cNvPr name="TextBox 19" id="19"/>
             <p:cNvSpPr txBox="true"/>
             <p:nvPr/>
           </p:nvSpPr>
@@ -17050,7 +18629,7 @@
       </p:grpSp>
       <p:sp>
         <p:nvSpPr>
-          <p:cNvPr name="TextBox 16" id="16"/>
+          <p:cNvPr name="TextBox 20" id="20"/>
           <p:cNvSpPr txBox="true"/>
           <p:nvPr/>
         </p:nvSpPr>
@@ -17091,7 +18670,7 @@
       </p:sp>
       <p:sp>
         <p:nvSpPr>
-          <p:cNvPr name="TextBox 17" id="17"/>
+          <p:cNvPr name="TextBox 21" id="21"/>
           <p:cNvSpPr txBox="true"/>
           <p:nvPr/>
         </p:nvSpPr>
@@ -17132,7 +18711,7 @@
       </p:sp>
       <p:sp>
         <p:nvSpPr>
-          <p:cNvPr name="TextBox 18" id="18"/>
+          <p:cNvPr name="TextBox 22" id="22"/>
           <p:cNvSpPr txBox="true"/>
           <p:nvPr/>
         </p:nvSpPr>
@@ -17173,7 +18752,7 @@
       </p:sp>
       <p:sp>
         <p:nvSpPr>
-          <p:cNvPr name="TextBox 19" id="19"/>
+          <p:cNvPr name="TextBox 23" id="23"/>
           <p:cNvSpPr txBox="true"/>
           <p:nvPr/>
         </p:nvSpPr>
@@ -17217,7 +18796,7 @@
       </p:sp>
       <p:sp>
         <p:nvSpPr>
-          <p:cNvPr name="TextBox 20" id="20"/>
+          <p:cNvPr name="TextBox 24" id="24"/>
           <p:cNvSpPr txBox="true"/>
           <p:nvPr/>
         </p:nvSpPr>
@@ -17280,7 +18859,7 @@
       </p:sp>
       <p:sp>
         <p:nvSpPr>
-          <p:cNvPr name="TextBox 21" id="21"/>
+          <p:cNvPr name="TextBox 25" id="25"/>
           <p:cNvSpPr txBox="true"/>
           <p:nvPr/>
         </p:nvSpPr>
@@ -17324,7 +18903,7 @@
       </p:sp>
       <p:sp>
         <p:nvSpPr>
-          <p:cNvPr name="TextBox 22" id="22"/>
+          <p:cNvPr name="TextBox 26" id="26"/>
           <p:cNvSpPr txBox="true"/>
           <p:nvPr/>
         </p:nvSpPr>
@@ -17387,7 +18966,7 @@
       </p:sp>
       <p:sp>
         <p:nvSpPr>
-          <p:cNvPr name="TextBox 23" id="23"/>
+          <p:cNvPr name="TextBox 27" id="27"/>
           <p:cNvSpPr txBox="true"/>
           <p:nvPr/>
         </p:nvSpPr>
@@ -17534,9 +19113,174 @@
           </p:spPr>
         </p:sp>
       </p:grpSp>
-      <p:sp>
-        <p:nvSpPr>
-          <p:cNvPr name="TextBox 5" id="5"/>
+      <p:grpSp>
+        <p:nvGrpSpPr>
+          <p:cNvPr name="Group 5" id="5"/>
+          <p:cNvGrpSpPr/>
+          <p:nvPr/>
+        </p:nvGrpSpPr>
+        <p:grpSpPr>
+          <a:xfrm rot="0">
+            <a:off x="0" y="0"/>
+            <a:ext cx="12192000" cy="6858000"/>
+            <a:chOff x="0" y="0"/>
+            <a:chExt cx="16256000" cy="9144000"/>
+          </a:xfrm>
+        </p:grpSpPr>
+        <p:sp>
+          <p:nvSpPr>
+            <p:cNvPr name="Freeform 6" id="6"/>
+            <p:cNvSpPr/>
+            <p:nvPr/>
+          </p:nvSpPr>
+          <p:spPr>
+            <a:xfrm flipH="false" flipV="false" rot="0">
+              <a:off x="0" y="0"/>
+              <a:ext cx="16256000" cy="9144000"/>
+            </a:xfrm>
+            <a:custGeom>
+              <a:avLst/>
+              <a:gdLst/>
+              <a:ahLst/>
+              <a:cxnLst/>
+              <a:rect r="r" b="b" t="t" l="l"/>
+              <a:pathLst>
+                <a:path h="9144000" w="16256000">
+                  <a:moveTo>
+                    <a:pt x="0" y="0"/>
+                  </a:moveTo>
+                  <a:lnTo>
+                    <a:pt x="16256000" y="0"/>
+                  </a:lnTo>
+                  <a:lnTo>
+                    <a:pt x="16256000" y="9144000"/>
+                  </a:lnTo>
+                  <a:lnTo>
+                    <a:pt x="0" y="9144000"/>
+                  </a:lnTo>
+                  <a:lnTo>
+                    <a:pt x="0" y="0"/>
+                  </a:lnTo>
+                  <a:close/>
+                </a:path>
+              </a:pathLst>
+            </a:custGeom>
+            <a:blipFill>
+              <a:blip r:embed="rId4">
+                <a:extLst>
+                  <a:ext uri="{96DAC541-7B7A-43D3-8B79-37D633B846F1}">
+                    <asvg:svgBlip xmlns:asvg="http://schemas.microsoft.com/office/drawing/2016/SVG/main" r:embed="rId5"/>
+                  </a:ext>
+                </a:extLst>
+              </a:blip>
+              <a:stretch>
+                <a:fillRect l="0" t="0" r="0" b="0"/>
+              </a:stretch>
+            </a:blipFill>
+          </p:spPr>
+        </p:sp>
+        <p:sp>
+          <p:nvSpPr>
+            <p:cNvPr name="Freeform 7" id="7"/>
+            <p:cNvSpPr/>
+            <p:nvPr/>
+          </p:nvSpPr>
+          <p:spPr>
+            <a:xfrm flipH="false" flipV="false" rot="0">
+              <a:off x="11887200" y="0"/>
+              <a:ext cx="3556000" cy="803656"/>
+            </a:xfrm>
+            <a:custGeom>
+              <a:avLst/>
+              <a:gdLst/>
+              <a:ahLst/>
+              <a:cxnLst/>
+              <a:rect r="r" b="b" t="t" l="l"/>
+              <a:pathLst>
+                <a:path h="803656" w="3556000">
+                  <a:moveTo>
+                    <a:pt x="0" y="0"/>
+                  </a:moveTo>
+                  <a:lnTo>
+                    <a:pt x="3556000" y="0"/>
+                  </a:lnTo>
+                  <a:lnTo>
+                    <a:pt x="3556000" y="803656"/>
+                  </a:lnTo>
+                  <a:lnTo>
+                    <a:pt x="0" y="803656"/>
+                  </a:lnTo>
+                  <a:lnTo>
+                    <a:pt x="0" y="0"/>
+                  </a:lnTo>
+                  <a:close/>
+                </a:path>
+              </a:pathLst>
+            </a:custGeom>
+            <a:blipFill>
+              <a:blip r:embed="rId6"/>
+              <a:stretch>
+                <a:fillRect l="0" t="0" r="0" b="0"/>
+              </a:stretch>
+            </a:blipFill>
+          </p:spPr>
+        </p:sp>
+        <p:sp>
+          <p:nvSpPr>
+            <p:cNvPr name="Freeform 8" id="8"/>
+            <p:cNvSpPr/>
+            <p:nvPr/>
+          </p:nvSpPr>
+          <p:spPr>
+            <a:xfrm flipH="false" flipV="false" rot="0">
+              <a:off x="812800" y="127000"/>
+              <a:ext cx="2413000" cy="504536"/>
+            </a:xfrm>
+            <a:custGeom>
+              <a:avLst/>
+              <a:gdLst/>
+              <a:ahLst/>
+              <a:cxnLst/>
+              <a:rect r="r" b="b" t="t" l="l"/>
+              <a:pathLst>
+                <a:path h="504536" w="2413000">
+                  <a:moveTo>
+                    <a:pt x="0" y="0"/>
+                  </a:moveTo>
+                  <a:lnTo>
+                    <a:pt x="2413000" y="0"/>
+                  </a:lnTo>
+                  <a:lnTo>
+                    <a:pt x="2413000" y="504536"/>
+                  </a:lnTo>
+                  <a:lnTo>
+                    <a:pt x="0" y="504536"/>
+                  </a:lnTo>
+                  <a:lnTo>
+                    <a:pt x="0" y="0"/>
+                  </a:lnTo>
+                  <a:close/>
+                </a:path>
+              </a:pathLst>
+            </a:custGeom>
+            <a:blipFill>
+              <a:blip r:embed="rId7">
+                <a:extLst>
+                  <a:ext uri="{96DAC541-7B7A-43D3-8B79-37D633B846F1}">
+                    <asvg:svgBlip xmlns:asvg="http://schemas.microsoft.com/office/drawing/2016/SVG/main" r:embed="rId8"/>
+                  </a:ext>
+                </a:extLst>
+              </a:blip>
+              <a:stretch>
+                <a:fillRect l="0" t="0" r="0" b="0"/>
+              </a:stretch>
+            </a:blipFill>
+          </p:spPr>
+        </p:sp>
+      </p:grpSp>
+      <p:sp>
+        <p:nvSpPr>
+          <p:cNvPr name="TextBox 9" id="9"/>
           <p:cNvSpPr txBox="true"/>
           <p:nvPr/>
         </p:nvSpPr>
@@ -17577,7 +19321,7 @@
       </p:sp>
       <p:sp>
         <p:nvSpPr>
-          <p:cNvPr name="TextBox 6" id="6"/>
+          <p:cNvPr name="TextBox 10" id="10"/>
           <p:cNvSpPr txBox="true"/>
           <p:nvPr/>
         </p:nvSpPr>
@@ -17618,7 +19362,7 @@
       </p:sp>
       <p:grpSp>
         <p:nvGrpSpPr>
-          <p:cNvPr name="Group 7" id="7"/>
+          <p:cNvPr name="Group 11" id="11"/>
           <p:cNvGrpSpPr/>
           <p:nvPr/>
         </p:nvGrpSpPr>
@@ -17632,7 +19376,7 @@
         </p:grpSpPr>
         <p:sp>
           <p:nvSpPr>
-            <p:cNvPr name="Freeform 8" id="8"/>
+            <p:cNvPr name="Freeform 12" id="12"/>
             <p:cNvSpPr/>
             <p:nvPr/>
           </p:nvSpPr>
@@ -17669,7 +19413,7 @@
               </a:pathLst>
             </a:custGeom>
             <a:blipFill>
-              <a:blip r:embed="rId4"/>
+              <a:blip r:embed="rId9"/>
               <a:stretch>
                 <a:fillRect l="0" t="283" r="0" b="283"/>
               </a:stretch>
@@ -17679,7 +19423,7 @@
       </p:grpSp>
       <p:sp>
         <p:nvSpPr>
-          <p:cNvPr name="AutoShape 9" id="9"/>
+          <p:cNvPr name="AutoShape 13" id="13"/>
           <p:cNvSpPr/>
           <p:nvPr/>
         </p:nvSpPr>
@@ -17698,7 +19442,7 @@
       </p:sp>
       <p:sp>
         <p:nvSpPr>
-          <p:cNvPr name="TextBox 10" id="10"/>
+          <p:cNvPr name="TextBox 14" id="14"/>
           <p:cNvSpPr txBox="true"/>
           <p:nvPr/>
         </p:nvSpPr>
@@ -17739,7 +19483,7 @@
       </p:sp>
       <p:sp>
         <p:nvSpPr>
-          <p:cNvPr name="TextBox 11" id="11"/>
+          <p:cNvPr name="TextBox 15" id="15"/>
           <p:cNvSpPr txBox="true"/>
           <p:nvPr/>
         </p:nvSpPr>
@@ -17780,7 +19524,7 @@
       </p:sp>
       <p:sp>
         <p:nvSpPr>
-          <p:cNvPr name="TextBox 12" id="12"/>
+          <p:cNvPr name="TextBox 16" id="16"/>
           <p:cNvSpPr txBox="true"/>
           <p:nvPr/>
         </p:nvSpPr>
@@ -17840,7 +19584,7 @@
       </p:sp>
       <p:sp>
         <p:nvSpPr>
-          <p:cNvPr name="AutoShape 13" id="13"/>
+          <p:cNvPr name="AutoShape 17" id="17"/>
           <p:cNvSpPr/>
           <p:nvPr/>
         </p:nvSpPr>
@@ -17859,7 +19603,7 @@
       </p:sp>
       <p:grpSp>
         <p:nvGrpSpPr>
-          <p:cNvPr name="Group 14" id="14"/>
+          <p:cNvPr name="Group 18" id="18"/>
           <p:cNvGrpSpPr/>
           <p:nvPr/>
         </p:nvGrpSpPr>
@@ -17873,7 +19617,7 @@
         </p:grpSpPr>
         <p:sp>
           <p:nvSpPr>
-            <p:cNvPr name="Freeform 15" id="15"/>
+            <p:cNvPr name="Freeform 19" id="19"/>
             <p:cNvSpPr/>
             <p:nvPr/>
           </p:nvSpPr>
@@ -17931,7 +19675,7 @@
       </p:grpSp>
       <p:grpSp>
         <p:nvGrpSpPr>
-          <p:cNvPr name="Group 16" id="16"/>
+          <p:cNvPr name="Group 20" id="20"/>
           <p:cNvGrpSpPr/>
           <p:nvPr/>
         </p:nvGrpSpPr>
@@ -17945,7 +19689,7 @@
         </p:grpSpPr>
         <p:sp>
           <p:nvSpPr>
-            <p:cNvPr name="Freeform 17" id="17"/>
+            <p:cNvPr name="Freeform 21" id="21"/>
             <p:cNvSpPr/>
             <p:nvPr/>
           </p:nvSpPr>
@@ -18003,7 +19747,7 @@
       </p:grpSp>
       <p:sp>
         <p:nvSpPr>
-          <p:cNvPr name="AutoShape 18" id="18"/>
+          <p:cNvPr name="AutoShape 22" id="22"/>
           <p:cNvSpPr/>
           <p:nvPr/>
         </p:nvSpPr>
@@ -18022,7 +19766,7 @@
       </p:sp>
       <p:sp>
         <p:nvSpPr>
-          <p:cNvPr name="TextBox 19" id="19"/>
+          <p:cNvPr name="TextBox 23" id="23"/>
           <p:cNvSpPr txBox="true"/>
           <p:nvPr/>
         </p:nvSpPr>
@@ -18063,7 +19807,7 @@
       </p:sp>
       <p:sp>
         <p:nvSpPr>
-          <p:cNvPr name="TextBox 20" id="20"/>
+          <p:cNvPr name="TextBox 24" id="24"/>
           <p:cNvSpPr txBox="true"/>
           <p:nvPr/>
         </p:nvSpPr>
@@ -18104,7 +19848,7 @@
       </p:sp>
       <p:sp>
         <p:nvSpPr>
-          <p:cNvPr name="TextBox 21" id="21"/>
+          <p:cNvPr name="TextBox 25" id="25"/>
           <p:cNvSpPr txBox="true"/>
           <p:nvPr/>
         </p:nvSpPr>
@@ -18145,7 +19889,7 @@
       </p:sp>
       <p:sp>
         <p:nvSpPr>
-          <p:cNvPr name="AutoShape 22" id="22"/>
+          <p:cNvPr name="AutoShape 26" id="26"/>
           <p:cNvSpPr/>
           <p:nvPr/>
         </p:nvSpPr>
@@ -18164,7 +19908,7 @@
       </p:sp>
       <p:grpSp>
         <p:nvGrpSpPr>
-          <p:cNvPr name="Group 23" id="23"/>
+          <p:cNvPr name="Group 27" id="27"/>
           <p:cNvGrpSpPr/>
           <p:nvPr/>
         </p:nvGrpSpPr>
@@ -18178,7 +19922,7 @@
         </p:grpSpPr>
         <p:sp>
           <p:nvSpPr>
-            <p:cNvPr name="Freeform 24" id="24"/>
+            <p:cNvPr name="Freeform 28" id="28"/>
             <p:cNvSpPr/>
             <p:nvPr/>
           </p:nvSpPr>
@@ -18236,7 +19980,7 @@
       </p:grpSp>
       <p:grpSp>
         <p:nvGrpSpPr>
-          <p:cNvPr name="Group 25" id="25"/>
+          <p:cNvPr name="Group 29" id="29"/>
           <p:cNvGrpSpPr/>
           <p:nvPr/>
         </p:nvGrpSpPr>
@@ -18250,7 +19994,7 @@
         </p:grpSpPr>
         <p:sp>
           <p:nvSpPr>
-            <p:cNvPr name="Freeform 26" id="26"/>
+            <p:cNvPr name="Freeform 30" id="30"/>
             <p:cNvSpPr/>
             <p:nvPr/>
           </p:nvSpPr>
@@ -18308,7 +20052,7 @@
       </p:grpSp>
       <p:sp>
         <p:nvSpPr>
-          <p:cNvPr name="AutoShape 27" id="27"/>
+          <p:cNvPr name="AutoShape 31" id="31"/>
           <p:cNvSpPr/>
           <p:nvPr/>
         </p:nvSpPr>
@@ -18327,7 +20071,7 @@
       </p:sp>
       <p:sp>
         <p:nvSpPr>
-          <p:cNvPr name="TextBox 28" id="28"/>
+          <p:cNvPr name="TextBox 32" id="32"/>
           <p:cNvSpPr txBox="true"/>
           <p:nvPr/>
         </p:nvSpPr>
@@ -18368,7 +20112,7 @@
       </p:sp>
       <p:sp>
         <p:nvSpPr>
-          <p:cNvPr name="TextBox 29" id="29"/>
+          <p:cNvPr name="TextBox 33" id="33"/>
           <p:cNvSpPr txBox="true"/>
           <p:nvPr/>
         </p:nvSpPr>
@@ -18409,7 +20153,7 @@
       </p:sp>
       <p:sp>
         <p:nvSpPr>
-          <p:cNvPr name="TextBox 30" id="30"/>
+          <p:cNvPr name="TextBox 34" id="34"/>
           <p:cNvSpPr txBox="true"/>
           <p:nvPr/>
         </p:nvSpPr>
@@ -18450,7 +20194,7 @@
       </p:sp>
       <p:sp>
         <p:nvSpPr>
-          <p:cNvPr name="TextBox 31" id="31"/>
+          <p:cNvPr name="TextBox 35" id="35"/>
           <p:cNvSpPr txBox="true"/>
           <p:nvPr/>
         </p:nvSpPr>
@@ -18491,7 +20235,7 @@
       </p:sp>
       <p:sp>
         <p:nvSpPr>
-          <p:cNvPr name="TextBox 32" id="32"/>
+          <p:cNvPr name="TextBox 36" id="36"/>
           <p:cNvSpPr txBox="true"/>
           <p:nvPr/>
         </p:nvSpPr>
@@ -18524,7 +20268,7 @@
                 <a:ea typeface="DM Sans"/>
                 <a:cs typeface="DM Sans"/>
                 <a:sym typeface="DM Sans"/>
-                <a:hlinkClick r:id="rId5" tooltip="https://www.khanacademy.org/math/algebra/x2f8bb11595b61c86:quadratics-multiplying-factoring/x2f8bb11595b61c86:factor-quadratics-intro/v/factoring-simple-quadratic-expression"/>
+                <a:hlinkClick r:id="rId10" tooltip="https://www.khanacademy.org/math/algebra/x2f8bb11595b61c86:quadratics-multiplying-factoring/x2f8bb11595b61c86:factor-quadratics-intro/v/factoring-simple-quadratic-expression"/>
               </a:rPr>
               <a:t>Khan Academy: factoring quadratics</a:t>
             </a:r>
@@ -18533,7 +20277,7 @@
       </p:sp>
       <p:sp>
         <p:nvSpPr>
-          <p:cNvPr name="AutoShape 33" id="33"/>
+          <p:cNvPr name="AutoShape 37" id="37"/>
           <p:cNvSpPr/>
           <p:nvPr/>
         </p:nvSpPr>
@@ -18660,9 +20404,174 @@
           </p:spPr>
         </p:sp>
       </p:grpSp>
-      <p:sp>
-        <p:nvSpPr>
-          <p:cNvPr name="TextBox 5" id="5"/>
+      <p:grpSp>
+        <p:nvGrpSpPr>
+          <p:cNvPr name="Group 5" id="5"/>
+          <p:cNvGrpSpPr/>
+          <p:nvPr/>
+        </p:nvGrpSpPr>
+        <p:grpSpPr>
+          <a:xfrm rot="0">
+            <a:off x="0" y="0"/>
+            <a:ext cx="12192000" cy="6858000"/>
+            <a:chOff x="0" y="0"/>
+            <a:chExt cx="16256000" cy="9144000"/>
+          </a:xfrm>
+        </p:grpSpPr>
+        <p:sp>
+          <p:nvSpPr>
+            <p:cNvPr name="Freeform 6" id="6"/>
+            <p:cNvSpPr/>
+            <p:nvPr/>
+          </p:nvSpPr>
+          <p:spPr>
+            <a:xfrm flipH="false" flipV="false" rot="0">
+              <a:off x="0" y="0"/>
+              <a:ext cx="16256000" cy="9144000"/>
+            </a:xfrm>
+            <a:custGeom>
+              <a:avLst/>
+              <a:gdLst/>
+              <a:ahLst/>
+              <a:cxnLst/>
+              <a:rect r="r" b="b" t="t" l="l"/>
+              <a:pathLst>
+                <a:path h="9144000" w="16256000">
+                  <a:moveTo>
+                    <a:pt x="0" y="0"/>
+                  </a:moveTo>
+                  <a:lnTo>
+                    <a:pt x="16256000" y="0"/>
+                  </a:lnTo>
+                  <a:lnTo>
+                    <a:pt x="16256000" y="9144000"/>
+                  </a:lnTo>
+                  <a:lnTo>
+                    <a:pt x="0" y="9144000"/>
+                  </a:lnTo>
+                  <a:lnTo>
+                    <a:pt x="0" y="0"/>
+                  </a:lnTo>
+                  <a:close/>
+                </a:path>
+              </a:pathLst>
+            </a:custGeom>
+            <a:blipFill>
+              <a:blip r:embed="rId4">
+                <a:extLst>
+                  <a:ext uri="{96DAC541-7B7A-43D3-8B79-37D633B846F1}">
+                    <asvg:svgBlip xmlns:asvg="http://schemas.microsoft.com/office/drawing/2016/SVG/main" r:embed="rId5"/>
+                  </a:ext>
+                </a:extLst>
+              </a:blip>
+              <a:stretch>
+                <a:fillRect l="0" t="0" r="0" b="0"/>
+              </a:stretch>
+            </a:blipFill>
+          </p:spPr>
+        </p:sp>
+        <p:sp>
+          <p:nvSpPr>
+            <p:cNvPr name="Freeform 7" id="7"/>
+            <p:cNvSpPr/>
+            <p:nvPr/>
+          </p:nvSpPr>
+          <p:spPr>
+            <a:xfrm flipH="false" flipV="false" rot="0">
+              <a:off x="11887200" y="0"/>
+              <a:ext cx="3556000" cy="803656"/>
+            </a:xfrm>
+            <a:custGeom>
+              <a:avLst/>
+              <a:gdLst/>
+              <a:ahLst/>
+              <a:cxnLst/>
+              <a:rect r="r" b="b" t="t" l="l"/>
+              <a:pathLst>
+                <a:path h="803656" w="3556000">
+                  <a:moveTo>
+                    <a:pt x="0" y="0"/>
+                  </a:moveTo>
+                  <a:lnTo>
+                    <a:pt x="3556000" y="0"/>
+                  </a:lnTo>
+                  <a:lnTo>
+                    <a:pt x="3556000" y="803656"/>
+                  </a:lnTo>
+                  <a:lnTo>
+                    <a:pt x="0" y="803656"/>
+                  </a:lnTo>
+                  <a:lnTo>
+                    <a:pt x="0" y="0"/>
+                  </a:lnTo>
+                  <a:close/>
+                </a:path>
+              </a:pathLst>
+            </a:custGeom>
+            <a:blipFill>
+              <a:blip r:embed="rId6"/>
+              <a:stretch>
+                <a:fillRect l="0" t="0" r="0" b="0"/>
+              </a:stretch>
+            </a:blipFill>
+          </p:spPr>
+        </p:sp>
+        <p:sp>
+          <p:nvSpPr>
+            <p:cNvPr name="Freeform 8" id="8"/>
+            <p:cNvSpPr/>
+            <p:nvPr/>
+          </p:nvSpPr>
+          <p:spPr>
+            <a:xfrm flipH="false" flipV="false" rot="0">
+              <a:off x="812800" y="127000"/>
+              <a:ext cx="2413000" cy="504536"/>
+            </a:xfrm>
+            <a:custGeom>
+              <a:avLst/>
+              <a:gdLst/>
+              <a:ahLst/>
+              <a:cxnLst/>
+              <a:rect r="r" b="b" t="t" l="l"/>
+              <a:pathLst>
+                <a:path h="504536" w="2413000">
+                  <a:moveTo>
+                    <a:pt x="0" y="0"/>
+                  </a:moveTo>
+                  <a:lnTo>
+                    <a:pt x="2413000" y="0"/>
+                  </a:lnTo>
+                  <a:lnTo>
+                    <a:pt x="2413000" y="504536"/>
+                  </a:lnTo>
+                  <a:lnTo>
+                    <a:pt x="0" y="504536"/>
+                  </a:lnTo>
+                  <a:lnTo>
+                    <a:pt x="0" y="0"/>
+                  </a:lnTo>
+                  <a:close/>
+                </a:path>
+              </a:pathLst>
+            </a:custGeom>
+            <a:blipFill>
+              <a:blip r:embed="rId7">
+                <a:extLst>
+                  <a:ext uri="{96DAC541-7B7A-43D3-8B79-37D633B846F1}">
+                    <asvg:svgBlip xmlns:asvg="http://schemas.microsoft.com/office/drawing/2016/SVG/main" r:embed="rId8"/>
+                  </a:ext>
+                </a:extLst>
+              </a:blip>
+              <a:stretch>
+                <a:fillRect l="0" t="0" r="0" b="0"/>
+              </a:stretch>
+            </a:blipFill>
+          </p:spPr>
+        </p:sp>
+      </p:grpSp>
+      <p:sp>
+        <p:nvSpPr>
+          <p:cNvPr name="TextBox 9" id="9"/>
           <p:cNvSpPr txBox="true"/>
           <p:nvPr/>
         </p:nvSpPr>
@@ -18703,7 +20612,7 @@
       </p:sp>
       <p:sp>
         <p:nvSpPr>
-          <p:cNvPr name="TextBox 6" id="6"/>
+          <p:cNvPr name="TextBox 10" id="10"/>
           <p:cNvSpPr txBox="true"/>
           <p:nvPr/>
         </p:nvSpPr>
@@ -18744,7 +20653,7 @@
       </p:sp>
       <p:sp>
         <p:nvSpPr>
-          <p:cNvPr name="TextBox 7" id="7"/>
+          <p:cNvPr name="TextBox 11" id="11"/>
           <p:cNvSpPr txBox="true"/>
           <p:nvPr/>
         </p:nvSpPr>
@@ -18785,7 +20694,7 @@
       </p:sp>
       <p:sp>
         <p:nvSpPr>
-          <p:cNvPr name="TextBox 8" id="8"/>
+          <p:cNvPr name="TextBox 12" id="12"/>
           <p:cNvSpPr txBox="true"/>
           <p:nvPr/>
         </p:nvSpPr>
@@ -18826,7 +20735,7 @@
       </p:sp>
       <p:sp>
         <p:nvSpPr>
-          <p:cNvPr name="TextBox 9" id="9"/>
+          <p:cNvPr name="TextBox 13" id="13"/>
           <p:cNvSpPr txBox="true"/>
           <p:nvPr/>
         </p:nvSpPr>
@@ -18867,7 +20776,7 @@
       </p:sp>
       <p:sp>
         <p:nvSpPr>
-          <p:cNvPr name="TextBox 10" id="10"/>
+          <p:cNvPr name="TextBox 14" id="14"/>
           <p:cNvSpPr txBox="true"/>
           <p:nvPr/>
         </p:nvSpPr>
@@ -18908,7 +20817,7 @@
       </p:sp>
       <p:sp>
         <p:nvSpPr>
-          <p:cNvPr name="AutoShape 11" id="11"/>
+          <p:cNvPr name="AutoShape 15" id="15"/>
           <p:cNvSpPr/>
           <p:nvPr/>
         </p:nvSpPr>
@@ -19043,6 +20952,171 @@
         </p:nvGrpSpPr>
         <p:grpSpPr>
           <a:xfrm rot="0">
+            <a:off x="0" y="0"/>
+            <a:ext cx="12192000" cy="6858000"/>
+            <a:chOff x="0" y="0"/>
+            <a:chExt cx="16256000" cy="9144000"/>
+          </a:xfrm>
+        </p:grpSpPr>
+        <p:sp>
+          <p:nvSpPr>
+            <p:cNvPr name="Freeform 6" id="6"/>
+            <p:cNvSpPr/>
+            <p:nvPr/>
+          </p:nvSpPr>
+          <p:spPr>
+            <a:xfrm flipH="false" flipV="false" rot="0">
+              <a:off x="0" y="0"/>
+              <a:ext cx="16256000" cy="9144000"/>
+            </a:xfrm>
+            <a:custGeom>
+              <a:avLst/>
+              <a:gdLst/>
+              <a:ahLst/>
+              <a:cxnLst/>
+              <a:rect r="r" b="b" t="t" l="l"/>
+              <a:pathLst>
+                <a:path h="9144000" w="16256000">
+                  <a:moveTo>
+                    <a:pt x="0" y="0"/>
+                  </a:moveTo>
+                  <a:lnTo>
+                    <a:pt x="16256000" y="0"/>
+                  </a:lnTo>
+                  <a:lnTo>
+                    <a:pt x="16256000" y="9144000"/>
+                  </a:lnTo>
+                  <a:lnTo>
+                    <a:pt x="0" y="9144000"/>
+                  </a:lnTo>
+                  <a:lnTo>
+                    <a:pt x="0" y="0"/>
+                  </a:lnTo>
+                  <a:close/>
+                </a:path>
+              </a:pathLst>
+            </a:custGeom>
+            <a:blipFill>
+              <a:blip r:embed="rId4">
+                <a:extLst>
+                  <a:ext uri="{96DAC541-7B7A-43D3-8B79-37D633B846F1}">
+                    <asvg:svgBlip xmlns:asvg="http://schemas.microsoft.com/office/drawing/2016/SVG/main" r:embed="rId5"/>
+                  </a:ext>
+                </a:extLst>
+              </a:blip>
+              <a:stretch>
+                <a:fillRect l="0" t="0" r="0" b="0"/>
+              </a:stretch>
+            </a:blipFill>
+          </p:spPr>
+        </p:sp>
+        <p:sp>
+          <p:nvSpPr>
+            <p:cNvPr name="Freeform 7" id="7"/>
+            <p:cNvSpPr/>
+            <p:nvPr/>
+          </p:nvSpPr>
+          <p:spPr>
+            <a:xfrm flipH="false" flipV="false" rot="0">
+              <a:off x="11887200" y="0"/>
+              <a:ext cx="3556000" cy="803656"/>
+            </a:xfrm>
+            <a:custGeom>
+              <a:avLst/>
+              <a:gdLst/>
+              <a:ahLst/>
+              <a:cxnLst/>
+              <a:rect r="r" b="b" t="t" l="l"/>
+              <a:pathLst>
+                <a:path h="803656" w="3556000">
+                  <a:moveTo>
+                    <a:pt x="0" y="0"/>
+                  </a:moveTo>
+                  <a:lnTo>
+                    <a:pt x="3556000" y="0"/>
+                  </a:lnTo>
+                  <a:lnTo>
+                    <a:pt x="3556000" y="803656"/>
+                  </a:lnTo>
+                  <a:lnTo>
+                    <a:pt x="0" y="803656"/>
+                  </a:lnTo>
+                  <a:lnTo>
+                    <a:pt x="0" y="0"/>
+                  </a:lnTo>
+                  <a:close/>
+                </a:path>
+              </a:pathLst>
+            </a:custGeom>
+            <a:blipFill>
+              <a:blip r:embed="rId6"/>
+              <a:stretch>
+                <a:fillRect l="0" t="0" r="0" b="0"/>
+              </a:stretch>
+            </a:blipFill>
+          </p:spPr>
+        </p:sp>
+        <p:sp>
+          <p:nvSpPr>
+            <p:cNvPr name="Freeform 8" id="8"/>
+            <p:cNvSpPr/>
+            <p:nvPr/>
+          </p:nvSpPr>
+          <p:spPr>
+            <a:xfrm flipH="false" flipV="false" rot="0">
+              <a:off x="812800" y="127000"/>
+              <a:ext cx="2413000" cy="504536"/>
+            </a:xfrm>
+            <a:custGeom>
+              <a:avLst/>
+              <a:gdLst/>
+              <a:ahLst/>
+              <a:cxnLst/>
+              <a:rect r="r" b="b" t="t" l="l"/>
+              <a:pathLst>
+                <a:path h="504536" w="2413000">
+                  <a:moveTo>
+                    <a:pt x="0" y="0"/>
+                  </a:moveTo>
+                  <a:lnTo>
+                    <a:pt x="2413000" y="0"/>
+                  </a:lnTo>
+                  <a:lnTo>
+                    <a:pt x="2413000" y="504536"/>
+                  </a:lnTo>
+                  <a:lnTo>
+                    <a:pt x="0" y="504536"/>
+                  </a:lnTo>
+                  <a:lnTo>
+                    <a:pt x="0" y="0"/>
+                  </a:lnTo>
+                  <a:close/>
+                </a:path>
+              </a:pathLst>
+            </a:custGeom>
+            <a:blipFill>
+              <a:blip r:embed="rId7">
+                <a:extLst>
+                  <a:ext uri="{96DAC541-7B7A-43D3-8B79-37D633B846F1}">
+                    <asvg:svgBlip xmlns:asvg="http://schemas.microsoft.com/office/drawing/2016/SVG/main" r:embed="rId8"/>
+                  </a:ext>
+                </a:extLst>
+              </a:blip>
+              <a:stretch>
+                <a:fillRect l="0" t="0" r="0" b="0"/>
+              </a:stretch>
+            </a:blipFill>
+          </p:spPr>
+        </p:sp>
+      </p:grpSp>
+      <p:grpSp>
+        <p:nvGrpSpPr>
+          <p:cNvPr name="Group 9" id="9"/>
+          <p:cNvGrpSpPr/>
+          <p:nvPr/>
+        </p:nvGrpSpPr>
+        <p:grpSpPr>
+          <a:xfrm rot="0">
             <a:off x="609600" y="3648075"/>
             <a:ext cx="7029450" cy="1066800"/>
             <a:chOff x="0" y="0"/>
@@ -19051,7 +21125,7 @@
         </p:grpSpPr>
         <p:sp>
           <p:nvSpPr>
-            <p:cNvPr name="Freeform 6" id="6"/>
+            <p:cNvPr name="Freeform 10" id="10"/>
             <p:cNvSpPr/>
             <p:nvPr/>
           </p:nvSpPr>
@@ -19115,7 +21189,7 @@
       </p:grpSp>
       <p:grpSp>
         <p:nvGrpSpPr>
-          <p:cNvPr name="Group 7" id="7"/>
+          <p:cNvPr name="Group 11" id="11"/>
           <p:cNvGrpSpPr/>
           <p:nvPr/>
         </p:nvGrpSpPr>
@@ -19129,7 +21203,7 @@
         </p:grpSpPr>
         <p:sp>
           <p:nvSpPr>
-            <p:cNvPr name="Freeform 8" id="8"/>
+            <p:cNvPr name="Freeform 12" id="12"/>
             <p:cNvSpPr/>
             <p:nvPr/>
           </p:nvSpPr>
@@ -19166,7 +21240,7 @@
               </a:pathLst>
             </a:custGeom>
             <a:blipFill>
-              <a:blip r:embed="rId4"/>
+              <a:blip r:embed="rId9"/>
               <a:stretch>
                 <a:fillRect l="-78303" t="0" r="-78303" b="0"/>
               </a:stretch>
@@ -19176,7 +21250,7 @@
       </p:grpSp>
       <p:sp>
         <p:nvSpPr>
-          <p:cNvPr name="AutoShape 9" id="9"/>
+          <p:cNvPr name="AutoShape 13" id="13"/>
           <p:cNvSpPr/>
           <p:nvPr/>
         </p:nvSpPr>
@@ -19200,8 +21274,8 @@
       </p:sp>
       <p:sp>
         <p:nvSpPr>
-          <p:cNvPr name="Freeform 10" id="10">
-            <a:hlinkClick r:id="rId6" tooltip="https://backtrack-learning.vercel.app/demo"/>
+          <p:cNvPr name="Freeform 14" id="14">
+            <a:hlinkClick r:id="rId11" tooltip="https://backtrack-learning.vercel.app/demo"/>
           </p:cNvPr>
           <p:cNvSpPr/>
           <p:nvPr/>
@@ -19239,7 +21313,7 @@
             </a:pathLst>
           </a:custGeom>
           <a:blipFill>
-            <a:blip r:embed="rId5"/>
+            <a:blip r:embed="rId10"/>
             <a:stretch>
               <a:fillRect l="0" t="0" r="0" b="0"/>
             </a:stretch>
@@ -19248,7 +21322,7 @@
       </p:sp>
       <p:sp>
         <p:nvSpPr>
-          <p:cNvPr name="TextBox 11" id="11"/>
+          <p:cNvPr name="TextBox 15" id="15"/>
           <p:cNvSpPr txBox="true"/>
           <p:nvPr/>
         </p:nvSpPr>
@@ -19289,7 +21363,7 @@
       </p:sp>
       <p:sp>
         <p:nvSpPr>
-          <p:cNvPr name="TextBox 12" id="12"/>
+          <p:cNvPr name="TextBox 16" id="16"/>
           <p:cNvSpPr txBox="true"/>
           <p:nvPr/>
         </p:nvSpPr>
@@ -19330,7 +21404,7 @@
       </p:sp>
       <p:sp>
         <p:nvSpPr>
-          <p:cNvPr name="TextBox 13" id="13"/>
+          <p:cNvPr name="TextBox 17" id="17"/>
           <p:cNvSpPr txBox="true"/>
           <p:nvPr/>
         </p:nvSpPr>
@@ -19390,7 +21464,7 @@
       </p:sp>
       <p:sp>
         <p:nvSpPr>
-          <p:cNvPr name="TextBox 14" id="14"/>
+          <p:cNvPr name="TextBox 18" id="18"/>
           <p:cNvSpPr txBox="true"/>
           <p:nvPr/>
         </p:nvSpPr>
@@ -19423,7 +21497,7 @@
                 <a:ea typeface="DM Sans"/>
                 <a:cs typeface="DM Sans"/>
                 <a:sym typeface="DM Sans"/>
-                <a:hlinkClick r:id="rId7" tooltip="https://backtrack-learning.vercel.app/demo"/>
+                <a:hlinkClick r:id="rId12" tooltip="https://backtrack-learning.vercel.app/demo"/>
               </a:rPr>
               <a:t>Try BACKTRACK</a:t>
             </a:r>
@@ -19432,7 +21506,7 @@
       </p:sp>
       <p:sp>
         <p:nvSpPr>
-          <p:cNvPr name="TextBox 15" id="15"/>
+          <p:cNvPr name="TextBox 19" id="19"/>
           <p:cNvSpPr txBox="true"/>
           <p:nvPr/>
         </p:nvSpPr>
@@ -19465,7 +21539,7 @@
                 <a:ea typeface="DM Sans"/>
                 <a:cs typeface="DM Sans"/>
                 <a:sym typeface="DM Sans"/>
-                <a:hlinkClick r:id="rId8" tooltip="https://backtrack-learning.vercel.app/demo"/>
+                <a:hlinkClick r:id="rId13" tooltip="https://backtrack-learning.vercel.app/demo"/>
               </a:rPr>
               <a:t>backtrack-learning.vercel.app/demo</a:t>
             </a:r>
@@ -19474,7 +21548,7 @@
       </p:sp>
       <p:sp>
         <p:nvSpPr>
-          <p:cNvPr name="TextBox 16" id="16"/>
+          <p:cNvPr name="TextBox 20" id="20"/>
           <p:cNvSpPr txBox="true"/>
           <p:nvPr/>
         </p:nvSpPr>
@@ -19515,7 +21589,7 @@
       </p:sp>
       <p:sp>
         <p:nvSpPr>
-          <p:cNvPr name="TextBox 17" id="17"/>
+          <p:cNvPr name="TextBox 21" id="21"/>
           <p:cNvSpPr txBox="true"/>
           <p:nvPr/>
         </p:nvSpPr>
@@ -19659,9 +21733,174 @@
           </p:spPr>
         </p:sp>
       </p:grpSp>
-      <p:sp>
-        <p:nvSpPr>
-          <p:cNvPr name="TextBox 5" id="5"/>
+      <p:grpSp>
+        <p:nvGrpSpPr>
+          <p:cNvPr name="Group 5" id="5"/>
+          <p:cNvGrpSpPr/>
+          <p:nvPr/>
+        </p:nvGrpSpPr>
+        <p:grpSpPr>
+          <a:xfrm rot="0">
+            <a:off x="0" y="0"/>
+            <a:ext cx="12192000" cy="6858000"/>
+            <a:chOff x="0" y="0"/>
+            <a:chExt cx="16256000" cy="9144000"/>
+          </a:xfrm>
+        </p:grpSpPr>
+        <p:sp>
+          <p:nvSpPr>
+            <p:cNvPr name="Freeform 6" id="6"/>
+            <p:cNvSpPr/>
+            <p:nvPr/>
+          </p:nvSpPr>
+          <p:spPr>
+            <a:xfrm flipH="false" flipV="false" rot="0">
+              <a:off x="0" y="0"/>
+              <a:ext cx="16256000" cy="9144000"/>
+            </a:xfrm>
+            <a:custGeom>
+              <a:avLst/>
+              <a:gdLst/>
+              <a:ahLst/>
+              <a:cxnLst/>
+              <a:rect r="r" b="b" t="t" l="l"/>
+              <a:pathLst>
+                <a:path h="9144000" w="16256000">
+                  <a:moveTo>
+                    <a:pt x="0" y="0"/>
+                  </a:moveTo>
+                  <a:lnTo>
+                    <a:pt x="16256000" y="0"/>
+                  </a:lnTo>
+                  <a:lnTo>
+                    <a:pt x="16256000" y="9144000"/>
+                  </a:lnTo>
+                  <a:lnTo>
+                    <a:pt x="0" y="9144000"/>
+                  </a:lnTo>
+                  <a:lnTo>
+                    <a:pt x="0" y="0"/>
+                  </a:lnTo>
+                  <a:close/>
+                </a:path>
+              </a:pathLst>
+            </a:custGeom>
+            <a:blipFill>
+              <a:blip r:embed="rId4">
+                <a:extLst>
+                  <a:ext uri="{96DAC541-7B7A-43D3-8B79-37D633B846F1}">
+                    <asvg:svgBlip xmlns:asvg="http://schemas.microsoft.com/office/drawing/2016/SVG/main" r:embed="rId5"/>
+                  </a:ext>
+                </a:extLst>
+              </a:blip>
+              <a:stretch>
+                <a:fillRect l="0" t="0" r="0" b="0"/>
+              </a:stretch>
+            </a:blipFill>
+          </p:spPr>
+        </p:sp>
+        <p:sp>
+          <p:nvSpPr>
+            <p:cNvPr name="Freeform 7" id="7"/>
+            <p:cNvSpPr/>
+            <p:nvPr/>
+          </p:nvSpPr>
+          <p:spPr>
+            <a:xfrm flipH="false" flipV="false" rot="0">
+              <a:off x="11887200" y="0"/>
+              <a:ext cx="3556000" cy="803656"/>
+            </a:xfrm>
+            <a:custGeom>
+              <a:avLst/>
+              <a:gdLst/>
+              <a:ahLst/>
+              <a:cxnLst/>
+              <a:rect r="r" b="b" t="t" l="l"/>
+              <a:pathLst>
+                <a:path h="803656" w="3556000">
+                  <a:moveTo>
+                    <a:pt x="0" y="0"/>
+                  </a:moveTo>
+                  <a:lnTo>
+                    <a:pt x="3556000" y="0"/>
+                  </a:lnTo>
+                  <a:lnTo>
+                    <a:pt x="3556000" y="803656"/>
+                  </a:lnTo>
+                  <a:lnTo>
+                    <a:pt x="0" y="803656"/>
+                  </a:lnTo>
+                  <a:lnTo>
+                    <a:pt x="0" y="0"/>
+                  </a:lnTo>
+                  <a:close/>
+                </a:path>
+              </a:pathLst>
+            </a:custGeom>
+            <a:blipFill>
+              <a:blip r:embed="rId6"/>
+              <a:stretch>
+                <a:fillRect l="0" t="0" r="0" b="0"/>
+              </a:stretch>
+            </a:blipFill>
+          </p:spPr>
+        </p:sp>
+        <p:sp>
+          <p:nvSpPr>
+            <p:cNvPr name="Freeform 8" id="8"/>
+            <p:cNvSpPr/>
+            <p:nvPr/>
+          </p:nvSpPr>
+          <p:spPr>
+            <a:xfrm flipH="false" flipV="false" rot="0">
+              <a:off x="812800" y="127000"/>
+              <a:ext cx="2413000" cy="504536"/>
+            </a:xfrm>
+            <a:custGeom>
+              <a:avLst/>
+              <a:gdLst/>
+              <a:ahLst/>
+              <a:cxnLst/>
+              <a:rect r="r" b="b" t="t" l="l"/>
+              <a:pathLst>
+                <a:path h="504536" w="2413000">
+                  <a:moveTo>
+                    <a:pt x="0" y="0"/>
+                  </a:moveTo>
+                  <a:lnTo>
+                    <a:pt x="2413000" y="0"/>
+                  </a:lnTo>
+                  <a:lnTo>
+                    <a:pt x="2413000" y="504536"/>
+                  </a:lnTo>
+                  <a:lnTo>
+                    <a:pt x="0" y="504536"/>
+                  </a:lnTo>
+                  <a:lnTo>
+                    <a:pt x="0" y="0"/>
+                  </a:lnTo>
+                  <a:close/>
+                </a:path>
+              </a:pathLst>
+            </a:custGeom>
+            <a:blipFill>
+              <a:blip r:embed="rId7">
+                <a:extLst>
+                  <a:ext uri="{96DAC541-7B7A-43D3-8B79-37D633B846F1}">
+                    <asvg:svgBlip xmlns:asvg="http://schemas.microsoft.com/office/drawing/2016/SVG/main" r:embed="rId8"/>
+                  </a:ext>
+                </a:extLst>
+              </a:blip>
+              <a:stretch>
+                <a:fillRect l="0" t="0" r="0" b="0"/>
+              </a:stretch>
+            </a:blipFill>
+          </p:spPr>
+        </p:sp>
+      </p:grpSp>
+      <p:sp>
+        <p:nvSpPr>
+          <p:cNvPr name="TextBox 9" id="9"/>
           <p:cNvSpPr txBox="true"/>
           <p:nvPr/>
         </p:nvSpPr>
@@ -19702,7 +21941,7 @@
       </p:sp>
       <p:sp>
         <p:nvSpPr>
-          <p:cNvPr name="TextBox 6" id="6"/>
+          <p:cNvPr name="TextBox 10" id="10"/>
           <p:cNvSpPr txBox="true"/>
           <p:nvPr/>
         </p:nvSpPr>
@@ -19743,7 +21982,7 @@
       </p:sp>
       <p:grpSp>
         <p:nvGrpSpPr>
-          <p:cNvPr name="Group 7" id="7"/>
+          <p:cNvPr name="Group 11" id="11"/>
           <p:cNvGrpSpPr/>
           <p:nvPr/>
         </p:nvGrpSpPr>
@@ -19757,7 +21996,7 @@
         </p:grpSpPr>
         <p:sp>
           <p:nvSpPr>
-            <p:cNvPr name="Freeform 8" id="8"/>
+            <p:cNvPr name="Freeform 12" id="12"/>
             <p:cNvSpPr/>
             <p:nvPr/>
           </p:nvSpPr>
@@ -19809,7 +22048,7 @@
       </p:grpSp>
       <p:sp>
         <p:nvSpPr>
-          <p:cNvPr name="TextBox 9" id="9"/>
+          <p:cNvPr name="TextBox 13" id="13"/>
           <p:cNvSpPr txBox="true"/>
           <p:nvPr/>
         </p:nvSpPr>
@@ -19850,7 +22089,7 @@
       </p:sp>
       <p:sp>
         <p:nvSpPr>
-          <p:cNvPr name="TextBox 10" id="10"/>
+          <p:cNvPr name="TextBox 14" id="14"/>
           <p:cNvSpPr txBox="true"/>
           <p:nvPr/>
         </p:nvSpPr>
@@ -19891,7 +22130,7 @@
       </p:sp>
       <p:sp>
         <p:nvSpPr>
-          <p:cNvPr name="AutoShape 11" id="11"/>
+          <p:cNvPr name="AutoShape 15" id="15"/>
           <p:cNvSpPr/>
           <p:nvPr/>
         </p:nvSpPr>
@@ -19910,7 +22149,7 @@
       </p:sp>
       <p:grpSp>
         <p:nvGrpSpPr>
-          <p:cNvPr name="Group 12" id="12"/>
+          <p:cNvPr name="Group 16" id="16"/>
           <p:cNvGrpSpPr/>
           <p:nvPr/>
         </p:nvGrpSpPr>
@@ -19924,7 +22163,7 @@
         </p:grpSpPr>
         <p:sp>
           <p:nvSpPr>
-            <p:cNvPr name="Freeform 13" id="13"/>
+            <p:cNvPr name="Freeform 17" id="17"/>
             <p:cNvSpPr/>
             <p:nvPr/>
           </p:nvSpPr>
@@ -19982,7 +22221,7 @@
       </p:grpSp>
       <p:grpSp>
         <p:nvGrpSpPr>
-          <p:cNvPr name="Group 14" id="14"/>
+          <p:cNvPr name="Group 18" id="18"/>
           <p:cNvGrpSpPr/>
           <p:nvPr/>
         </p:nvGrpSpPr>
@@ -19996,7 +22235,7 @@
         </p:grpSpPr>
         <p:sp>
           <p:nvSpPr>
-            <p:cNvPr name="Freeform 15" id="15"/>
+            <p:cNvPr name="Freeform 19" id="19"/>
             <p:cNvSpPr/>
             <p:nvPr/>
           </p:nvSpPr>
@@ -20054,7 +22293,7 @@
       </p:grpSp>
       <p:grpSp>
         <p:nvGrpSpPr>
-          <p:cNvPr name="Group 16" id="16"/>
+          <p:cNvPr name="Group 20" id="20"/>
           <p:cNvGrpSpPr/>
           <p:nvPr/>
         </p:nvGrpSpPr>
@@ -20068,7 +22307,7 @@
         </p:grpSpPr>
         <p:sp>
           <p:nvSpPr>
-            <p:cNvPr name="Freeform 17" id="17"/>
+            <p:cNvPr name="Freeform 21" id="21"/>
             <p:cNvSpPr/>
             <p:nvPr/>
           </p:nvSpPr>
@@ -20120,7 +22359,7 @@
       </p:grpSp>
       <p:sp>
         <p:nvSpPr>
-          <p:cNvPr name="TextBox 18" id="18"/>
+          <p:cNvPr name="TextBox 22" id="22"/>
           <p:cNvSpPr txBox="true"/>
           <p:nvPr/>
         </p:nvSpPr>
@@ -20161,7 +22400,7 @@
       </p:sp>
       <p:sp>
         <p:nvSpPr>
-          <p:cNvPr name="TextBox 19" id="19"/>
+          <p:cNvPr name="TextBox 23" id="23"/>
           <p:cNvSpPr txBox="true"/>
           <p:nvPr/>
         </p:nvSpPr>
@@ -20202,7 +22441,7 @@
       </p:sp>
       <p:sp>
         <p:nvSpPr>
-          <p:cNvPr name="AutoShape 20" id="20"/>
+          <p:cNvPr name="AutoShape 24" id="24"/>
           <p:cNvSpPr/>
           <p:nvPr/>
         </p:nvSpPr>
@@ -20221,7 +22460,7 @@
       </p:sp>
       <p:grpSp>
         <p:nvGrpSpPr>
-          <p:cNvPr name="Group 21" id="21"/>
+          <p:cNvPr name="Group 25" id="25"/>
           <p:cNvGrpSpPr/>
           <p:nvPr/>
         </p:nvGrpSpPr>
@@ -20235,7 +22474,7 @@
         </p:grpSpPr>
         <p:sp>
           <p:nvSpPr>
-            <p:cNvPr name="Freeform 22" id="22"/>
+            <p:cNvPr name="Freeform 26" id="26"/>
             <p:cNvSpPr/>
             <p:nvPr/>
           </p:nvSpPr>
@@ -20293,7 +22532,7 @@
       </p:grpSp>
       <p:grpSp>
         <p:nvGrpSpPr>
-          <p:cNvPr name="Group 23" id="23"/>
+          <p:cNvPr name="Group 27" id="27"/>
           <p:cNvGrpSpPr/>
           <p:nvPr/>
         </p:nvGrpSpPr>
@@ -20307,7 +22546,7 @@
         </p:grpSpPr>
         <p:sp>
           <p:nvSpPr>
-            <p:cNvPr name="Freeform 24" id="24"/>
+            <p:cNvPr name="Freeform 28" id="28"/>
             <p:cNvSpPr/>
             <p:nvPr/>
           </p:nvSpPr>
@@ -20365,7 +22604,7 @@
       </p:grpSp>
       <p:grpSp>
         <p:nvGrpSpPr>
-          <p:cNvPr name="Group 25" id="25"/>
+          <p:cNvPr name="Group 29" id="29"/>
           <p:cNvGrpSpPr/>
           <p:nvPr/>
         </p:nvGrpSpPr>
@@ -20379,7 +22618,7 @@
         </p:grpSpPr>
         <p:sp>
           <p:nvSpPr>
-            <p:cNvPr name="Freeform 26" id="26"/>
+            <p:cNvPr name="Freeform 30" id="30"/>
             <p:cNvSpPr/>
             <p:nvPr/>
           </p:nvSpPr>
@@ -20431,7 +22670,7 @@
       </p:grpSp>
       <p:sp>
         <p:nvSpPr>
-          <p:cNvPr name="TextBox 27" id="27"/>
+          <p:cNvPr name="TextBox 31" id="31"/>
           <p:cNvSpPr txBox="true"/>
           <p:nvPr/>
         </p:nvSpPr>
@@ -20472,7 +22711,7 @@
       </p:sp>
       <p:sp>
         <p:nvSpPr>
-          <p:cNvPr name="TextBox 28" id="28"/>
+          <p:cNvPr name="TextBox 32" id="32"/>
           <p:cNvSpPr txBox="true"/>
           <p:nvPr/>
         </p:nvSpPr>
@@ -20513,7 +22752,7 @@
       </p:sp>
       <p:sp>
         <p:nvSpPr>
-          <p:cNvPr name="TextBox 29" id="29"/>
+          <p:cNvPr name="TextBox 33" id="33"/>
           <p:cNvSpPr txBox="true"/>
           <p:nvPr/>
         </p:nvSpPr>
@@ -20554,7 +22793,7 @@
       </p:sp>
       <p:sp>
         <p:nvSpPr>
-          <p:cNvPr name="TextBox 30" id="30"/>
+          <p:cNvPr name="TextBox 34" id="34"/>
           <p:cNvSpPr txBox="true"/>
           <p:nvPr/>
         </p:nvSpPr>
@@ -20595,7 +22834,7 @@
       </p:sp>
       <p:sp>
         <p:nvSpPr>
-          <p:cNvPr name="TextBox 31" id="31"/>
+          <p:cNvPr name="TextBox 35" id="35"/>
           <p:cNvSpPr txBox="true"/>
           <p:nvPr/>
         </p:nvSpPr>
@@ -20628,7 +22867,7 @@
                 <a:ea typeface="DM Sans"/>
                 <a:cs typeface="DM Sans"/>
                 <a:sym typeface="DM Sans"/>
-                <a:hlinkClick r:id="rId4" tooltip="https://doi.org/10.1038/s44159-022-00089-1"/>
+                <a:hlinkClick r:id="rId9" tooltip="https://doi.org/10.1038/s44159-022-00089-1"/>
               </a:rPr>
               <a:t>Spacing and retrieval · 2022</a:t>
             </a:r>
@@ -20637,7 +22876,7 @@
       </p:sp>
       <p:sp>
         <p:nvSpPr>
-          <p:cNvPr name="AutoShape 32" id="32"/>
+          <p:cNvPr name="AutoShape 36" id="36"/>
           <p:cNvSpPr/>
           <p:nvPr/>
         </p:nvSpPr>
@@ -20764,9 +23003,174 @@
           </p:spPr>
         </p:sp>
       </p:grpSp>
-      <p:sp>
-        <p:nvSpPr>
-          <p:cNvPr name="TextBox 5" id="5"/>
+      <p:grpSp>
+        <p:nvGrpSpPr>
+          <p:cNvPr name="Group 5" id="5"/>
+          <p:cNvGrpSpPr/>
+          <p:nvPr/>
+        </p:nvGrpSpPr>
+        <p:grpSpPr>
+          <a:xfrm rot="0">
+            <a:off x="0" y="0"/>
+            <a:ext cx="12192000" cy="6858000"/>
+            <a:chOff x="0" y="0"/>
+            <a:chExt cx="16256000" cy="9144000"/>
+          </a:xfrm>
+        </p:grpSpPr>
+        <p:sp>
+          <p:nvSpPr>
+            <p:cNvPr name="Freeform 6" id="6"/>
+            <p:cNvSpPr/>
+            <p:nvPr/>
+          </p:nvSpPr>
+          <p:spPr>
+            <a:xfrm flipH="false" flipV="false" rot="0">
+              <a:off x="0" y="0"/>
+              <a:ext cx="16256000" cy="9144000"/>
+            </a:xfrm>
+            <a:custGeom>
+              <a:avLst/>
+              <a:gdLst/>
+              <a:ahLst/>
+              <a:cxnLst/>
+              <a:rect r="r" b="b" t="t" l="l"/>
+              <a:pathLst>
+                <a:path h="9144000" w="16256000">
+                  <a:moveTo>
+                    <a:pt x="0" y="0"/>
+                  </a:moveTo>
+                  <a:lnTo>
+                    <a:pt x="16256000" y="0"/>
+                  </a:lnTo>
+                  <a:lnTo>
+                    <a:pt x="16256000" y="9144000"/>
+                  </a:lnTo>
+                  <a:lnTo>
+                    <a:pt x="0" y="9144000"/>
+                  </a:lnTo>
+                  <a:lnTo>
+                    <a:pt x="0" y="0"/>
+                  </a:lnTo>
+                  <a:close/>
+                </a:path>
+              </a:pathLst>
+            </a:custGeom>
+            <a:blipFill>
+              <a:blip r:embed="rId4">
+                <a:extLst>
+                  <a:ext uri="{96DAC541-7B7A-43D3-8B79-37D633B846F1}">
+                    <asvg:svgBlip xmlns:asvg="http://schemas.microsoft.com/office/drawing/2016/SVG/main" r:embed="rId5"/>
+                  </a:ext>
+                </a:extLst>
+              </a:blip>
+              <a:stretch>
+                <a:fillRect l="0" t="0" r="0" b="0"/>
+              </a:stretch>
+            </a:blipFill>
+          </p:spPr>
+        </p:sp>
+        <p:sp>
+          <p:nvSpPr>
+            <p:cNvPr name="Freeform 7" id="7"/>
+            <p:cNvSpPr/>
+            <p:nvPr/>
+          </p:nvSpPr>
+          <p:spPr>
+            <a:xfrm flipH="false" flipV="false" rot="0">
+              <a:off x="11887200" y="0"/>
+              <a:ext cx="3556000" cy="803656"/>
+            </a:xfrm>
+            <a:custGeom>
+              <a:avLst/>
+              <a:gdLst/>
+              <a:ahLst/>
+              <a:cxnLst/>
+              <a:rect r="r" b="b" t="t" l="l"/>
+              <a:pathLst>
+                <a:path h="803656" w="3556000">
+                  <a:moveTo>
+                    <a:pt x="0" y="0"/>
+                  </a:moveTo>
+                  <a:lnTo>
+                    <a:pt x="3556000" y="0"/>
+                  </a:lnTo>
+                  <a:lnTo>
+                    <a:pt x="3556000" y="803656"/>
+                  </a:lnTo>
+                  <a:lnTo>
+                    <a:pt x="0" y="803656"/>
+                  </a:lnTo>
+                  <a:lnTo>
+                    <a:pt x="0" y="0"/>
+                  </a:lnTo>
+                  <a:close/>
+                </a:path>
+              </a:pathLst>
+            </a:custGeom>
+            <a:blipFill>
+              <a:blip r:embed="rId6"/>
+              <a:stretch>
+                <a:fillRect l="0" t="0" r="0" b="0"/>
+              </a:stretch>
+            </a:blipFill>
+          </p:spPr>
+        </p:sp>
+        <p:sp>
+          <p:nvSpPr>
+            <p:cNvPr name="Freeform 8" id="8"/>
+            <p:cNvSpPr/>
+            <p:nvPr/>
+          </p:nvSpPr>
+          <p:spPr>
+            <a:xfrm flipH="false" flipV="false" rot="0">
+              <a:off x="812800" y="127000"/>
+              <a:ext cx="2413000" cy="504536"/>
+            </a:xfrm>
+            <a:custGeom>
+              <a:avLst/>
+              <a:gdLst/>
+              <a:ahLst/>
+              <a:cxnLst/>
+              <a:rect r="r" b="b" t="t" l="l"/>
+              <a:pathLst>
+                <a:path h="504536" w="2413000">
+                  <a:moveTo>
+                    <a:pt x="0" y="0"/>
+                  </a:moveTo>
+                  <a:lnTo>
+                    <a:pt x="2413000" y="0"/>
+                  </a:lnTo>
+                  <a:lnTo>
+                    <a:pt x="2413000" y="504536"/>
+                  </a:lnTo>
+                  <a:lnTo>
+                    <a:pt x="0" y="504536"/>
+                  </a:lnTo>
+                  <a:lnTo>
+                    <a:pt x="0" y="0"/>
+                  </a:lnTo>
+                  <a:close/>
+                </a:path>
+              </a:pathLst>
+            </a:custGeom>
+            <a:blipFill>
+              <a:blip r:embed="rId7">
+                <a:extLst>
+                  <a:ext uri="{96DAC541-7B7A-43D3-8B79-37D633B846F1}">
+                    <asvg:svgBlip xmlns:asvg="http://schemas.microsoft.com/office/drawing/2016/SVG/main" r:embed="rId8"/>
+                  </a:ext>
+                </a:extLst>
+              </a:blip>
+              <a:stretch>
+                <a:fillRect l="0" t="0" r="0" b="0"/>
+              </a:stretch>
+            </a:blipFill>
+          </p:spPr>
+        </p:sp>
+      </p:grpSp>
+      <p:sp>
+        <p:nvSpPr>
+          <p:cNvPr name="TextBox 9" id="9"/>
           <p:cNvSpPr txBox="true"/>
           <p:nvPr/>
         </p:nvSpPr>
@@ -20807,7 +23211,7 @@
       </p:sp>
       <p:sp>
         <p:nvSpPr>
-          <p:cNvPr name="TextBox 6" id="6"/>
+          <p:cNvPr name="TextBox 10" id="10"/>
           <p:cNvSpPr txBox="true"/>
           <p:nvPr/>
         </p:nvSpPr>
@@ -20848,7 +23252,7 @@
       </p:sp>
       <p:sp>
         <p:nvSpPr>
-          <p:cNvPr name="TextBox 7" id="7"/>
+          <p:cNvPr name="TextBox 11" id="11"/>
           <p:cNvSpPr txBox="true"/>
           <p:nvPr/>
         </p:nvSpPr>
@@ -20889,7 +23293,7 @@
       </p:sp>
       <p:sp>
         <p:nvSpPr>
-          <p:cNvPr name="AutoShape 8" id="8"/>
+          <p:cNvPr name="AutoShape 12" id="12"/>
           <p:cNvSpPr/>
           <p:nvPr/>
         </p:nvSpPr>
@@ -20908,7 +23312,7 @@
       </p:sp>
       <p:grpSp>
         <p:nvGrpSpPr>
-          <p:cNvPr name="Group 9" id="9"/>
+          <p:cNvPr name="Group 13" id="13"/>
           <p:cNvGrpSpPr/>
           <p:nvPr/>
         </p:nvGrpSpPr>
@@ -20922,7 +23326,7 @@
         </p:grpSpPr>
         <p:sp>
           <p:nvSpPr>
-            <p:cNvPr name="Freeform 10" id="10"/>
+            <p:cNvPr name="Freeform 14" id="14"/>
             <p:cNvSpPr/>
             <p:nvPr/>
           </p:nvSpPr>
@@ -20974,7 +23378,7 @@
       </p:grpSp>
       <p:sp>
         <p:nvSpPr>
-          <p:cNvPr name="TextBox 11" id="11"/>
+          <p:cNvPr name="TextBox 15" id="15"/>
           <p:cNvSpPr txBox="true"/>
           <p:nvPr/>
         </p:nvSpPr>
@@ -21015,7 +23419,7 @@
       </p:sp>
       <p:sp>
         <p:nvSpPr>
-          <p:cNvPr name="TextBox 12" id="12"/>
+          <p:cNvPr name="TextBox 16" id="16"/>
           <p:cNvSpPr txBox="true"/>
           <p:nvPr/>
         </p:nvSpPr>
@@ -21056,7 +23460,7 @@
       </p:sp>
       <p:grpSp>
         <p:nvGrpSpPr>
-          <p:cNvPr name="Group 13" id="13"/>
+          <p:cNvPr name="Group 17" id="17"/>
           <p:cNvGrpSpPr/>
           <p:nvPr/>
         </p:nvGrpSpPr>
@@ -21070,7 +23474,7 @@
         </p:grpSpPr>
         <p:sp>
           <p:nvSpPr>
-            <p:cNvPr name="Freeform 14" id="14"/>
+            <p:cNvPr name="Freeform 18" id="18"/>
             <p:cNvSpPr/>
             <p:nvPr/>
           </p:nvSpPr>
@@ -21122,7 +23526,7 @@
       </p:grpSp>
       <p:sp>
         <p:nvSpPr>
-          <p:cNvPr name="TextBox 15" id="15"/>
+          <p:cNvPr name="TextBox 19" id="19"/>
           <p:cNvSpPr txBox="true"/>
           <p:nvPr/>
         </p:nvSpPr>
@@ -21163,7 +23567,7 @@
       </p:sp>
       <p:sp>
         <p:nvSpPr>
-          <p:cNvPr name="TextBox 16" id="16"/>
+          <p:cNvPr name="TextBox 20" id="20"/>
           <p:cNvSpPr txBox="true"/>
           <p:nvPr/>
         </p:nvSpPr>
@@ -21204,7 +23608,7 @@
       </p:sp>
       <p:grpSp>
         <p:nvGrpSpPr>
-          <p:cNvPr name="Group 17" id="17"/>
+          <p:cNvPr name="Group 21" id="21"/>
           <p:cNvGrpSpPr/>
           <p:nvPr/>
         </p:nvGrpSpPr>
@@ -21218,7 +23622,7 @@
         </p:grpSpPr>
         <p:sp>
           <p:nvSpPr>
-            <p:cNvPr name="Freeform 18" id="18"/>
+            <p:cNvPr name="Freeform 22" id="22"/>
             <p:cNvSpPr/>
             <p:nvPr/>
           </p:nvSpPr>
@@ -21270,7 +23674,7 @@
       </p:grpSp>
       <p:sp>
         <p:nvSpPr>
-          <p:cNvPr name="TextBox 19" id="19"/>
+          <p:cNvPr name="TextBox 23" id="23"/>
           <p:cNvSpPr txBox="true"/>
           <p:nvPr/>
         </p:nvSpPr>
@@ -21311,7 +23715,7 @@
       </p:sp>
       <p:sp>
         <p:nvSpPr>
-          <p:cNvPr name="TextBox 20" id="20"/>
+          <p:cNvPr name="TextBox 24" id="24"/>
           <p:cNvSpPr txBox="true"/>
           <p:nvPr/>
         </p:nvSpPr>
@@ -21352,7 +23756,7 @@
       </p:sp>
       <p:grpSp>
         <p:nvGrpSpPr>
-          <p:cNvPr name="Group 21" id="21"/>
+          <p:cNvPr name="Group 25" id="25"/>
           <p:cNvGrpSpPr/>
           <p:nvPr/>
         </p:nvGrpSpPr>
@@ -21366,7 +23770,7 @@
         </p:grpSpPr>
         <p:sp>
           <p:nvSpPr>
-            <p:cNvPr name="Freeform 22" id="22"/>
+            <p:cNvPr name="Freeform 26" id="26"/>
             <p:cNvSpPr/>
             <p:nvPr/>
           </p:nvSpPr>
@@ -21418,7 +23822,7 @@
       </p:grpSp>
       <p:sp>
         <p:nvSpPr>
-          <p:cNvPr name="TextBox 23" id="23"/>
+          <p:cNvPr name="TextBox 27" id="27"/>
           <p:cNvSpPr txBox="true"/>
           <p:nvPr/>
         </p:nvSpPr>
@@ -21459,7 +23863,7 @@
       </p:sp>
       <p:sp>
         <p:nvSpPr>
-          <p:cNvPr name="TextBox 24" id="24"/>
+          <p:cNvPr name="TextBox 28" id="28"/>
           <p:cNvSpPr txBox="true"/>
           <p:nvPr/>
         </p:nvSpPr>
@@ -21500,7 +23904,7 @@
       </p:sp>
       <p:grpSp>
         <p:nvGrpSpPr>
-          <p:cNvPr name="Group 25" id="25"/>
+          <p:cNvPr name="Group 29" id="29"/>
           <p:cNvGrpSpPr/>
           <p:nvPr/>
         </p:nvGrpSpPr>
@@ -21514,7 +23918,7 @@
         </p:grpSpPr>
         <p:sp>
           <p:nvSpPr>
-            <p:cNvPr name="Freeform 26" id="26"/>
+            <p:cNvPr name="Freeform 30" id="30"/>
             <p:cNvSpPr/>
             <p:nvPr/>
           </p:nvSpPr>
@@ -21566,7 +23970,7 @@
       </p:grpSp>
       <p:sp>
         <p:nvSpPr>
-          <p:cNvPr name="TextBox 27" id="27"/>
+          <p:cNvPr name="TextBox 31" id="31"/>
           <p:cNvSpPr txBox="true"/>
           <p:nvPr/>
         </p:nvSpPr>
@@ -21607,7 +24011,7 @@
       </p:sp>
       <p:sp>
         <p:nvSpPr>
-          <p:cNvPr name="TextBox 28" id="28"/>
+          <p:cNvPr name="TextBox 32" id="32"/>
           <p:cNvSpPr txBox="true"/>
           <p:nvPr/>
         </p:nvSpPr>
@@ -21648,7 +24052,7 @@
       </p:sp>
       <p:sp>
         <p:nvSpPr>
-          <p:cNvPr name="TextBox 29" id="29"/>
+          <p:cNvPr name="TextBox 33" id="33"/>
           <p:cNvSpPr txBox="true"/>
           <p:nvPr/>
         </p:nvSpPr>
@@ -21689,7 +24093,7 @@
       </p:sp>
       <p:sp>
         <p:nvSpPr>
-          <p:cNvPr name="TextBox 30" id="30"/>
+          <p:cNvPr name="TextBox 34" id="34"/>
           <p:cNvSpPr txBox="true"/>
           <p:nvPr/>
         </p:nvSpPr>
@@ -21730,7 +24134,7 @@
       </p:sp>
       <p:sp>
         <p:nvSpPr>
-          <p:cNvPr name="AutoShape 31" id="31"/>
+          <p:cNvPr name="AutoShape 35" id="35"/>
           <p:cNvSpPr/>
           <p:nvPr/>
         </p:nvSpPr>
